--- a/lecons/F3/31_FORM4_LESSON27_SemiArid_Desert_Landscapes.pptx
+++ b/lecons/F3/31_FORM4_LESSON27_SemiArid_Desert_Landscapes.pptx
@@ -53,9 +53,14 @@
     <p:sldId id="301" r:id="rId47"/>
     <p:sldId id="302" r:id="rId48"/>
     <p:sldId id="303" r:id="rId49"/>
+    <p:sldId id="304" r:id="rId50"/>
+    <p:sldId id="305" r:id="rId51"/>
+    <p:sldId id="306" r:id="rId52"/>
+    <p:sldId id="307" r:id="rId53"/>
+    <p:sldId id="308" r:id="rId54"/>
   </p:sldIdLst>
   <p:notesMasterIdLst>
-    <p:notesMasterId r:id="rId50"/>
+    <p:notesMasterId r:id="rId55"/>
   </p:notesMasterIdLst>
   <p:sldSz cx="12192000" cy="6858000"/>
   <p:notesSz cx="6858000" cy="12192000"/>
@@ -637,7 +642,7 @@
           <a:p>
             <a:r>
               <a:rPr lang="en-US" dirty="0"/>
-              <a:t>Listen carefully to this situation from real life. During the Harmattan, Moussa sees that the old wall of his compound is worn near the ground, but the top is still smooth. The worn side faces the north-east, where the Harmattan comes from. Think about it, because I am going to ask you some questions.</a:t>
+              <a:t>Listen carefully to this situation from real life. During the Harmattan, Moussa sees that the old wall of his compound is worn near the ground but still smooth at the top. The worn side faces the north-east, where the dusty wind comes from. He asks: "How can the wind wear away a wall, and what does it do to the rocks of the desert?" Think about it, because I am going to ask you some questions.</a:t>
             </a:r>
             <a:endParaRPr lang="en-US" dirty="0"/>
           </a:p>
@@ -813,7 +818,7 @@
           <a:p>
             <a:r>
               <a:rPr lang="en-US" dirty="0"/>
-              <a:t>Good. Moussa does not know how the wind wore away the wall.</a:t>
+              <a:t>Good. Moussa does not know how the wind wears away walls and rocks.</a:t>
             </a:r>
             <a:endParaRPr lang="en-US" dirty="0"/>
           </a:p>
@@ -901,7 +906,7 @@
           <a:p>
             <a:r>
               <a:rPr lang="en-US" dirty="0"/>
-              <a:t>Question 2: Which part of the wall is worn? Think for a moment, then raise your hand to answer.</a:t>
+              <a:t>Question 2: Where is the wall worn? Think for a moment, then raise your hand to answer.</a:t>
             </a:r>
             <a:endParaRPr lang="en-US" dirty="0"/>
           </a:p>
@@ -989,7 +994,7 @@
           <a:p>
             <a:r>
               <a:rPr lang="en-US" dirty="0"/>
-              <a:t>Good. The bottom, facing the north-east.</a:t>
+              <a:t>Good. Near the ground, on the side facing the north-east.</a:t>
             </a:r>
             <a:endParaRPr lang="en-US" dirty="0"/>
           </a:p>
@@ -1077,7 +1082,7 @@
           <a:p>
             <a:r>
               <a:rPr lang="en-US" dirty="0"/>
-              <a:t>Question 3: What can protect the wall? Think for a moment, then raise your hand to answer.</a:t>
+              <a:t>Question 3: Which wind comes from the north-east? Think for a moment, then raise your hand to answer.</a:t>
             </a:r>
             <a:endParaRPr lang="en-US" dirty="0"/>
           </a:p>
@@ -1165,7 +1170,7 @@
           <a:p>
             <a:r>
               <a:rPr lang="en-US" dirty="0"/>
-              <a:t>Good. A hedge or trees that stop the wind.</a:t>
+              <a:t>Good. The Harmattan.</a:t>
             </a:r>
             <a:endParaRPr lang="en-US" dirty="0"/>
           </a:p>
@@ -1605,7 +1610,7 @@
           <a:p>
             <a:r>
               <a:rPr lang="en-US" dirty="0"/>
-              <a:t>Here is the question for Activity 1: Name the largest hot desert. Which dry belt lies south of it? Take one minute to think and write your answer in your rough notebook.</a:t>
+              <a:t>Here is the question for Activity 1: Which is the largest hot desert of Africa? Take one minute to think and write your answer in your rough notebook.</a:t>
             </a:r>
             <a:endParaRPr lang="en-US" dirty="0"/>
           </a:p>
@@ -1693,7 +1698,7 @@
           <a:p>
             <a:r>
               <a:rPr lang="en-US" dirty="0"/>
-              <a:t>Let us check the answer together. The Sahara. The Sahel lies south of it.</a:t>
+              <a:t>Let us check the answer together. The Sahara.</a:t>
             </a:r>
             <a:endParaRPr lang="en-US" dirty="0"/>
           </a:p>
@@ -1781,7 +1786,7 @@
           <a:p>
             <a:r>
               <a:rPr lang="en-US" dirty="0"/>
-              <a:t>Activity 2. Look carefully at this animation: animation: the wind throws sand against a rock. Watch the animation to the end; it will play again.</a:t>
+              <a:t>Here is the next question: Which dry belt lies south of it? Take one minute to think and write your answer in your rough notebook.</a:t>
             </a:r>
             <a:endParaRPr lang="en-US" dirty="0"/>
           </a:p>
@@ -1869,7 +1874,7 @@
           <a:p>
             <a:r>
               <a:rPr lang="en-US" dirty="0"/>
-              <a:t>Here is the question for Activity 2: Why is the rock worn more at the bottom? Take one minute to think and write your answer in your rough notebook.</a:t>
+              <a:t>Let us check the answer together. The Sahel.</a:t>
             </a:r>
             <a:endParaRPr lang="en-US" dirty="0"/>
           </a:p>
@@ -1957,7 +1962,7 @@
           <a:p>
             <a:r>
               <a:rPr lang="en-US" dirty="0"/>
-              <a:t>Let us check the answer together. The wind carries most sand near the ground.</a:t>
+              <a:t>Activity 2. Look carefully at this animation: animation: sand blown against a rock. Watch the animation to the end; it will play again.</a:t>
             </a:r>
             <a:endParaRPr lang="en-US" dirty="0"/>
           </a:p>
@@ -2045,7 +2050,7 @@
           <a:p>
             <a:r>
               <a:rPr lang="en-US" dirty="0"/>
-              <a:t>Activity 3. Look carefully at this picture: a rock worn by the wind. Observe every detail before I ask the question.</a:t>
+              <a:t>Here is the question for Activity 2: Why is the rock worn more at the bottom? Take one minute to think and write your answer in your rough notebook.</a:t>
             </a:r>
             <a:endParaRPr lang="en-US" dirty="0"/>
           </a:p>
@@ -2133,7 +2138,7 @@
           <a:p>
             <a:r>
               <a:rPr lang="en-US" dirty="0"/>
-              <a:t>Here is the question for Activity 3: This rock is narrow at the bottom and wide at the top. What is it called? Take one minute to think and write your answer in your rough notebook.</a:t>
+              <a:t>Let us check the answer together. The wind carries most of its sand near the ground.</a:t>
             </a:r>
             <a:endParaRPr lang="en-US" dirty="0"/>
           </a:p>
@@ -2221,7 +2226,7 @@
           <a:p>
             <a:r>
               <a:rPr lang="en-US" dirty="0"/>
-              <a:t>Let us check the answer together. A rock pedestal (mushroom rock).</a:t>
+              <a:t>Activity 3. Look carefully at this picture: a rock narrow at the bottom and wide at the top. Observe every detail before I ask the question.</a:t>
             </a:r>
             <a:endParaRPr lang="en-US" dirty="0"/>
           </a:p>
@@ -2309,7 +2314,7 @@
           <a:p>
             <a:r>
               <a:rPr lang="en-US" dirty="0"/>
-              <a:t>Now we are going to copy the board summary. Write the title and the headings neatly in your notebooks. I will give you enough time for each slide, so do not rush.</a:t>
+              <a:t>Here is the question for Activity 3: What is this rock called? Take one minute to think and write your answer in your rough notebook.</a:t>
             </a:r>
             <a:endParaRPr lang="en-US" dirty="0"/>
           </a:p>
@@ -2397,7 +2402,7 @@
           <a:p>
             <a:r>
               <a:rPr lang="en-US" dirty="0"/>
-              <a:t>Let us copy Location of Semi-arid Areas and Hot Deserts in Africa. Dry lands in Africa are located as follows. On this slide we have Semi-arid region and The Sahara. Write each point on a new line, with the key term first, and explain it in your own words when we revise. When you finish, we go to the next slide.</a:t>
+              <a:t>Let us check the answer together. A rock pedestal (mushroom rock).</a:t>
             </a:r>
             <a:endParaRPr lang="en-US" dirty="0"/>
           </a:p>
@@ -2573,7 +2578,7 @@
           <a:p>
             <a:r>
               <a:rPr lang="en-US" dirty="0"/>
-              <a:t>We continue with Location of Semi-arid Areas and Hot Deserts in Africa. On this slide we have The Kalahari and the Namib and The Sahel. Write each point on a new line, with the key term first, and explain it in your own words when we revise.</a:t>
+              <a:t>Now we are going to copy the board summary. Write the title and the headings neatly in your notebooks. I will give you enough time for each slide, so do not rush.</a:t>
             </a:r>
             <a:endParaRPr lang="en-US" dirty="0"/>
           </a:p>
@@ -2661,7 +2666,7 @@
           <a:p>
             <a:r>
               <a:rPr lang="en-US" dirty="0"/>
-              <a:t>Now draw this illustration in your notebook: hot deserts. Give it a title and label it clearly.</a:t>
+              <a:t>Let us copy the definitions. The key terms of this lesson are defined as follows. On this slide we have Hot desert and Semi-arid region. Write each point on a new line, with the key term first, and explain it in your own words when we revise. When you finish, we go to the next slide.</a:t>
             </a:r>
             <a:endParaRPr lang="en-US" dirty="0"/>
           </a:p>
@@ -2749,7 +2754,7 @@
           <a:p>
             <a:r>
               <a:rPr lang="en-US" dirty="0"/>
-              <a:t>Let us copy Erosional Processes of Wind. Wind erodes the land through the following processes. On this slide we have Deflation and Abrasion. Write each point on a new line, with the key term first, and explain it in your own words when we revise. When you finish, we go to the next slide.</a:t>
+              <a:t>We continue with the definitions. On this slide we have Wind erosion. Write each point on a new line, with the key term first, and explain it in your own words when we revise.</a:t>
             </a:r>
             <a:endParaRPr lang="en-US" dirty="0"/>
           </a:p>
@@ -2837,7 +2842,7 @@
           <a:p>
             <a:r>
               <a:rPr lang="en-US" dirty="0"/>
-              <a:t>We continue with Erosional Processes of Wind. On this slide we have Attrition. Write each point on a new line, with the key term first, and explain it in your own words when we revise.</a:t>
+              <a:t>Let us copy Location of Semi-arid Areas and Hot Deserts in Africa. Dry lands in Africa are located as follows. Copy the point on The Sahara on the left, then draw the diagram on the right: hot deserts. Give it a title and label it clearly.</a:t>
             </a:r>
             <a:endParaRPr lang="en-US" dirty="0"/>
           </a:p>
@@ -2925,7 +2930,7 @@
           <a:p>
             <a:r>
               <a:rPr lang="en-US" dirty="0"/>
-              <a:t>Let us copy Erosional Features. Wind erosion forms the following features. On this slide we have Rock pedestal and Zeugen. Write each point on a new line, with the key term first, and explain it in your own words when we revise. When you finish, we go to the next slide.</a:t>
+              <a:t>We continue with Location of Semi-arid Areas and Hot Deserts in Africa. On this slide we have The Namib, The Kalahari and The Sahel. Write each point on a new line, with the key term first, and explain it in your own words when we revise. When you finish, we go to the next slide.</a:t>
             </a:r>
             <a:endParaRPr lang="en-US" dirty="0"/>
           </a:p>
@@ -3013,7 +3018,7 @@
           <a:p>
             <a:r>
               <a:rPr lang="en-US" dirty="0"/>
-              <a:t>We continue with Erosional Features. On this slide we have Yardangs and Inselberg. Write each point on a new line, with the key term first, and explain it in your own words when we revise.</a:t>
+              <a:t>We continue with Location of Semi-arid Areas and Hot Deserts in Africa. On this slide we have The Horn of Africa. Write each point on a new line, with the key term first, and explain it in your own words when we revise.</a:t>
             </a:r>
             <a:endParaRPr lang="en-US" dirty="0"/>
           </a:p>
@@ -3101,7 +3106,7 @@
           <a:p>
             <a:r>
               <a:rPr lang="en-US" dirty="0"/>
-              <a:t>Now draw this illustration in your notebook: a rock pedestal. Give it a title and label it clearly.</a:t>
+              <a:t>Let us copy Main Erosional Processes of Wind. Wind erodes the land through the following processes. On this slide we have Deflation. Write each point on a new line, with the key term first, and explain it in your own words when we revise.</a:t>
             </a:r>
             <a:endParaRPr lang="en-US" dirty="0"/>
           </a:p>
@@ -3189,7 +3194,7 @@
           <a:p>
             <a:r>
               <a:rPr lang="en-US" dirty="0"/>
-              <a:t>Now let us check what you have understood. Question 1: What is abrasion? Answer in your exercise book.</a:t>
+              <a:t>Copy the point on Abrasion on the left, then draw the diagram on the right: abrasion. Give it a title and label it clearly.</a:t>
             </a:r>
             <a:endParaRPr lang="en-US" dirty="0"/>
           </a:p>
@@ -3277,7 +3282,7 @@
           <a:p>
             <a:r>
               <a:rPr lang="en-US" dirty="0"/>
-              <a:t>The expected answer is: the wearing of rocks by sand thrown by the wind. If you got it right, well done.</a:t>
+              <a:t>We continue with Main Erosional Processes of Wind. On this slide we have Attrition. Write each point on a new line, with the key term first, and explain it in your own words when we revise.</a:t>
             </a:r>
             <a:endParaRPr lang="en-US" dirty="0"/>
           </a:p>
@@ -3365,7 +3370,7 @@
           <a:p>
             <a:r>
               <a:rPr lang="en-US" dirty="0"/>
-              <a:t>Now let us check what you have understood. Question 2: Why is a rock pedestal narrow at the bottom? Answer in your exercise book.</a:t>
+              <a:t>Let us copy Erosional Features. Wind erosion forms the following features. Copy the point on Rock pedestal on the left, then draw the diagram on the right: a rock pedestal. Give it a title and label it clearly.</a:t>
             </a:r>
             <a:endParaRPr lang="en-US" dirty="0"/>
           </a:p>
@@ -3541,7 +3546,7 @@
           <a:p>
             <a:r>
               <a:rPr lang="en-US" dirty="0"/>
-              <a:t>The expected answer is: the wind throws most sand near the ground. If you got it right, well done.</a:t>
+              <a:t>We continue with Erosional Features. On this slide we have Zeugen and Yardangs. Write each point on a new line, with the key term first, and explain it in your own words when we revise. When you finish, we go to the next slide.</a:t>
             </a:r>
             <a:endParaRPr lang="en-US" dirty="0"/>
           </a:p>
@@ -3629,7 +3634,7 @@
           <a:p>
             <a:r>
               <a:rPr lang="en-US" dirty="0"/>
-              <a:t>For those who need more practice, fill in the blanks in your exercise book. The answers are: number 1, deflation; number 2, pedestal; number 3, inselberg.</a:t>
+              <a:t>We continue with Erosional Features. On this slide we have Inselbergs and Deflation hollows. Write each point on a new line, with the key term first, and explain it in your own words when we revise.</a:t>
             </a:r>
             <a:endParaRPr lang="en-US" dirty="0"/>
           </a:p>
@@ -3717,7 +3722,7 @@
           <a:p>
             <a:r>
               <a:rPr lang="en-US" dirty="0"/>
-              <a:t>For your homework: After the next windy day, look around your compound. Find a place where sand or dust has piled up, for example behind a wall, a stone or a bush, and write down why you think it collected there. We shall correct it at the beginning of our next lesson.</a:t>
+              <a:t>Now let us check what you have understood. Question 1: What is abrasion? Answer in your exercise book.</a:t>
             </a:r>
             <a:endParaRPr lang="en-US" dirty="0"/>
           </a:p>
@@ -3805,7 +3810,7 @@
           <a:p>
             <a:r>
               <a:rPr lang="en-US" dirty="0"/>
-              <a:t>Our next lesson will be on Lesson 28: Depositional Features of Wind Action. Thank you for your attention, and see you next time.</a:t>
+              <a:t>The expected answer is: the wearing of rocks by sand thrown by the wind. If you got it right, well done.</a:t>
             </a:r>
             <a:endParaRPr lang="en-US" dirty="0"/>
           </a:p>
@@ -3893,7 +3898,7 @@
           <a:p>
             <a:r>
               <a:rPr lang="en-US" dirty="0"/>
-              <a:t>Let us play the bilingual game. I say a word in English, and you give me the French word. Then we do the reverse.</a:t>
+              <a:t>Now let us check what you have understood. Question 2: Why is a rock pedestal narrow at the bottom? Answer in your exercise book.</a:t>
             </a:r>
             <a:endParaRPr lang="en-US" dirty="0"/>
           </a:p>
@@ -3981,7 +3986,7 @@
           <a:p>
             <a:r>
               <a:rPr lang="en-US" dirty="0"/>
-              <a:t>I record this information in the official logbook of the class after the lesson.</a:t>
+              <a:t>The expected answer is: the wind throws most sand near the ground. If you got it right, well done.</a:t>
             </a:r>
             <a:endParaRPr lang="en-US" dirty="0"/>
           </a:p>
@@ -4069,7 +4074,7 @@
           <a:p>
             <a:r>
               <a:rPr lang="en-US" dirty="0"/>
-              <a:t>I complete the second page of the logbook: the matter taught, the evaluation, the homework and the attendance.</a:t>
+              <a:t>For those who need more practice, fill in the blanks in your exercise book. The answers are: number 1, deflation; number 2, pedestal; number 3, inselberg.</a:t>
             </a:r>
             <a:endParaRPr lang="en-US" dirty="0"/>
           </a:p>
@@ -4157,7 +4162,7 @@
           <a:p>
             <a:r>
               <a:rPr lang="en-US" dirty="0"/>
-              <a:t>This slide is for me, the teacher: it gives the timing of the lesson and what to do if the projector is not available.</a:t>
+              <a:t>For your homework: After the next windy day, look around your compound. Find a place where sand or dust has piled up, for example behind a wall, a stone or a bush, and write down why you think it collected there. We shall correct it at the beginning of our next lesson.</a:t>
             </a:r>
             <a:endParaRPr lang="en-US" dirty="0"/>
           </a:p>
@@ -4245,7 +4250,7 @@
           <a:p>
             <a:r>
               <a:rPr lang="en-US" dirty="0"/>
-              <a:t>These are the references and picture credits used to prepare this lesson.</a:t>
+              <a:t>Our next lesson will be on Lesson 28: Depositional Features of Wind Action. Thank you for your attention, and see you next time.</a:t>
             </a:r>
             <a:endParaRPr lang="en-US" dirty="0"/>
           </a:p>
@@ -4269,6 +4274,94 @@
             <a:fld id="{F7021451-1387-4CA6-816F-3879F97B5CBC}" type="slidenum">
               <a:rPr lang="en-US"/>
               <a:t>48</a:t>
+            </a:fld>
+            <a:endParaRPr lang="en-US"/>
+          </a:p>
+        </p:txBody>
+      </p:sp>
+    </p:spTree>
+    <p:extLst>
+      <p:ext uri="{BB962C8B-B14F-4D97-AF65-F5344CB8AC3E}">
+        <p14:creationId xmlns:p14="http://schemas.microsoft.com/office/powerpoint/2010/main" val="1024086991"/>
+      </p:ext>
+    </p:extLst>
+  </p:cSld>
+  <p:clrMapOvr>
+    <a:masterClrMapping/>
+  </p:clrMapOvr>
+</p:notes>
+</file>
+
+<file path=ppt/notesSlides/notesSlide49.xml><?xml version="1.0" encoding="utf-8"?>
+<p:notes xmlns:a="http://schemas.openxmlformats.org/drawingml/2006/main" xmlns:r="http://schemas.openxmlformats.org/officeDocument/2006/relationships" xmlns:p="http://schemas.openxmlformats.org/presentationml/2006/main">
+  <p:cSld>
+    <p:spTree>
+      <p:nvGrpSpPr>
+        <p:cNvPr id="1" name=""/>
+        <p:cNvGrpSpPr/>
+        <p:nvPr/>
+      </p:nvGrpSpPr>
+      <p:grpSpPr>
+        <a:xfrm>
+          <a:off x="0" y="0"/>
+          <a:ext cx="0" cy="0"/>
+          <a:chOff x="0" y="0"/>
+          <a:chExt cx="0" cy="0"/>
+        </a:xfrm>
+      </p:grpSpPr>
+      <p:sp>
+        <p:nvSpPr>
+          <p:cNvPr id="2" name="Slide Image Placeholder 1"/>
+          <p:cNvSpPr>
+            <a:spLocks noGrp="1" noRot="1" noChangeAspect="1"/>
+          </p:cNvSpPr>
+          <p:nvPr>
+            <p:ph type="sldImg"/>
+          </p:nvPr>
+        </p:nvSpPr>
+        <p:spPr/>
+      </p:sp>
+      <p:sp>
+        <p:nvSpPr>
+          <p:cNvPr id="3" name="Notes Placeholder 2"/>
+          <p:cNvSpPr>
+            <a:spLocks noGrp="1"/>
+          </p:cNvSpPr>
+          <p:nvPr>
+            <p:ph type="body" idx="1"/>
+          </p:nvPr>
+        </p:nvSpPr>
+        <p:spPr/>
+        <p:txBody>
+          <a:bodyPr/>
+          <a:lstStyle/>
+          <a:p>
+            <a:r>
+              <a:rPr lang="en-US" dirty="0"/>
+              <a:t>Let us play the bilingual game. I say a word in English, and you give me the French word. Then we do the reverse.</a:t>
+            </a:r>
+            <a:endParaRPr lang="en-US" dirty="0"/>
+          </a:p>
+        </p:txBody>
+      </p:sp>
+      <p:sp>
+        <p:nvSpPr>
+          <p:cNvPr id="4" name="Slide Number Placeholder 3"/>
+          <p:cNvSpPr>
+            <a:spLocks noGrp="1"/>
+          </p:cNvSpPr>
+          <p:nvPr>
+            <p:ph type="sldNum" sz="quarter" idx="10"/>
+          </p:nvPr>
+        </p:nvSpPr>
+        <p:spPr/>
+        <p:txBody>
+          <a:bodyPr/>
+          <a:lstStyle/>
+          <a:p>
+            <a:fld id="{F7021451-1387-4CA6-816F-3879F97B5CBC}" type="slidenum">
+              <a:rPr lang="en-US"/>
+              <a:t>49</a:t>
             </a:fld>
             <a:endParaRPr lang="en-US"/>
           </a:p>
@@ -4357,6 +4450,358 @@
             <a:fld id="{F7021451-1387-4CA6-816F-3879F97B5CBC}" type="slidenum">
               <a:rPr lang="en-US"/>
               <a:t>5</a:t>
+            </a:fld>
+            <a:endParaRPr lang="en-US"/>
+          </a:p>
+        </p:txBody>
+      </p:sp>
+    </p:spTree>
+    <p:extLst>
+      <p:ext uri="{BB962C8B-B14F-4D97-AF65-F5344CB8AC3E}">
+        <p14:creationId xmlns:p14="http://schemas.microsoft.com/office/powerpoint/2010/main" val="1024086991"/>
+      </p:ext>
+    </p:extLst>
+  </p:cSld>
+  <p:clrMapOvr>
+    <a:masterClrMapping/>
+  </p:clrMapOvr>
+</p:notes>
+</file>
+
+<file path=ppt/notesSlides/notesSlide50.xml><?xml version="1.0" encoding="utf-8"?>
+<p:notes xmlns:a="http://schemas.openxmlformats.org/drawingml/2006/main" xmlns:r="http://schemas.openxmlformats.org/officeDocument/2006/relationships" xmlns:p="http://schemas.openxmlformats.org/presentationml/2006/main">
+  <p:cSld>
+    <p:spTree>
+      <p:nvGrpSpPr>
+        <p:cNvPr id="1" name=""/>
+        <p:cNvGrpSpPr/>
+        <p:nvPr/>
+      </p:nvGrpSpPr>
+      <p:grpSpPr>
+        <a:xfrm>
+          <a:off x="0" y="0"/>
+          <a:ext cx="0" cy="0"/>
+          <a:chOff x="0" y="0"/>
+          <a:chExt cx="0" cy="0"/>
+        </a:xfrm>
+      </p:grpSpPr>
+      <p:sp>
+        <p:nvSpPr>
+          <p:cNvPr id="2" name="Slide Image Placeholder 1"/>
+          <p:cNvSpPr>
+            <a:spLocks noGrp="1" noRot="1" noChangeAspect="1"/>
+          </p:cNvSpPr>
+          <p:nvPr>
+            <p:ph type="sldImg"/>
+          </p:nvPr>
+        </p:nvSpPr>
+        <p:spPr/>
+      </p:sp>
+      <p:sp>
+        <p:nvSpPr>
+          <p:cNvPr id="3" name="Notes Placeholder 2"/>
+          <p:cNvSpPr>
+            <a:spLocks noGrp="1"/>
+          </p:cNvSpPr>
+          <p:nvPr>
+            <p:ph type="body" idx="1"/>
+          </p:nvPr>
+        </p:nvSpPr>
+        <p:spPr/>
+        <p:txBody>
+          <a:bodyPr/>
+          <a:lstStyle/>
+          <a:p>
+            <a:r>
+              <a:rPr lang="en-US" dirty="0"/>
+              <a:t>I record this information in the official logbook of the class after the lesson.</a:t>
+            </a:r>
+            <a:endParaRPr lang="en-US" dirty="0"/>
+          </a:p>
+        </p:txBody>
+      </p:sp>
+      <p:sp>
+        <p:nvSpPr>
+          <p:cNvPr id="4" name="Slide Number Placeholder 3"/>
+          <p:cNvSpPr>
+            <a:spLocks noGrp="1"/>
+          </p:cNvSpPr>
+          <p:nvPr>
+            <p:ph type="sldNum" sz="quarter" idx="10"/>
+          </p:nvPr>
+        </p:nvSpPr>
+        <p:spPr/>
+        <p:txBody>
+          <a:bodyPr/>
+          <a:lstStyle/>
+          <a:p>
+            <a:fld id="{F7021451-1387-4CA6-816F-3879F97B5CBC}" type="slidenum">
+              <a:rPr lang="en-US"/>
+              <a:t>50</a:t>
+            </a:fld>
+            <a:endParaRPr lang="en-US"/>
+          </a:p>
+        </p:txBody>
+      </p:sp>
+    </p:spTree>
+    <p:extLst>
+      <p:ext uri="{BB962C8B-B14F-4D97-AF65-F5344CB8AC3E}">
+        <p14:creationId xmlns:p14="http://schemas.microsoft.com/office/powerpoint/2010/main" val="1024086991"/>
+      </p:ext>
+    </p:extLst>
+  </p:cSld>
+  <p:clrMapOvr>
+    <a:masterClrMapping/>
+  </p:clrMapOvr>
+</p:notes>
+</file>
+
+<file path=ppt/notesSlides/notesSlide51.xml><?xml version="1.0" encoding="utf-8"?>
+<p:notes xmlns:a="http://schemas.openxmlformats.org/drawingml/2006/main" xmlns:r="http://schemas.openxmlformats.org/officeDocument/2006/relationships" xmlns:p="http://schemas.openxmlformats.org/presentationml/2006/main">
+  <p:cSld>
+    <p:spTree>
+      <p:nvGrpSpPr>
+        <p:cNvPr id="1" name=""/>
+        <p:cNvGrpSpPr/>
+        <p:nvPr/>
+      </p:nvGrpSpPr>
+      <p:grpSpPr>
+        <a:xfrm>
+          <a:off x="0" y="0"/>
+          <a:ext cx="0" cy="0"/>
+          <a:chOff x="0" y="0"/>
+          <a:chExt cx="0" cy="0"/>
+        </a:xfrm>
+      </p:grpSpPr>
+      <p:sp>
+        <p:nvSpPr>
+          <p:cNvPr id="2" name="Slide Image Placeholder 1"/>
+          <p:cNvSpPr>
+            <a:spLocks noGrp="1" noRot="1" noChangeAspect="1"/>
+          </p:cNvSpPr>
+          <p:nvPr>
+            <p:ph type="sldImg"/>
+          </p:nvPr>
+        </p:nvSpPr>
+        <p:spPr/>
+      </p:sp>
+      <p:sp>
+        <p:nvSpPr>
+          <p:cNvPr id="3" name="Notes Placeholder 2"/>
+          <p:cNvSpPr>
+            <a:spLocks noGrp="1"/>
+          </p:cNvSpPr>
+          <p:nvPr>
+            <p:ph type="body" idx="1"/>
+          </p:nvPr>
+        </p:nvSpPr>
+        <p:spPr/>
+        <p:txBody>
+          <a:bodyPr/>
+          <a:lstStyle/>
+          <a:p>
+            <a:r>
+              <a:rPr lang="en-US" dirty="0"/>
+              <a:t>I complete the second page of the logbook: the matter taught, the evaluation, the homework and the attendance.</a:t>
+            </a:r>
+            <a:endParaRPr lang="en-US" dirty="0"/>
+          </a:p>
+        </p:txBody>
+      </p:sp>
+      <p:sp>
+        <p:nvSpPr>
+          <p:cNvPr id="4" name="Slide Number Placeholder 3"/>
+          <p:cNvSpPr>
+            <a:spLocks noGrp="1"/>
+          </p:cNvSpPr>
+          <p:nvPr>
+            <p:ph type="sldNum" sz="quarter" idx="10"/>
+          </p:nvPr>
+        </p:nvSpPr>
+        <p:spPr/>
+        <p:txBody>
+          <a:bodyPr/>
+          <a:lstStyle/>
+          <a:p>
+            <a:fld id="{F7021451-1387-4CA6-816F-3879F97B5CBC}" type="slidenum">
+              <a:rPr lang="en-US"/>
+              <a:t>51</a:t>
+            </a:fld>
+            <a:endParaRPr lang="en-US"/>
+          </a:p>
+        </p:txBody>
+      </p:sp>
+    </p:spTree>
+    <p:extLst>
+      <p:ext uri="{BB962C8B-B14F-4D97-AF65-F5344CB8AC3E}">
+        <p14:creationId xmlns:p14="http://schemas.microsoft.com/office/powerpoint/2010/main" val="1024086991"/>
+      </p:ext>
+    </p:extLst>
+  </p:cSld>
+  <p:clrMapOvr>
+    <a:masterClrMapping/>
+  </p:clrMapOvr>
+</p:notes>
+</file>
+
+<file path=ppt/notesSlides/notesSlide52.xml><?xml version="1.0" encoding="utf-8"?>
+<p:notes xmlns:a="http://schemas.openxmlformats.org/drawingml/2006/main" xmlns:r="http://schemas.openxmlformats.org/officeDocument/2006/relationships" xmlns:p="http://schemas.openxmlformats.org/presentationml/2006/main">
+  <p:cSld>
+    <p:spTree>
+      <p:nvGrpSpPr>
+        <p:cNvPr id="1" name=""/>
+        <p:cNvGrpSpPr/>
+        <p:nvPr/>
+      </p:nvGrpSpPr>
+      <p:grpSpPr>
+        <a:xfrm>
+          <a:off x="0" y="0"/>
+          <a:ext cx="0" cy="0"/>
+          <a:chOff x="0" y="0"/>
+          <a:chExt cx="0" cy="0"/>
+        </a:xfrm>
+      </p:grpSpPr>
+      <p:sp>
+        <p:nvSpPr>
+          <p:cNvPr id="2" name="Slide Image Placeholder 1"/>
+          <p:cNvSpPr>
+            <a:spLocks noGrp="1" noRot="1" noChangeAspect="1"/>
+          </p:cNvSpPr>
+          <p:nvPr>
+            <p:ph type="sldImg"/>
+          </p:nvPr>
+        </p:nvSpPr>
+        <p:spPr/>
+      </p:sp>
+      <p:sp>
+        <p:nvSpPr>
+          <p:cNvPr id="3" name="Notes Placeholder 2"/>
+          <p:cNvSpPr>
+            <a:spLocks noGrp="1"/>
+          </p:cNvSpPr>
+          <p:nvPr>
+            <p:ph type="body" idx="1"/>
+          </p:nvPr>
+        </p:nvSpPr>
+        <p:spPr/>
+        <p:txBody>
+          <a:bodyPr/>
+          <a:lstStyle/>
+          <a:p>
+            <a:r>
+              <a:rPr lang="en-US" dirty="0"/>
+              <a:t>This slide is for me, the teacher: it gives the timing of the lesson and what to do if the projector is not available.</a:t>
+            </a:r>
+            <a:endParaRPr lang="en-US" dirty="0"/>
+          </a:p>
+        </p:txBody>
+      </p:sp>
+      <p:sp>
+        <p:nvSpPr>
+          <p:cNvPr id="4" name="Slide Number Placeholder 3"/>
+          <p:cNvSpPr>
+            <a:spLocks noGrp="1"/>
+          </p:cNvSpPr>
+          <p:nvPr>
+            <p:ph type="sldNum" sz="quarter" idx="10"/>
+          </p:nvPr>
+        </p:nvSpPr>
+        <p:spPr/>
+        <p:txBody>
+          <a:bodyPr/>
+          <a:lstStyle/>
+          <a:p>
+            <a:fld id="{F7021451-1387-4CA6-816F-3879F97B5CBC}" type="slidenum">
+              <a:rPr lang="en-US"/>
+              <a:t>52</a:t>
+            </a:fld>
+            <a:endParaRPr lang="en-US"/>
+          </a:p>
+        </p:txBody>
+      </p:sp>
+    </p:spTree>
+    <p:extLst>
+      <p:ext uri="{BB962C8B-B14F-4D97-AF65-F5344CB8AC3E}">
+        <p14:creationId xmlns:p14="http://schemas.microsoft.com/office/powerpoint/2010/main" val="1024086991"/>
+      </p:ext>
+    </p:extLst>
+  </p:cSld>
+  <p:clrMapOvr>
+    <a:masterClrMapping/>
+  </p:clrMapOvr>
+</p:notes>
+</file>
+
+<file path=ppt/notesSlides/notesSlide53.xml><?xml version="1.0" encoding="utf-8"?>
+<p:notes xmlns:a="http://schemas.openxmlformats.org/drawingml/2006/main" xmlns:r="http://schemas.openxmlformats.org/officeDocument/2006/relationships" xmlns:p="http://schemas.openxmlformats.org/presentationml/2006/main">
+  <p:cSld>
+    <p:spTree>
+      <p:nvGrpSpPr>
+        <p:cNvPr id="1" name=""/>
+        <p:cNvGrpSpPr/>
+        <p:nvPr/>
+      </p:nvGrpSpPr>
+      <p:grpSpPr>
+        <a:xfrm>
+          <a:off x="0" y="0"/>
+          <a:ext cx="0" cy="0"/>
+          <a:chOff x="0" y="0"/>
+          <a:chExt cx="0" cy="0"/>
+        </a:xfrm>
+      </p:grpSpPr>
+      <p:sp>
+        <p:nvSpPr>
+          <p:cNvPr id="2" name="Slide Image Placeholder 1"/>
+          <p:cNvSpPr>
+            <a:spLocks noGrp="1" noRot="1" noChangeAspect="1"/>
+          </p:cNvSpPr>
+          <p:nvPr>
+            <p:ph type="sldImg"/>
+          </p:nvPr>
+        </p:nvSpPr>
+        <p:spPr/>
+      </p:sp>
+      <p:sp>
+        <p:nvSpPr>
+          <p:cNvPr id="3" name="Notes Placeholder 2"/>
+          <p:cNvSpPr>
+            <a:spLocks noGrp="1"/>
+          </p:cNvSpPr>
+          <p:nvPr>
+            <p:ph type="body" idx="1"/>
+          </p:nvPr>
+        </p:nvSpPr>
+        <p:spPr/>
+        <p:txBody>
+          <a:bodyPr/>
+          <a:lstStyle/>
+          <a:p>
+            <a:r>
+              <a:rPr lang="en-US" dirty="0"/>
+              <a:t>These are the references and picture credits used to prepare this lesson.</a:t>
+            </a:r>
+            <a:endParaRPr lang="en-US" dirty="0"/>
+          </a:p>
+        </p:txBody>
+      </p:sp>
+      <p:sp>
+        <p:nvSpPr>
+          <p:cNvPr id="4" name="Slide Number Placeholder 3"/>
+          <p:cNvSpPr>
+            <a:spLocks noGrp="1"/>
+          </p:cNvSpPr>
+          <p:nvPr>
+            <p:ph type="sldNum" sz="quarter" idx="10"/>
+          </p:nvPr>
+        </p:nvSpPr>
+        <p:spPr/>
+        <p:txBody>
+          <a:bodyPr/>
+          <a:lstStyle/>
+          <a:p>
+            <a:fld id="{F7021451-1387-4CA6-816F-3879F97B5CBC}" type="slidenum">
+              <a:rPr lang="en-US"/>
+              <a:t>53</a:t>
             </a:fld>
             <a:endParaRPr lang="en-US"/>
           </a:p>
@@ -6065,7 +6510,7 @@
         <p:spPr>
           <a:xfrm>
             <a:off x="0" y="658368"/>
-            <a:ext cx="5120640" cy="5833872"/>
+            <a:ext cx="1463040" cy="5833872"/>
           </a:xfrm>
           <a:prstGeom prst="rect">
             <a:avLst/>
@@ -6080,8 +6525,8 @@
         </p:nvSpPr>
         <p:spPr>
           <a:xfrm>
-            <a:off x="5349240" y="1005840"/>
-            <a:ext cx="6522415" cy="731520"/>
+            <a:off x="1691640" y="1005840"/>
+            <a:ext cx="10180015" cy="731520"/>
           </a:xfrm>
           <a:prstGeom prst="rect">
             <a:avLst/>
@@ -6121,8 +6566,8 @@
         </p:nvSpPr>
         <p:spPr>
           <a:xfrm>
-            <a:off x="5349240" y="1783080"/>
-            <a:ext cx="6522415" cy="4663440"/>
+            <a:off x="1691640" y="1783080"/>
+            <a:ext cx="10180015" cy="4663440"/>
           </a:xfrm>
           <a:prstGeom prst="rect">
             <a:avLst/>
@@ -6149,7 +6594,7 @@
                 <a:ea typeface="Times New Roman" pitchFamily="34" charset="-122"/>
                 <a:cs typeface="Times New Roman" pitchFamily="34" charset="-120"/>
               </a:rPr>
-              <a:t>During the Harmattan, Moussa sees that the old wall of his compound is worn near the ground, but the top is still smooth. The worn side faces the north-east, where the Harmattan comes from.</a:t>
+              <a:t>During the Harmattan, Moussa sees that the old wall of his compound is worn near the ground but still smooth at the top. The worn side faces the north-east, where the dusty wind comes from. He asks: "How can the wind wear away a wall, and what does it do to the rocks of the desert?"</a:t>
             </a:r>
             <a:endParaRPr lang="en-US" sz="4000" dirty="0"/>
           </a:p>
@@ -6587,7 +7032,7 @@
                 <a:ea typeface="Times New Roman" pitchFamily="34" charset="-122"/>
                 <a:cs typeface="Times New Roman" pitchFamily="34" charset="-120"/>
               </a:rPr>
-              <a:t>Moussa does not know how the wind wore away the wall.</a:t>
+              <a:t>Moussa does not know how the wind wears away walls and rocks.</a:t>
             </a:r>
             <a:endParaRPr lang="en-US" sz="4000" dirty="0"/>
           </a:p>
@@ -6806,7 +7251,7 @@
                 <a:ea typeface="Times New Roman" pitchFamily="34" charset="-122"/>
                 <a:cs typeface="Times New Roman" pitchFamily="34" charset="-120"/>
               </a:rPr>
-              <a:t>Which part of the wall is worn?</a:t>
+              <a:t>Where is the wall worn?</a:t>
             </a:r>
             <a:endParaRPr lang="en-US" sz="4000" dirty="0"/>
           </a:p>
@@ -7025,7 +7470,7 @@
                 <a:ea typeface="Times New Roman" pitchFamily="34" charset="-122"/>
                 <a:cs typeface="Times New Roman" pitchFamily="34" charset="-120"/>
               </a:rPr>
-              <a:t>The bottom, facing the north-east.</a:t>
+              <a:t>Near the ground, on the side facing the north-east.</a:t>
             </a:r>
             <a:endParaRPr lang="en-US" sz="4000" dirty="0"/>
           </a:p>
@@ -7244,7 +7689,7 @@
                 <a:ea typeface="Times New Roman" pitchFamily="34" charset="-122"/>
                 <a:cs typeface="Times New Roman" pitchFamily="34" charset="-120"/>
               </a:rPr>
-              <a:t>What can protect the wall?</a:t>
+              <a:t>Which wind comes from the north-east?</a:t>
             </a:r>
             <a:endParaRPr lang="en-US" sz="4000" dirty="0"/>
           </a:p>
@@ -7463,7 +7908,7 @@
                 <a:ea typeface="Times New Roman" pitchFamily="34" charset="-122"/>
                 <a:cs typeface="Times New Roman" pitchFamily="34" charset="-120"/>
               </a:rPr>
-              <a:t>A hedge or trees that stop the wind.</a:t>
+              <a:t>The Harmattan.</a:t>
             </a:r>
             <a:endParaRPr lang="en-US" sz="4000" dirty="0"/>
           </a:p>
@@ -8887,7 +9332,7 @@
                 <a:ea typeface="Times New Roman" pitchFamily="34" charset="-122"/>
                 <a:cs typeface="Times New Roman" pitchFamily="34" charset="-120"/>
               </a:rPr>
-              <a:t>Activity 1: Question</a:t>
+              <a:t>Activity 1: Question 1</a:t>
             </a:r>
             <a:endParaRPr lang="en-US" sz="3600" dirty="0"/>
           </a:p>
@@ -8929,7 +9374,7 @@
                 <a:ea typeface="Times New Roman" pitchFamily="34" charset="-122"/>
                 <a:cs typeface="Times New Roman" pitchFamily="34" charset="-120"/>
               </a:rPr>
-              <a:t>Name the largest hot desert. Which dry belt lies south of it?</a:t>
+              <a:t>Which is the largest hot desert of Africa?</a:t>
             </a:r>
             <a:endParaRPr lang="en-US" sz="4000" dirty="0"/>
           </a:p>
@@ -9106,7 +9551,7 @@
                 <a:ea typeface="Times New Roman" pitchFamily="34" charset="-122"/>
                 <a:cs typeface="Times New Roman" pitchFamily="34" charset="-120"/>
               </a:rPr>
-              <a:t>Activity 1: Answer</a:t>
+              <a:t>Activity 1: Answer 1</a:t>
             </a:r>
             <a:endParaRPr lang="en-US" sz="3600" dirty="0"/>
           </a:p>
@@ -9148,7 +9593,7 @@
                 <a:ea typeface="Times New Roman" pitchFamily="34" charset="-122"/>
                 <a:cs typeface="Times New Roman" pitchFamily="34" charset="-120"/>
               </a:rPr>
-              <a:t>The Sahara. The Sahel lies south of it.</a:t>
+              <a:t>The Sahara.</a:t>
             </a:r>
             <a:endParaRPr lang="en-US" sz="4000" dirty="0"/>
           </a:p>
@@ -9260,54 +9705,15 @@
                 <a:ea typeface="Calibri" pitchFamily="34" charset="-122"/>
                 <a:cs typeface="Calibri" pitchFamily="34" charset="-120"/>
               </a:rPr>
-              <a:t>2. WIND EROSION</a:t>
+              <a:t>1. LOCATION</a:t>
             </a:r>
             <a:endParaRPr lang="en-US" sz="1400" dirty="0"/>
-          </a:p>
-        </p:txBody>
-      </p:sp>
-      <p:sp>
-        <p:nvSpPr>
-          <p:cNvPr id="3" name="Text 1"/>
-          <p:cNvSpPr/>
-          <p:nvPr/>
-        </p:nvSpPr>
-        <p:spPr>
-          <a:xfrm>
-            <a:off x="457200" y="1005840"/>
-            <a:ext cx="11277295" cy="731520"/>
-          </a:xfrm>
-          <a:prstGeom prst="rect">
-            <a:avLst/>
-          </a:prstGeom>
-          <a:noFill/>
-          <a:ln/>
-        </p:spPr>
-        <p:txBody>
-          <a:bodyPr wrap="square" lIns="0" tIns="0" rIns="0" bIns="0" rtlCol="0" anchor="ctr"/>
-          <a:lstStyle/>
-          <a:p>
-            <a:pPr algn="ctr" indent="0" marL="0">
-              <a:buNone/>
-            </a:pPr>
-            <a:r>
-              <a:rPr lang="en-US" sz="3600" b="1" dirty="0">
-                <a:solidFill>
-                  <a:srgbClr val="990011"/>
-                </a:solidFill>
-                <a:latin typeface="Times New Roman" pitchFamily="34" charset="0"/>
-                <a:ea typeface="Times New Roman" pitchFamily="34" charset="-122"/>
-                <a:cs typeface="Times New Roman" pitchFamily="34" charset="-120"/>
-              </a:rPr>
-              <a:t>Activity 2</a:t>
-            </a:r>
-            <a:endParaRPr lang="en-US" sz="3600" dirty="0"/>
           </a:p>
         </p:txBody>
       </p:sp>
       <p:pic>
         <p:nvPicPr>
-          <p:cNvPr id="4" name="Image 0" descr="/home/claude/f4/img/v2/abrasion.gif">    </p:cNvPr>
+          <p:cNvPr id="3" name="Image 0" descr="/home/claude/f4/img/minesec_sheet.png">    </p:cNvPr>
           <p:cNvPicPr>
             <a:picLocks noChangeAspect="1"/>
           </p:cNvPicPr>
@@ -9321,8 +9727,8 @@
         </p:blipFill>
         <p:spPr>
           <a:xfrm>
-            <a:off x="629930" y="1783080"/>
-            <a:ext cx="10931835" cy="4270248"/>
+            <a:off x="0" y="658368"/>
+            <a:ext cx="5120640" cy="5833872"/>
           </a:xfrm>
           <a:prstGeom prst="rect">
             <a:avLst/>
@@ -9331,14 +9737,14 @@
       </p:pic>
       <p:sp>
         <p:nvSpPr>
-          <p:cNvPr id="5" name="Text 2"/>
+          <p:cNvPr id="4" name="Text 1"/>
           <p:cNvSpPr/>
           <p:nvPr/>
         </p:nvSpPr>
         <p:spPr>
           <a:xfrm>
-            <a:off x="457200" y="6089904"/>
-            <a:ext cx="11277295" cy="347472"/>
+            <a:off x="5349240" y="1005840"/>
+            <a:ext cx="6522415" cy="731520"/>
           </a:xfrm>
           <a:prstGeom prst="rect">
             <a:avLst/>
@@ -9347,24 +9753,68 @@
           <a:ln/>
         </p:spPr>
         <p:txBody>
-          <a:bodyPr wrap="square" lIns="0" tIns="0" rIns="0" bIns="0" rtlCol="0" anchor="ctr"/>
+          <a:bodyPr wrap="square" lIns="0" tIns="0" rIns="0" bIns="0" rtlCol="0" anchor="ctr">
+            <a:normAutofit/>
+          </a:bodyPr>
           <a:lstStyle/>
           <a:p>
             <a:pPr algn="ctr" indent="0" marL="0">
               <a:buNone/>
             </a:pPr>
             <a:r>
-              <a:rPr lang="en-US" sz="1800" i="1" dirty="0">
-                <a:solidFill>
-                  <a:srgbClr val="555555"/>
+              <a:rPr lang="en-US" sz="3600" b="1" dirty="0">
+                <a:solidFill>
+                  <a:srgbClr val="990011"/>
                 </a:solidFill>
                 <a:latin typeface="Times New Roman" pitchFamily="34" charset="0"/>
                 <a:ea typeface="Times New Roman" pitchFamily="34" charset="-122"/>
                 <a:cs typeface="Times New Roman" pitchFamily="34" charset="-120"/>
               </a:rPr>
-              <a:t>Animation: the wind throws sand against a rock.</a:t>
-            </a:r>
-            <a:endParaRPr lang="en-US" sz="1800" dirty="0"/>
+              <a:t>Activity 1: Question 2</a:t>
+            </a:r>
+            <a:endParaRPr lang="en-US" sz="3600" dirty="0"/>
+          </a:p>
+        </p:txBody>
+      </p:sp>
+      <p:sp>
+        <p:nvSpPr>
+          <p:cNvPr id="5" name="Text 2"/>
+          <p:cNvSpPr/>
+          <p:nvPr/>
+        </p:nvSpPr>
+        <p:spPr>
+          <a:xfrm>
+            <a:off x="5349240" y="1783080"/>
+            <a:ext cx="6522415" cy="4663440"/>
+          </a:xfrm>
+          <a:prstGeom prst="rect">
+            <a:avLst/>
+          </a:prstGeom>
+          <a:noFill/>
+          <a:ln/>
+        </p:spPr>
+        <p:txBody>
+          <a:bodyPr wrap="square" lIns="0" tIns="0" rIns="0" bIns="0" rtlCol="0" anchor="t"/>
+          <a:lstStyle/>
+          <a:p>
+            <a:pPr algn="l" indent="0" marL="0">
+              <a:spcAft>
+                <a:spcPts val="800"/>
+              </a:spcAft>
+              <a:buNone/>
+            </a:pPr>
+            <a:r>
+              <a:rPr lang="en-US" sz="4000" dirty="0">
+                <a:solidFill>
+                  <a:srgbClr val="111111"/>
+                </a:solidFill>
+                <a:latin typeface="Times New Roman" pitchFamily="34" charset="0"/>
+                <a:ea typeface="Times New Roman" pitchFamily="34" charset="-122"/>
+                <a:cs typeface="Times New Roman" pitchFamily="34" charset="-120"/>
+              </a:rPr>
+              <a:t>Which dry belt lies south of it?</a:t>
+            </a:r>
+            <a:endParaRPr lang="en-US" sz="4000" dirty="0"/>
           </a:p>
         </p:txBody>
       </p:sp>
@@ -9474,7 +9924,7 @@
                 <a:ea typeface="Calibri" pitchFamily="34" charset="-122"/>
                 <a:cs typeface="Calibri" pitchFamily="34" charset="-120"/>
               </a:rPr>
-              <a:t>2. WIND EROSION</a:t>
+              <a:t>1. LOCATION</a:t>
             </a:r>
             <a:endParaRPr lang="en-US" sz="1400" dirty="0"/>
           </a:p>
@@ -9539,7 +9989,7 @@
                 <a:ea typeface="Times New Roman" pitchFamily="34" charset="-122"/>
                 <a:cs typeface="Times New Roman" pitchFamily="34" charset="-120"/>
               </a:rPr>
-              <a:t>Activity 2: Question</a:t>
+              <a:t>Activity 1: Answer 2</a:t>
             </a:r>
             <a:endParaRPr lang="en-US" sz="3600" dirty="0"/>
           </a:p>
@@ -9581,7 +10031,7 @@
                 <a:ea typeface="Times New Roman" pitchFamily="34" charset="-122"/>
                 <a:cs typeface="Times New Roman" pitchFamily="34" charset="-120"/>
               </a:rPr>
-              <a:t>Why is the rock worn more at the bottom?</a:t>
+              <a:t>The Sahel.</a:t>
             </a:r>
             <a:endParaRPr lang="en-US" sz="4000" dirty="0"/>
           </a:p>
@@ -9693,15 +10143,54 @@
                 <a:ea typeface="Calibri" pitchFamily="34" charset="-122"/>
                 <a:cs typeface="Calibri" pitchFamily="34" charset="-120"/>
               </a:rPr>
-              <a:t>2. WIND EROSION</a:t>
+              <a:t>2. EROSIONAL PROCESSES</a:t>
             </a:r>
             <a:endParaRPr lang="en-US" sz="1400" dirty="0"/>
+          </a:p>
+        </p:txBody>
+      </p:sp>
+      <p:sp>
+        <p:nvSpPr>
+          <p:cNvPr id="3" name="Text 1"/>
+          <p:cNvSpPr/>
+          <p:nvPr/>
+        </p:nvSpPr>
+        <p:spPr>
+          <a:xfrm>
+            <a:off x="457200" y="1005840"/>
+            <a:ext cx="11277295" cy="731520"/>
+          </a:xfrm>
+          <a:prstGeom prst="rect">
+            <a:avLst/>
+          </a:prstGeom>
+          <a:noFill/>
+          <a:ln/>
+        </p:spPr>
+        <p:txBody>
+          <a:bodyPr wrap="square" lIns="0" tIns="0" rIns="0" bIns="0" rtlCol="0" anchor="ctr"/>
+          <a:lstStyle/>
+          <a:p>
+            <a:pPr algn="ctr" indent="0" marL="0">
+              <a:buNone/>
+            </a:pPr>
+            <a:r>
+              <a:rPr lang="en-US" sz="3600" b="1" dirty="0">
+                <a:solidFill>
+                  <a:srgbClr val="990011"/>
+                </a:solidFill>
+                <a:latin typeface="Times New Roman" pitchFamily="34" charset="0"/>
+                <a:ea typeface="Times New Roman" pitchFamily="34" charset="-122"/>
+                <a:cs typeface="Times New Roman" pitchFamily="34" charset="-120"/>
+              </a:rPr>
+              <a:t>Activity 2</a:t>
+            </a:r>
+            <a:endParaRPr lang="en-US" sz="3600" dirty="0"/>
           </a:p>
         </p:txBody>
       </p:sp>
       <p:pic>
         <p:nvPicPr>
-          <p:cNvPr id="3" name="Image 0" descr="/home/claude/f4/img/minesec_sheet.png">    </p:cNvPr>
+          <p:cNvPr id="4" name="Image 0" descr="/home/claude/f4/img/v2/abrasion.gif">    </p:cNvPr>
           <p:cNvPicPr>
             <a:picLocks noChangeAspect="1"/>
           </p:cNvPicPr>
@@ -9715,8 +10204,8 @@
         </p:blipFill>
         <p:spPr>
           <a:xfrm>
-            <a:off x="0" y="658368"/>
-            <a:ext cx="5120640" cy="5833872"/>
+            <a:off x="629930" y="1783080"/>
+            <a:ext cx="10931835" cy="4270248"/>
           </a:xfrm>
           <a:prstGeom prst="rect">
             <a:avLst/>
@@ -9725,14 +10214,14 @@
       </p:pic>
       <p:sp>
         <p:nvSpPr>
-          <p:cNvPr id="4" name="Text 1"/>
+          <p:cNvPr id="5" name="Text 2"/>
           <p:cNvSpPr/>
           <p:nvPr/>
         </p:nvSpPr>
         <p:spPr>
           <a:xfrm>
-            <a:off x="5349240" y="1005840"/>
-            <a:ext cx="6522415" cy="731520"/>
+            <a:off x="457200" y="6089904"/>
+            <a:ext cx="11277295" cy="347472"/>
           </a:xfrm>
           <a:prstGeom prst="rect">
             <a:avLst/>
@@ -9741,68 +10230,24 @@
           <a:ln/>
         </p:spPr>
         <p:txBody>
-          <a:bodyPr wrap="square" lIns="0" tIns="0" rIns="0" bIns="0" rtlCol="0" anchor="ctr">
-            <a:normAutofit/>
-          </a:bodyPr>
+          <a:bodyPr wrap="square" lIns="0" tIns="0" rIns="0" bIns="0" rtlCol="0" anchor="ctr"/>
           <a:lstStyle/>
           <a:p>
             <a:pPr algn="ctr" indent="0" marL="0">
               <a:buNone/>
             </a:pPr>
             <a:r>
-              <a:rPr lang="en-US" sz="3600" b="1" dirty="0">
-                <a:solidFill>
-                  <a:srgbClr val="990011"/>
+              <a:rPr lang="en-US" sz="1800" i="1" dirty="0">
+                <a:solidFill>
+                  <a:srgbClr val="555555"/>
                 </a:solidFill>
                 <a:latin typeface="Times New Roman" pitchFamily="34" charset="0"/>
                 <a:ea typeface="Times New Roman" pitchFamily="34" charset="-122"/>
                 <a:cs typeface="Times New Roman" pitchFamily="34" charset="-120"/>
               </a:rPr>
-              <a:t>Activity 2: Answer</a:t>
-            </a:r>
-            <a:endParaRPr lang="en-US" sz="3600" dirty="0"/>
-          </a:p>
-        </p:txBody>
-      </p:sp>
-      <p:sp>
-        <p:nvSpPr>
-          <p:cNvPr id="5" name="Text 2"/>
-          <p:cNvSpPr/>
-          <p:nvPr/>
-        </p:nvSpPr>
-        <p:spPr>
-          <a:xfrm>
-            <a:off x="5349240" y="1783080"/>
-            <a:ext cx="6522415" cy="4663440"/>
-          </a:xfrm>
-          <a:prstGeom prst="rect">
-            <a:avLst/>
-          </a:prstGeom>
-          <a:noFill/>
-          <a:ln/>
-        </p:spPr>
-        <p:txBody>
-          <a:bodyPr wrap="square" lIns="0" tIns="0" rIns="0" bIns="0" rtlCol="0" anchor="t"/>
-          <a:lstStyle/>
-          <a:p>
-            <a:pPr algn="l" indent="0" marL="0">
-              <a:spcAft>
-                <a:spcPts val="800"/>
-              </a:spcAft>
-              <a:buNone/>
-            </a:pPr>
-            <a:r>
-              <a:rPr lang="en-US" sz="4000" dirty="0">
-                <a:solidFill>
-                  <a:srgbClr val="111111"/>
-                </a:solidFill>
-                <a:latin typeface="Times New Roman" pitchFamily="34" charset="0"/>
-                <a:ea typeface="Times New Roman" pitchFamily="34" charset="-122"/>
-                <a:cs typeface="Times New Roman" pitchFamily="34" charset="-120"/>
-              </a:rPr>
-              <a:t>The wind carries most sand near the ground.</a:t>
-            </a:r>
-            <a:endParaRPr lang="en-US" sz="4000" dirty="0"/>
+              <a:t>Animation: sand blown against a rock.</a:t>
+            </a:r>
+            <a:endParaRPr lang="en-US" sz="1800" dirty="0"/>
           </a:p>
         </p:txBody>
       </p:sp>
@@ -9912,54 +10357,15 @@
                 <a:ea typeface="Calibri" pitchFamily="34" charset="-122"/>
                 <a:cs typeface="Calibri" pitchFamily="34" charset="-120"/>
               </a:rPr>
-              <a:t>3. EROSIONAL FEATURES</a:t>
+              <a:t>2. EROSIONAL PROCESSES</a:t>
             </a:r>
             <a:endParaRPr lang="en-US" sz="1400" dirty="0"/>
-          </a:p>
-        </p:txBody>
-      </p:sp>
-      <p:sp>
-        <p:nvSpPr>
-          <p:cNvPr id="3" name="Text 1"/>
-          <p:cNvSpPr/>
-          <p:nvPr/>
-        </p:nvSpPr>
-        <p:spPr>
-          <a:xfrm>
-            <a:off x="457200" y="1005840"/>
-            <a:ext cx="11277295" cy="731520"/>
-          </a:xfrm>
-          <a:prstGeom prst="rect">
-            <a:avLst/>
-          </a:prstGeom>
-          <a:noFill/>
-          <a:ln/>
-        </p:spPr>
-        <p:txBody>
-          <a:bodyPr wrap="square" lIns="0" tIns="0" rIns="0" bIns="0" rtlCol="0" anchor="ctr"/>
-          <a:lstStyle/>
-          <a:p>
-            <a:pPr algn="ctr" indent="0" marL="0">
-              <a:buNone/>
-            </a:pPr>
-            <a:r>
-              <a:rPr lang="en-US" sz="3600" b="1" dirty="0">
-                <a:solidFill>
-                  <a:srgbClr val="990011"/>
-                </a:solidFill>
-                <a:latin typeface="Times New Roman" pitchFamily="34" charset="0"/>
-                <a:ea typeface="Times New Roman" pitchFamily="34" charset="-122"/>
-                <a:cs typeface="Times New Roman" pitchFamily="34" charset="-120"/>
-              </a:rPr>
-              <a:t>Activity 3</a:t>
-            </a:r>
-            <a:endParaRPr lang="en-US" sz="3600" dirty="0"/>
           </a:p>
         </p:txBody>
       </p:sp>
       <p:pic>
         <p:nvPicPr>
-          <p:cNvPr id="4" name="Image 0" descr="/home/claude/f4/img/v2/f4_pedestal.jpg">    </p:cNvPr>
+          <p:cNvPr id="3" name="Image 0" descr="/home/claude/f4/img/minesec_sheet.png">    </p:cNvPr>
           <p:cNvPicPr>
             <a:picLocks noChangeAspect="1"/>
           </p:cNvPicPr>
@@ -9973,8 +10379,8 @@
         </p:blipFill>
         <p:spPr>
           <a:xfrm>
-            <a:off x="2246610" y="1783080"/>
-            <a:ext cx="7698475" cy="4270248"/>
+            <a:off x="0" y="658368"/>
+            <a:ext cx="5120640" cy="5833872"/>
           </a:xfrm>
           <a:prstGeom prst="rect">
             <a:avLst/>
@@ -9983,14 +10389,14 @@
       </p:pic>
       <p:sp>
         <p:nvSpPr>
-          <p:cNvPr id="5" name="Text 2"/>
+          <p:cNvPr id="4" name="Text 1"/>
           <p:cNvSpPr/>
           <p:nvPr/>
         </p:nvSpPr>
         <p:spPr>
           <a:xfrm>
-            <a:off x="457200" y="6089904"/>
-            <a:ext cx="11277295" cy="347472"/>
+            <a:off x="5349240" y="1005840"/>
+            <a:ext cx="6522415" cy="731520"/>
           </a:xfrm>
           <a:prstGeom prst="rect">
             <a:avLst/>
@@ -9999,24 +10405,68 @@
           <a:ln/>
         </p:spPr>
         <p:txBody>
-          <a:bodyPr wrap="square" lIns="0" tIns="0" rIns="0" bIns="0" rtlCol="0" anchor="ctr"/>
+          <a:bodyPr wrap="square" lIns="0" tIns="0" rIns="0" bIns="0" rtlCol="0" anchor="ctr">
+            <a:normAutofit/>
+          </a:bodyPr>
           <a:lstStyle/>
           <a:p>
             <a:pPr algn="ctr" indent="0" marL="0">
               <a:buNone/>
             </a:pPr>
             <a:r>
-              <a:rPr lang="en-US" sz="1800" i="1" dirty="0">
-                <a:solidFill>
-                  <a:srgbClr val="555555"/>
+              <a:rPr lang="en-US" sz="3600" b="1" dirty="0">
+                <a:solidFill>
+                  <a:srgbClr val="990011"/>
                 </a:solidFill>
                 <a:latin typeface="Times New Roman" pitchFamily="34" charset="0"/>
                 <a:ea typeface="Times New Roman" pitchFamily="34" charset="-122"/>
                 <a:cs typeface="Times New Roman" pitchFamily="34" charset="-120"/>
               </a:rPr>
-              <a:t>A rock worn by the wind.</a:t>
-            </a:r>
-            <a:endParaRPr lang="en-US" sz="1800" dirty="0"/>
+              <a:t>Activity 2: Question</a:t>
+            </a:r>
+            <a:endParaRPr lang="en-US" sz="3600" dirty="0"/>
+          </a:p>
+        </p:txBody>
+      </p:sp>
+      <p:sp>
+        <p:nvSpPr>
+          <p:cNvPr id="5" name="Text 2"/>
+          <p:cNvSpPr/>
+          <p:nvPr/>
+        </p:nvSpPr>
+        <p:spPr>
+          <a:xfrm>
+            <a:off x="5349240" y="1783080"/>
+            <a:ext cx="6522415" cy="4663440"/>
+          </a:xfrm>
+          <a:prstGeom prst="rect">
+            <a:avLst/>
+          </a:prstGeom>
+          <a:noFill/>
+          <a:ln/>
+        </p:spPr>
+        <p:txBody>
+          <a:bodyPr wrap="square" lIns="0" tIns="0" rIns="0" bIns="0" rtlCol="0" anchor="t"/>
+          <a:lstStyle/>
+          <a:p>
+            <a:pPr algn="l" indent="0" marL="0">
+              <a:spcAft>
+                <a:spcPts val="800"/>
+              </a:spcAft>
+              <a:buNone/>
+            </a:pPr>
+            <a:r>
+              <a:rPr lang="en-US" sz="4000" dirty="0">
+                <a:solidFill>
+                  <a:srgbClr val="111111"/>
+                </a:solidFill>
+                <a:latin typeface="Times New Roman" pitchFamily="34" charset="0"/>
+                <a:ea typeface="Times New Roman" pitchFamily="34" charset="-122"/>
+                <a:cs typeface="Times New Roman" pitchFamily="34" charset="-120"/>
+              </a:rPr>
+              <a:t>Why is the rock worn more at the bottom?</a:t>
+            </a:r>
+            <a:endParaRPr lang="en-US" sz="4000" dirty="0"/>
           </a:p>
         </p:txBody>
       </p:sp>
@@ -10126,7 +10576,7 @@
                 <a:ea typeface="Calibri" pitchFamily="34" charset="-122"/>
                 <a:cs typeface="Calibri" pitchFamily="34" charset="-120"/>
               </a:rPr>
-              <a:t>3. EROSIONAL FEATURES</a:t>
+              <a:t>2. EROSIONAL PROCESSES</a:t>
             </a:r>
             <a:endParaRPr lang="en-US" sz="1400" dirty="0"/>
           </a:p>
@@ -10191,7 +10641,7 @@
                 <a:ea typeface="Times New Roman" pitchFamily="34" charset="-122"/>
                 <a:cs typeface="Times New Roman" pitchFamily="34" charset="-120"/>
               </a:rPr>
-              <a:t>Activity 3: Question</a:t>
+              <a:t>Activity 2: Answer</a:t>
             </a:r>
             <a:endParaRPr lang="en-US" sz="3600" dirty="0"/>
           </a:p>
@@ -10233,7 +10683,7 @@
                 <a:ea typeface="Times New Roman" pitchFamily="34" charset="-122"/>
                 <a:cs typeface="Times New Roman" pitchFamily="34" charset="-120"/>
               </a:rPr>
-              <a:t>This rock is narrow at the bottom and wide at the top. What is it called?</a:t>
+              <a:t>The wind carries most of its sand near the ground.</a:t>
             </a:r>
             <a:endParaRPr lang="en-US" sz="4000" dirty="0"/>
           </a:p>
@@ -10351,9 +10801,48 @@
           </a:p>
         </p:txBody>
       </p:sp>
+      <p:sp>
+        <p:nvSpPr>
+          <p:cNvPr id="3" name="Text 1"/>
+          <p:cNvSpPr/>
+          <p:nvPr/>
+        </p:nvSpPr>
+        <p:spPr>
+          <a:xfrm>
+            <a:off x="457200" y="1005840"/>
+            <a:ext cx="11277295" cy="731520"/>
+          </a:xfrm>
+          <a:prstGeom prst="rect">
+            <a:avLst/>
+          </a:prstGeom>
+          <a:noFill/>
+          <a:ln/>
+        </p:spPr>
+        <p:txBody>
+          <a:bodyPr wrap="square" lIns="0" tIns="0" rIns="0" bIns="0" rtlCol="0" anchor="ctr"/>
+          <a:lstStyle/>
+          <a:p>
+            <a:pPr algn="ctr" indent="0" marL="0">
+              <a:buNone/>
+            </a:pPr>
+            <a:r>
+              <a:rPr lang="en-US" sz="3600" b="1" dirty="0">
+                <a:solidFill>
+                  <a:srgbClr val="990011"/>
+                </a:solidFill>
+                <a:latin typeface="Times New Roman" pitchFamily="34" charset="0"/>
+                <a:ea typeface="Times New Roman" pitchFamily="34" charset="-122"/>
+                <a:cs typeface="Times New Roman" pitchFamily="34" charset="-120"/>
+              </a:rPr>
+              <a:t>Activity 3</a:t>
+            </a:r>
+            <a:endParaRPr lang="en-US" sz="3600" dirty="0"/>
+          </a:p>
+        </p:txBody>
+      </p:sp>
       <p:pic>
         <p:nvPicPr>
-          <p:cNvPr id="3" name="Image 0" descr="/home/claude/f4/img/minesec_sheet.png">    </p:cNvPr>
+          <p:cNvPr id="4" name="Image 0" descr="/home/claude/f4/img/v2/f4_pedestal.jpg">    </p:cNvPr>
           <p:cNvPicPr>
             <a:picLocks noChangeAspect="1"/>
           </p:cNvPicPr>
@@ -10367,8 +10856,8 @@
         </p:blipFill>
         <p:spPr>
           <a:xfrm>
-            <a:off x="0" y="658368"/>
-            <a:ext cx="5120640" cy="5833872"/>
+            <a:off x="2246610" y="1783080"/>
+            <a:ext cx="7698475" cy="4270248"/>
           </a:xfrm>
           <a:prstGeom prst="rect">
             <a:avLst/>
@@ -10377,14 +10866,14 @@
       </p:pic>
       <p:sp>
         <p:nvSpPr>
-          <p:cNvPr id="4" name="Text 1"/>
+          <p:cNvPr id="5" name="Text 2"/>
           <p:cNvSpPr/>
           <p:nvPr/>
         </p:nvSpPr>
         <p:spPr>
           <a:xfrm>
-            <a:off x="5349240" y="1005840"/>
-            <a:ext cx="6522415" cy="731520"/>
+            <a:off x="457200" y="6089904"/>
+            <a:ext cx="11277295" cy="347472"/>
           </a:xfrm>
           <a:prstGeom prst="rect">
             <a:avLst/>
@@ -10393,68 +10882,24 @@
           <a:ln/>
         </p:spPr>
         <p:txBody>
-          <a:bodyPr wrap="square" lIns="0" tIns="0" rIns="0" bIns="0" rtlCol="0" anchor="ctr">
-            <a:normAutofit/>
-          </a:bodyPr>
+          <a:bodyPr wrap="square" lIns="0" tIns="0" rIns="0" bIns="0" rtlCol="0" anchor="ctr"/>
           <a:lstStyle/>
           <a:p>
             <a:pPr algn="ctr" indent="0" marL="0">
               <a:buNone/>
             </a:pPr>
             <a:r>
-              <a:rPr lang="en-US" sz="3600" b="1" dirty="0">
-                <a:solidFill>
-                  <a:srgbClr val="990011"/>
+              <a:rPr lang="en-US" sz="1800" i="1" dirty="0">
+                <a:solidFill>
+                  <a:srgbClr val="555555"/>
                 </a:solidFill>
                 <a:latin typeface="Times New Roman" pitchFamily="34" charset="0"/>
                 <a:ea typeface="Times New Roman" pitchFamily="34" charset="-122"/>
                 <a:cs typeface="Times New Roman" pitchFamily="34" charset="-120"/>
               </a:rPr>
-              <a:t>Activity 3: Answer</a:t>
-            </a:r>
-            <a:endParaRPr lang="en-US" sz="3600" dirty="0"/>
-          </a:p>
-        </p:txBody>
-      </p:sp>
-      <p:sp>
-        <p:nvSpPr>
-          <p:cNvPr id="5" name="Text 2"/>
-          <p:cNvSpPr/>
-          <p:nvPr/>
-        </p:nvSpPr>
-        <p:spPr>
-          <a:xfrm>
-            <a:off x="5349240" y="1783080"/>
-            <a:ext cx="6522415" cy="4663440"/>
-          </a:xfrm>
-          <a:prstGeom prst="rect">
-            <a:avLst/>
-          </a:prstGeom>
-          <a:noFill/>
-          <a:ln/>
-        </p:spPr>
-        <p:txBody>
-          <a:bodyPr wrap="square" lIns="0" tIns="0" rIns="0" bIns="0" rtlCol="0" anchor="t"/>
-          <a:lstStyle/>
-          <a:p>
-            <a:pPr algn="l" indent="0" marL="0">
-              <a:spcAft>
-                <a:spcPts val="800"/>
-              </a:spcAft>
-              <a:buNone/>
-            </a:pPr>
-            <a:r>
-              <a:rPr lang="en-US" sz="4000" dirty="0">
-                <a:solidFill>
-                  <a:srgbClr val="111111"/>
-                </a:solidFill>
-                <a:latin typeface="Times New Roman" pitchFamily="34" charset="0"/>
-                <a:ea typeface="Times New Roman" pitchFamily="34" charset="-122"/>
-                <a:cs typeface="Times New Roman" pitchFamily="34" charset="-120"/>
-              </a:rPr>
-              <a:t>A rock pedestal (mushroom rock).</a:t>
-            </a:r>
-            <a:endParaRPr lang="en-US" sz="4000" dirty="0"/>
+              <a:t>A rock narrow at the bottom and wide at the top.</a:t>
+            </a:r>
+            <a:endParaRPr lang="en-US" sz="1800" dirty="0"/>
           </a:p>
         </p:txBody>
       </p:sp>
@@ -10564,7 +11009,7 @@
                 <a:ea typeface="Calibri" pitchFamily="34" charset="-122"/>
                 <a:cs typeface="Calibri" pitchFamily="34" charset="-120"/>
               </a:rPr>
-              <a:t>BOARD SUMMARY</a:t>
+              <a:t>3. EROSIONAL FEATURES</a:t>
             </a:r>
             <a:endParaRPr lang="en-US" sz="1400" dirty="0"/>
           </a:p>
@@ -10629,7 +11074,7 @@
                 <a:ea typeface="Times New Roman" pitchFamily="34" charset="-122"/>
                 <a:cs typeface="Times New Roman" pitchFamily="34" charset="-120"/>
               </a:rPr>
-              <a:t>Board Summary</a:t>
+              <a:t>Activity 3: Question</a:t>
             </a:r>
             <a:endParaRPr lang="en-US" sz="3600" dirty="0"/>
           </a:p>
@@ -10663,7 +11108,7 @@
               <a:buNone/>
             </a:pPr>
             <a:r>
-              <a:rPr lang="en-US" sz="4000" b="1" dirty="0">
+              <a:rPr lang="en-US" sz="4000" dirty="0">
                 <a:solidFill>
                   <a:srgbClr val="111111"/>
                 </a:solidFill>
@@ -10671,47 +11116,7 @@
                 <a:ea typeface="Times New Roman" pitchFamily="34" charset="-122"/>
                 <a:cs typeface="Times New Roman" pitchFamily="34" charset="-120"/>
               </a:rPr>
-              <a:t>Topic: Denudation Processes, Landforms and Impacts on Man</a:t>
-            </a:r>
-            <a:endParaRPr lang="en-US" sz="4000" dirty="0"/>
-          </a:p>
-          <a:p>
-            <a:pPr algn="l" indent="0" marL="0">
-              <a:spcAft>
-                <a:spcPts val="800"/>
-              </a:spcAft>
-              <a:buNone/>
-            </a:pPr>
-            <a:r>
-              <a:rPr lang="en-US" sz="4000" b="1" dirty="0">
-                <a:solidFill>
-                  <a:srgbClr val="111111"/>
-                </a:solidFill>
-                <a:latin typeface="Times New Roman" pitchFamily="34" charset="0"/>
-                <a:ea typeface="Times New Roman" pitchFamily="34" charset="-122"/>
-                <a:cs typeface="Times New Roman" pitchFamily="34" charset="-120"/>
-              </a:rPr>
-              <a:t>Sub-topic: Hot Desert Landscapes: Wind Action and Human Adaptation</a:t>
-            </a:r>
-            <a:endParaRPr lang="en-US" sz="4000" dirty="0"/>
-          </a:p>
-          <a:p>
-            <a:pPr algn="l" indent="0" marL="0">
-              <a:spcAft>
-                <a:spcPts val="800"/>
-              </a:spcAft>
-              <a:buNone/>
-            </a:pPr>
-            <a:r>
-              <a:rPr lang="en-US" sz="4000" b="1" dirty="0">
-                <a:solidFill>
-                  <a:srgbClr val="990011"/>
-                </a:solidFill>
-                <a:latin typeface="Times New Roman" pitchFamily="34" charset="0"/>
-                <a:ea typeface="Times New Roman" pitchFamily="34" charset="-122"/>
-                <a:cs typeface="Times New Roman" pitchFamily="34" charset="-120"/>
-              </a:rPr>
-              <a:t>Lesson 27: Semi-Arid and Desert Landscapes</a:t>
+              <a:t>What is this rock called?</a:t>
             </a:r>
             <a:endParaRPr lang="en-US" sz="4000" dirty="0"/>
           </a:p>
@@ -10823,7 +11228,7 @@
                 <a:ea typeface="Calibri" pitchFamily="34" charset="-122"/>
                 <a:cs typeface="Calibri" pitchFamily="34" charset="-120"/>
               </a:rPr>
-              <a:t>BOARD SUMMARY</a:t>
+              <a:t>3. EROSIONAL FEATURES</a:t>
             </a:r>
             <a:endParaRPr lang="en-US" sz="1400" dirty="0"/>
           </a:p>
@@ -10846,7 +11251,7 @@
         <p:spPr>
           <a:xfrm>
             <a:off x="0" y="658368"/>
-            <a:ext cx="2468880" cy="5833872"/>
+            <a:ext cx="5120640" cy="5833872"/>
           </a:xfrm>
           <a:prstGeom prst="rect">
             <a:avLst/>
@@ -10861,8 +11266,8 @@
         </p:nvSpPr>
         <p:spPr>
           <a:xfrm>
-            <a:off x="2697480" y="1005840"/>
-            <a:ext cx="9174175" cy="731520"/>
+            <a:off x="5349240" y="1005840"/>
+            <a:ext cx="6522415" cy="731520"/>
           </a:xfrm>
           <a:prstGeom prst="rect">
             <a:avLst/>
@@ -10888,7 +11293,7 @@
                 <a:ea typeface="Times New Roman" pitchFamily="34" charset="-122"/>
                 <a:cs typeface="Times New Roman" pitchFamily="34" charset="-120"/>
               </a:rPr>
-              <a:t>1. Location of Semi-arid Areas and Hot Deserts in Africa</a:t>
+              <a:t>Activity 3: Answer</a:t>
             </a:r>
             <a:endParaRPr lang="en-US" sz="3600" dirty="0"/>
           </a:p>
@@ -10902,8 +11307,8 @@
         </p:nvSpPr>
         <p:spPr>
           <a:xfrm>
-            <a:off x="2697480" y="1783080"/>
-            <a:ext cx="9174175" cy="4663440"/>
+            <a:off x="5349240" y="1783080"/>
+            <a:ext cx="6522415" cy="4663440"/>
           </a:xfrm>
           <a:prstGeom prst="rect">
             <a:avLst/>
@@ -10922,7 +11327,7 @@
               <a:buNone/>
             </a:pPr>
             <a:r>
-              <a:rPr lang="en-US" sz="4000" i="1" dirty="0">
+              <a:rPr lang="en-US" sz="4000" dirty="0">
                 <a:solidFill>
                   <a:srgbClr val="111111"/>
                 </a:solidFill>
@@ -10930,81 +11335,7 @@
                 <a:ea typeface="Times New Roman" pitchFamily="34" charset="-122"/>
                 <a:cs typeface="Times New Roman" pitchFamily="34" charset="-120"/>
               </a:rPr>
-              <a:t>Dry lands in Africa are located as follows:</a:t>
-            </a:r>
-            <a:endParaRPr lang="en-US" sz="4000" dirty="0"/>
-          </a:p>
-          <a:p>
-            <a:pPr algn="l" indent="0" marL="0">
-              <a:spcAft>
-                <a:spcPts val="800"/>
-              </a:spcAft>
-              <a:buNone/>
-            </a:pPr>
-            <a:r>
-              <a:rPr lang="en-US" sz="4000" b="1" dirty="0">
-                <a:solidFill>
-                  <a:srgbClr val="111111"/>
-                </a:solidFill>
-                <a:latin typeface="Times New Roman" pitchFamily="34" charset="0"/>
-                <a:ea typeface="Times New Roman" pitchFamily="34" charset="-122"/>
-                <a:cs typeface="Times New Roman" pitchFamily="34" charset="-120"/>
-              </a:rPr>
-              <a:t>Semi-arid region: </a:t>
-            </a:r>
-            <a:pPr algn="l" indent="0" marL="0">
-              <a:spcAft>
-                <a:spcPts val="800"/>
-              </a:spcAft>
-              <a:buNone/>
-            </a:pPr>
-            <a:r>
-              <a:rPr lang="en-US" sz="4000" dirty="0">
-                <a:solidFill>
-                  <a:srgbClr val="111111"/>
-                </a:solidFill>
-                <a:latin typeface="Times New Roman" pitchFamily="34" charset="0"/>
-                <a:ea typeface="Times New Roman" pitchFamily="34" charset="-122"/>
-                <a:cs typeface="Times New Roman" pitchFamily="34" charset="-120"/>
-              </a:rPr>
-              <a:t>It is a region that receives 250 to 500 mm of rain per year.</a:t>
-            </a:r>
-            <a:endParaRPr lang="en-US" sz="4000" dirty="0"/>
-          </a:p>
-          <a:p>
-            <a:pPr algn="l" indent="0" marL="0">
-              <a:spcAft>
-                <a:spcPts val="800"/>
-              </a:spcAft>
-              <a:buNone/>
-            </a:pPr>
-            <a:r>
-              <a:rPr lang="en-US" sz="4000" b="1" dirty="0">
-                <a:solidFill>
-                  <a:srgbClr val="111111"/>
-                </a:solidFill>
-                <a:latin typeface="Times New Roman" pitchFamily="34" charset="0"/>
-                <a:ea typeface="Times New Roman" pitchFamily="34" charset="-122"/>
-                <a:cs typeface="Times New Roman" pitchFamily="34" charset="-120"/>
-              </a:rPr>
-              <a:t>The Sahara: </a:t>
-            </a:r>
-            <a:pPr algn="l" indent="0" marL="0">
-              <a:spcAft>
-                <a:spcPts val="800"/>
-              </a:spcAft>
-              <a:buNone/>
-            </a:pPr>
-            <a:r>
-              <a:rPr lang="en-US" sz="4000" dirty="0">
-                <a:solidFill>
-                  <a:srgbClr val="111111"/>
-                </a:solidFill>
-                <a:latin typeface="Times New Roman" pitchFamily="34" charset="0"/>
-                <a:ea typeface="Times New Roman" pitchFamily="34" charset="-122"/>
-                <a:cs typeface="Times New Roman" pitchFamily="34" charset="-120"/>
-              </a:rPr>
-              <a:t>It is the largest hot desert in the world, in North Africa.</a:t>
+              <a:t>A rock pedestal (mushroom rock).</a:t>
             </a:r>
             <a:endParaRPr lang="en-US" sz="4000" dirty="0"/>
           </a:p>
@@ -12190,7 +12521,7 @@
                 <a:ea typeface="Times New Roman" pitchFamily="34" charset="-122"/>
                 <a:cs typeface="Times New Roman" pitchFamily="34" charset="-120"/>
               </a:rPr>
-              <a:t>1. Location of Semi-arid Areas and Hot Deserts in Africa (continued)</a:t>
+              <a:t>Board Summary</a:t>
             </a:r>
             <a:endParaRPr lang="en-US" sz="3600" dirty="0"/>
           </a:p>
@@ -12224,7 +12555,7 @@
               <a:buNone/>
             </a:pPr>
             <a:r>
-              <a:rPr lang="en-US" sz="4000" b="1" dirty="0">
+              <a:rPr lang="en-US" sz="3200" b="1" dirty="0">
                 <a:solidFill>
                   <a:srgbClr val="111111"/>
                 </a:solidFill>
@@ -12232,8 +12563,11 @@
                 <a:ea typeface="Times New Roman" pitchFamily="34" charset="-122"/>
                 <a:cs typeface="Times New Roman" pitchFamily="34" charset="-120"/>
               </a:rPr>
-              <a:t>The Kalahari and the Namib: </a:t>
-            </a:r>
+              <a:t>Topic: Denudation Processes, Landforms and Impacts on Man</a:t>
+            </a:r>
+            <a:endParaRPr lang="en-US" sz="3200" dirty="0"/>
+          </a:p>
+          <a:p>
             <a:pPr algn="l" indent="0" marL="0">
               <a:spcAft>
                 <a:spcPts val="800"/>
@@ -12241,7 +12575,7 @@
               <a:buNone/>
             </a:pPr>
             <a:r>
-              <a:rPr lang="en-US" sz="4000" dirty="0">
+              <a:rPr lang="en-US" sz="3200" b="1" dirty="0">
                 <a:solidFill>
                   <a:srgbClr val="111111"/>
                 </a:solidFill>
@@ -12249,9 +12583,9 @@
                 <a:ea typeface="Times New Roman" pitchFamily="34" charset="-122"/>
                 <a:cs typeface="Times New Roman" pitchFamily="34" charset="-120"/>
               </a:rPr>
-              <a:t>They are hot deserts in Southern Africa.</a:t>
-            </a:r>
-            <a:endParaRPr lang="en-US" sz="4000" dirty="0"/>
+              <a:t>Sub-topic: Hot Desert Landscapes: Wind Action and Human Adaptation</a:t>
+            </a:r>
+            <a:endParaRPr lang="en-US" sz="3200" dirty="0"/>
           </a:p>
           <a:p>
             <a:pPr algn="l" indent="0" marL="0">
@@ -12261,34 +12595,17 @@
               <a:buNone/>
             </a:pPr>
             <a:r>
-              <a:rPr lang="en-US" sz="4000" b="1" dirty="0">
-                <a:solidFill>
-                  <a:srgbClr val="111111"/>
+              <a:rPr lang="en-US" sz="3200" b="1" dirty="0">
+                <a:solidFill>
+                  <a:srgbClr val="990011"/>
                 </a:solidFill>
                 <a:latin typeface="Times New Roman" pitchFamily="34" charset="0"/>
                 <a:ea typeface="Times New Roman" pitchFamily="34" charset="-122"/>
                 <a:cs typeface="Times New Roman" pitchFamily="34" charset="-120"/>
               </a:rPr>
-              <a:t>The Sahel: </a:t>
-            </a:r>
-            <a:pPr algn="l" indent="0" marL="0">
-              <a:spcAft>
-                <a:spcPts val="800"/>
-              </a:spcAft>
-              <a:buNone/>
-            </a:pPr>
-            <a:r>
-              <a:rPr lang="en-US" sz="4000" dirty="0">
-                <a:solidFill>
-                  <a:srgbClr val="111111"/>
-                </a:solidFill>
-                <a:latin typeface="Times New Roman" pitchFamily="34" charset="0"/>
-                <a:ea typeface="Times New Roman" pitchFamily="34" charset="-122"/>
-                <a:cs typeface="Times New Roman" pitchFamily="34" charset="-120"/>
-              </a:rPr>
-              <a:t>It is a semi-arid belt south of the Sahara that includes the Far North of Cameroon.</a:t>
-            </a:r>
-            <a:endParaRPr lang="en-US" sz="4000" dirty="0"/>
+              <a:t>Lesson 27: Semi-Arid and Desert Landscapes</a:t>
+            </a:r>
+            <a:endParaRPr lang="en-US" sz="3200" dirty="0"/>
           </a:p>
         </p:txBody>
       </p:sp>
@@ -12404,48 +12721,9 @@
           </a:p>
         </p:txBody>
       </p:sp>
-      <p:sp>
-        <p:nvSpPr>
-          <p:cNvPr id="3" name="Text 1"/>
-          <p:cNvSpPr/>
-          <p:nvPr/>
-        </p:nvSpPr>
-        <p:spPr>
-          <a:xfrm>
-            <a:off x="457200" y="1005840"/>
-            <a:ext cx="11277295" cy="731520"/>
-          </a:xfrm>
-          <a:prstGeom prst="rect">
-            <a:avLst/>
-          </a:prstGeom>
-          <a:noFill/>
-          <a:ln/>
-        </p:spPr>
-        <p:txBody>
-          <a:bodyPr wrap="square" lIns="0" tIns="0" rIns="0" bIns="0" rtlCol="0" anchor="ctr"/>
-          <a:lstStyle/>
-          <a:p>
-            <a:pPr algn="ctr" indent="0" marL="0">
-              <a:buNone/>
-            </a:pPr>
-            <a:r>
-              <a:rPr lang="en-US" sz="3600" b="1" dirty="0">
-                <a:solidFill>
-                  <a:srgbClr val="990011"/>
-                </a:solidFill>
-                <a:latin typeface="Times New Roman" pitchFamily="34" charset="0"/>
-                <a:ea typeface="Times New Roman" pitchFamily="34" charset="-122"/>
-                <a:cs typeface="Times New Roman" pitchFamily="34" charset="-120"/>
-              </a:rPr>
-              <a:t>1. Location of Semi-arid Areas and Hot Deserts in Africa</a:t>
-            </a:r>
-            <a:endParaRPr lang="en-US" sz="3600" dirty="0"/>
-          </a:p>
-        </p:txBody>
-      </p:sp>
       <p:pic>
         <p:nvPicPr>
-          <p:cNvPr id="4" name="Image 0" descr="/home/claude/f4/img/v2/deserts_world_big.png">    </p:cNvPr>
+          <p:cNvPr id="3" name="Image 0" descr="/home/claude/f4/img/minesec_sheet.png">    </p:cNvPr>
           <p:cNvPicPr>
             <a:picLocks noChangeAspect="1"/>
           </p:cNvPicPr>
@@ -12459,8 +12737,8 @@
         </p:blipFill>
         <p:spPr>
           <a:xfrm>
-            <a:off x="1215564" y="1783080"/>
-            <a:ext cx="9760567" cy="4270248"/>
+            <a:off x="0" y="658368"/>
+            <a:ext cx="1463040" cy="5833872"/>
           </a:xfrm>
           <a:prstGeom prst="rect">
             <a:avLst/>
@@ -12469,14 +12747,14 @@
       </p:pic>
       <p:sp>
         <p:nvSpPr>
-          <p:cNvPr id="5" name="Text 2"/>
+          <p:cNvPr id="4" name="Text 1"/>
           <p:cNvSpPr/>
           <p:nvPr/>
         </p:nvSpPr>
         <p:spPr>
           <a:xfrm>
-            <a:off x="457200" y="6089904"/>
-            <a:ext cx="11277295" cy="347472"/>
+            <a:off x="1691640" y="1005840"/>
+            <a:ext cx="10180015" cy="731520"/>
           </a:xfrm>
           <a:prstGeom prst="rect">
             <a:avLst/>
@@ -12485,24 +12763,142 @@
           <a:ln/>
         </p:spPr>
         <p:txBody>
-          <a:bodyPr wrap="square" lIns="0" tIns="0" rIns="0" bIns="0" rtlCol="0" anchor="ctr"/>
+          <a:bodyPr wrap="square" lIns="0" tIns="0" rIns="0" bIns="0" rtlCol="0" anchor="ctr">
+            <a:normAutofit/>
+          </a:bodyPr>
           <a:lstStyle/>
           <a:p>
             <a:pPr algn="ctr" indent="0" marL="0">
               <a:buNone/>
             </a:pPr>
             <a:r>
-              <a:rPr lang="en-US" sz="1800" i="1" dirty="0">
-                <a:solidFill>
-                  <a:srgbClr val="555555"/>
+              <a:rPr lang="en-US" sz="3600" b="1" dirty="0">
+                <a:solidFill>
+                  <a:srgbClr val="990011"/>
                 </a:solidFill>
                 <a:latin typeface="Times New Roman" pitchFamily="34" charset="0"/>
                 <a:ea typeface="Times New Roman" pitchFamily="34" charset="-122"/>
                 <a:cs typeface="Times New Roman" pitchFamily="34" charset="-120"/>
               </a:rPr>
-              <a:t>Illustration: hot deserts</a:t>
-            </a:r>
-            <a:endParaRPr lang="en-US" sz="1800" dirty="0"/>
+              <a:t>DEFINITIONS</a:t>
+            </a:r>
+            <a:endParaRPr lang="en-US" sz="3600" dirty="0"/>
+          </a:p>
+        </p:txBody>
+      </p:sp>
+      <p:sp>
+        <p:nvSpPr>
+          <p:cNvPr id="5" name="Text 2"/>
+          <p:cNvSpPr/>
+          <p:nvPr/>
+        </p:nvSpPr>
+        <p:spPr>
+          <a:xfrm>
+            <a:off x="1691640" y="1783080"/>
+            <a:ext cx="10180015" cy="4663440"/>
+          </a:xfrm>
+          <a:prstGeom prst="rect">
+            <a:avLst/>
+          </a:prstGeom>
+          <a:noFill/>
+          <a:ln/>
+        </p:spPr>
+        <p:txBody>
+          <a:bodyPr wrap="square" lIns="0" tIns="0" rIns="0" bIns="0" rtlCol="0" anchor="t"/>
+          <a:lstStyle/>
+          <a:p>
+            <a:pPr algn="l" indent="0" marL="0">
+              <a:spcAft>
+                <a:spcPts val="800"/>
+              </a:spcAft>
+              <a:buNone/>
+            </a:pPr>
+            <a:r>
+              <a:rPr lang="en-US" sz="4000" i="1" dirty="0">
+                <a:solidFill>
+                  <a:srgbClr val="111111"/>
+                </a:solidFill>
+                <a:latin typeface="Times New Roman" pitchFamily="34" charset="0"/>
+                <a:ea typeface="Times New Roman" pitchFamily="34" charset="-122"/>
+                <a:cs typeface="Times New Roman" pitchFamily="34" charset="-120"/>
+              </a:rPr>
+              <a:t>The key terms of this lesson are defined as follows:</a:t>
+            </a:r>
+            <a:endParaRPr lang="en-US" sz="4000" dirty="0"/>
+          </a:p>
+          <a:p>
+            <a:pPr algn="l" indent="0" marL="0">
+              <a:spcAft>
+                <a:spcPts val="800"/>
+              </a:spcAft>
+              <a:buNone/>
+            </a:pPr>
+            <a:r>
+              <a:rPr lang="en-US" sz="4000" b="1" dirty="0">
+                <a:solidFill>
+                  <a:srgbClr val="111111"/>
+                </a:solidFill>
+                <a:latin typeface="Times New Roman" pitchFamily="34" charset="0"/>
+                <a:ea typeface="Times New Roman" pitchFamily="34" charset="-122"/>
+                <a:cs typeface="Times New Roman" pitchFamily="34" charset="-120"/>
+              </a:rPr>
+              <a:t>Hot desert: </a:t>
+            </a:r>
+            <a:pPr algn="l" indent="0" marL="0">
+              <a:spcAft>
+                <a:spcPts val="800"/>
+              </a:spcAft>
+              <a:buNone/>
+            </a:pPr>
+            <a:r>
+              <a:rPr lang="en-US" sz="4000" dirty="0">
+                <a:solidFill>
+                  <a:srgbClr val="111111"/>
+                </a:solidFill>
+                <a:latin typeface="Times New Roman" pitchFamily="34" charset="0"/>
+                <a:ea typeface="Times New Roman" pitchFamily="34" charset="-122"/>
+                <a:cs typeface="Times New Roman" pitchFamily="34" charset="-120"/>
+              </a:rPr>
+              <a:t>It is a hot region that receives less than 250 mm of rain per year.</a:t>
+            </a:r>
+            <a:endParaRPr lang="en-US" sz="4000" dirty="0"/>
+          </a:p>
+          <a:p>
+            <a:pPr algn="l" indent="0" marL="0">
+              <a:spcAft>
+                <a:spcPts val="800"/>
+              </a:spcAft>
+              <a:buNone/>
+            </a:pPr>
+            <a:r>
+              <a:rPr lang="en-US" sz="4000" b="1" dirty="0">
+                <a:solidFill>
+                  <a:srgbClr val="111111"/>
+                </a:solidFill>
+                <a:latin typeface="Times New Roman" pitchFamily="34" charset="0"/>
+                <a:ea typeface="Times New Roman" pitchFamily="34" charset="-122"/>
+                <a:cs typeface="Times New Roman" pitchFamily="34" charset="-120"/>
+              </a:rPr>
+              <a:t>Semi-arid region: </a:t>
+            </a:r>
+            <a:pPr algn="l" indent="0" marL="0">
+              <a:spcAft>
+                <a:spcPts val="800"/>
+              </a:spcAft>
+              <a:buNone/>
+            </a:pPr>
+            <a:r>
+              <a:rPr lang="en-US" sz="4000" dirty="0">
+                <a:solidFill>
+                  <a:srgbClr val="111111"/>
+                </a:solidFill>
+                <a:latin typeface="Times New Roman" pitchFamily="34" charset="0"/>
+                <a:ea typeface="Times New Roman" pitchFamily="34" charset="-122"/>
+                <a:cs typeface="Times New Roman" pitchFamily="34" charset="-120"/>
+              </a:rPr>
+              <a:t>It is a region that receives about 250 to 500 mm of rain per year.</a:t>
+            </a:r>
+            <a:endParaRPr lang="en-US" sz="4000" dirty="0"/>
           </a:p>
         </p:txBody>
       </p:sp>
@@ -12635,7 +13031,7 @@
         <p:spPr>
           <a:xfrm>
             <a:off x="0" y="658368"/>
-            <a:ext cx="3840480" cy="5833872"/>
+            <a:ext cx="5120640" cy="5833872"/>
           </a:xfrm>
           <a:prstGeom prst="rect">
             <a:avLst/>
@@ -12650,8 +13046,8 @@
         </p:nvSpPr>
         <p:spPr>
           <a:xfrm>
-            <a:off x="4069080" y="1005840"/>
-            <a:ext cx="7802575" cy="731520"/>
+            <a:off x="5349240" y="1005840"/>
+            <a:ext cx="6522415" cy="731520"/>
           </a:xfrm>
           <a:prstGeom prst="rect">
             <a:avLst/>
@@ -12677,7 +13073,7 @@
                 <a:ea typeface="Times New Roman" pitchFamily="34" charset="-122"/>
                 <a:cs typeface="Times New Roman" pitchFamily="34" charset="-120"/>
               </a:rPr>
-              <a:t>2. Erosional Processes of Wind</a:t>
+              <a:t>DEFINITIONS (continued)</a:t>
             </a:r>
             <a:endParaRPr lang="en-US" sz="3600" dirty="0"/>
           </a:p>
@@ -12691,8 +13087,8 @@
         </p:nvSpPr>
         <p:spPr>
           <a:xfrm>
-            <a:off x="4069080" y="1783080"/>
-            <a:ext cx="7802575" cy="4663440"/>
+            <a:off x="5349240" y="1783080"/>
+            <a:ext cx="6522415" cy="4663440"/>
           </a:xfrm>
           <a:prstGeom prst="rect">
             <a:avLst/>
@@ -12711,7 +13107,7 @@
               <a:buNone/>
             </a:pPr>
             <a:r>
-              <a:rPr lang="en-US" sz="4000" i="1" dirty="0">
+              <a:rPr lang="en-US" sz="4000" b="1" dirty="0">
                 <a:solidFill>
                   <a:srgbClr val="111111"/>
                 </a:solidFill>
@@ -12719,11 +13115,8 @@
                 <a:ea typeface="Times New Roman" pitchFamily="34" charset="-122"/>
                 <a:cs typeface="Times New Roman" pitchFamily="34" charset="-120"/>
               </a:rPr>
-              <a:t>Wind erodes the land through the following processes:</a:t>
-            </a:r>
-            <a:endParaRPr lang="en-US" sz="4000" dirty="0"/>
-          </a:p>
-          <a:p>
+              <a:t>Wind erosion: </a:t>
+            </a:r>
             <a:pPr algn="l" indent="0" marL="0">
               <a:spcAft>
                 <a:spcPts val="800"/>
@@ -12731,7 +13124,7 @@
               <a:buNone/>
             </a:pPr>
             <a:r>
-              <a:rPr lang="en-US" sz="4000" b="1" dirty="0">
+              <a:rPr lang="en-US" sz="4000" dirty="0">
                 <a:solidFill>
                   <a:srgbClr val="111111"/>
                 </a:solidFill>
@@ -12739,61 +13132,7 @@
                 <a:ea typeface="Times New Roman" pitchFamily="34" charset="-122"/>
                 <a:cs typeface="Times New Roman" pitchFamily="34" charset="-120"/>
               </a:rPr>
-              <a:t>Deflation: </a:t>
-            </a:r>
-            <a:pPr algn="l" indent="0" marL="0">
-              <a:spcAft>
-                <a:spcPts val="800"/>
-              </a:spcAft>
-              <a:buNone/>
-            </a:pPr>
-            <a:r>
-              <a:rPr lang="en-US" sz="4000" dirty="0">
-                <a:solidFill>
-                  <a:srgbClr val="111111"/>
-                </a:solidFill>
-                <a:latin typeface="Times New Roman" pitchFamily="34" charset="0"/>
-                <a:ea typeface="Times New Roman" pitchFamily="34" charset="-122"/>
-                <a:cs typeface="Times New Roman" pitchFamily="34" charset="-120"/>
-              </a:rPr>
-              <a:t>It is the removal of loose sand and dust by the wind.</a:t>
-            </a:r>
-            <a:endParaRPr lang="en-US" sz="4000" dirty="0"/>
-          </a:p>
-          <a:p>
-            <a:pPr algn="l" indent="0" marL="0">
-              <a:spcAft>
-                <a:spcPts val="800"/>
-              </a:spcAft>
-              <a:buNone/>
-            </a:pPr>
-            <a:r>
-              <a:rPr lang="en-US" sz="4000" b="1" dirty="0">
-                <a:solidFill>
-                  <a:srgbClr val="111111"/>
-                </a:solidFill>
-                <a:latin typeface="Times New Roman" pitchFamily="34" charset="0"/>
-                <a:ea typeface="Times New Roman" pitchFamily="34" charset="-122"/>
-                <a:cs typeface="Times New Roman" pitchFamily="34" charset="-120"/>
-              </a:rPr>
-              <a:t>Abrasion: </a:t>
-            </a:r>
-            <a:pPr algn="l" indent="0" marL="0">
-              <a:spcAft>
-                <a:spcPts val="800"/>
-              </a:spcAft>
-              <a:buNone/>
-            </a:pPr>
-            <a:r>
-              <a:rPr lang="en-US" sz="4000" dirty="0">
-                <a:solidFill>
-                  <a:srgbClr val="111111"/>
-                </a:solidFill>
-                <a:latin typeface="Times New Roman" pitchFamily="34" charset="0"/>
-                <a:ea typeface="Times New Roman" pitchFamily="34" charset="-122"/>
-                <a:cs typeface="Times New Roman" pitchFamily="34" charset="-120"/>
-              </a:rPr>
-              <a:t>It is the wearing of rocks by sand thrown by the wind near the ground.</a:t>
+              <a:t>It is the wearing away and removal of rock and soil by the wind.</a:t>
             </a:r>
             <a:endParaRPr lang="en-US" sz="4000" dirty="0"/>
           </a:p>
@@ -12911,9 +13250,129 @@
           </a:p>
         </p:txBody>
       </p:sp>
+      <p:sp>
+        <p:nvSpPr>
+          <p:cNvPr id="3" name="Text 1"/>
+          <p:cNvSpPr/>
+          <p:nvPr/>
+        </p:nvSpPr>
+        <p:spPr>
+          <a:xfrm>
+            <a:off x="365760" y="1005840"/>
+            <a:ext cx="11460175" cy="731520"/>
+          </a:xfrm>
+          <a:prstGeom prst="rect">
+            <a:avLst/>
+          </a:prstGeom>
+          <a:noFill/>
+          <a:ln/>
+        </p:spPr>
+        <p:txBody>
+          <a:bodyPr wrap="square" lIns="0" tIns="0" rIns="0" bIns="0" rtlCol="0" anchor="ctr">
+            <a:normAutofit/>
+          </a:bodyPr>
+          <a:lstStyle/>
+          <a:p>
+            <a:pPr algn="ctr" indent="0" marL="0">
+              <a:buNone/>
+            </a:pPr>
+            <a:r>
+              <a:rPr lang="en-US" sz="3600" b="1" dirty="0">
+                <a:solidFill>
+                  <a:srgbClr val="990011"/>
+                </a:solidFill>
+                <a:latin typeface="Times New Roman" pitchFamily="34" charset="0"/>
+                <a:ea typeface="Times New Roman" pitchFamily="34" charset="-122"/>
+                <a:cs typeface="Times New Roman" pitchFamily="34" charset="-120"/>
+              </a:rPr>
+              <a:t>1. Location of Semi-arid Areas and Hot Deserts in Africa</a:t>
+            </a:r>
+            <a:endParaRPr lang="en-US" sz="3600" dirty="0"/>
+          </a:p>
+        </p:txBody>
+      </p:sp>
+      <p:sp>
+        <p:nvSpPr>
+          <p:cNvPr id="4" name="Text 2"/>
+          <p:cNvSpPr/>
+          <p:nvPr/>
+        </p:nvSpPr>
+        <p:spPr>
+          <a:xfrm>
+            <a:off x="365760" y="1783080"/>
+            <a:ext cx="4846320" cy="4617720"/>
+          </a:xfrm>
+          <a:prstGeom prst="rect">
+            <a:avLst/>
+          </a:prstGeom>
+          <a:noFill/>
+          <a:ln/>
+        </p:spPr>
+        <p:txBody>
+          <a:bodyPr wrap="square" lIns="0" tIns="0" rIns="0" bIns="0" rtlCol="0" anchor="t"/>
+          <a:lstStyle/>
+          <a:p>
+            <a:pPr algn="l" indent="0" marL="0">
+              <a:spcAft>
+                <a:spcPts val="800"/>
+              </a:spcAft>
+              <a:buNone/>
+            </a:pPr>
+            <a:r>
+              <a:rPr lang="en-US" sz="3600" i="1" dirty="0">
+                <a:solidFill>
+                  <a:srgbClr val="111111"/>
+                </a:solidFill>
+                <a:latin typeface="Times New Roman" pitchFamily="34" charset="0"/>
+                <a:ea typeface="Times New Roman" pitchFamily="34" charset="-122"/>
+                <a:cs typeface="Times New Roman" pitchFamily="34" charset="-120"/>
+              </a:rPr>
+              <a:t>Dry lands in Africa are located as follows:</a:t>
+            </a:r>
+            <a:endParaRPr lang="en-US" sz="3600" dirty="0"/>
+          </a:p>
+          <a:p>
+            <a:pPr algn="l" indent="0" marL="0">
+              <a:spcAft>
+                <a:spcPts val="800"/>
+              </a:spcAft>
+              <a:buNone/>
+            </a:pPr>
+            <a:r>
+              <a:rPr lang="en-US" sz="3600" b="1" dirty="0">
+                <a:solidFill>
+                  <a:srgbClr val="111111"/>
+                </a:solidFill>
+                <a:latin typeface="Times New Roman" pitchFamily="34" charset="0"/>
+                <a:ea typeface="Times New Roman" pitchFamily="34" charset="-122"/>
+                <a:cs typeface="Times New Roman" pitchFamily="34" charset="-120"/>
+              </a:rPr>
+              <a:t>The Sahara: </a:t>
+            </a:r>
+            <a:pPr algn="l" indent="0" marL="0">
+              <a:spcAft>
+                <a:spcPts val="800"/>
+              </a:spcAft>
+              <a:buNone/>
+            </a:pPr>
+            <a:r>
+              <a:rPr lang="en-US" sz="3600" dirty="0">
+                <a:solidFill>
+                  <a:srgbClr val="111111"/>
+                </a:solidFill>
+                <a:latin typeface="Times New Roman" pitchFamily="34" charset="0"/>
+                <a:ea typeface="Times New Roman" pitchFamily="34" charset="-122"/>
+                <a:cs typeface="Times New Roman" pitchFamily="34" charset="-120"/>
+              </a:rPr>
+              <a:t>It is the largest hot desert in the world and covers most of North Africa.</a:t>
+            </a:r>
+            <a:endParaRPr lang="en-US" sz="3600" dirty="0"/>
+          </a:p>
+        </p:txBody>
+      </p:sp>
       <p:pic>
         <p:nvPicPr>
-          <p:cNvPr id="3" name="Image 0" descr="/home/claude/f4/img/minesec_sheet.png">    </p:cNvPr>
+          <p:cNvPr id="5" name="Image 0" descr="/home/claude/f4/img/v2/deserts_world_big.png">    </p:cNvPr>
           <p:cNvPicPr>
             <a:picLocks noChangeAspect="1"/>
           </p:cNvPicPr>
@@ -12927,8 +13386,8 @@
         </p:blipFill>
         <p:spPr>
           <a:xfrm>
-            <a:off x="0" y="658368"/>
-            <a:ext cx="5120640" cy="5833872"/>
+            <a:off x="5349240" y="2461422"/>
+            <a:ext cx="6659575" cy="2913564"/>
           </a:xfrm>
           <a:prstGeom prst="rect">
             <a:avLst/>
@@ -12937,14 +13396,14 @@
       </p:pic>
       <p:sp>
         <p:nvSpPr>
-          <p:cNvPr id="4" name="Text 1"/>
+          <p:cNvPr id="6" name="Text 3"/>
           <p:cNvSpPr/>
           <p:nvPr/>
         </p:nvSpPr>
         <p:spPr>
           <a:xfrm>
-            <a:off x="5349240" y="1005840"/>
-            <a:ext cx="6522415" cy="731520"/>
+            <a:off x="5349240" y="6089904"/>
+            <a:ext cx="6659575" cy="347472"/>
           </a:xfrm>
           <a:prstGeom prst="rect">
             <a:avLst/>
@@ -12953,85 +13412,24 @@
           <a:ln/>
         </p:spPr>
         <p:txBody>
-          <a:bodyPr wrap="square" lIns="0" tIns="0" rIns="0" bIns="0" rtlCol="0" anchor="ctr">
-            <a:normAutofit/>
-          </a:bodyPr>
+          <a:bodyPr wrap="square" lIns="0" tIns="0" rIns="0" bIns="0" rtlCol="0" anchor="ctr"/>
           <a:lstStyle/>
           <a:p>
             <a:pPr algn="ctr" indent="0" marL="0">
               <a:buNone/>
             </a:pPr>
             <a:r>
-              <a:rPr lang="en-US" sz="3600" b="1" dirty="0">
-                <a:solidFill>
-                  <a:srgbClr val="990011"/>
+              <a:rPr lang="en-US" sz="1600" i="1" dirty="0">
+                <a:solidFill>
+                  <a:srgbClr val="555555"/>
                 </a:solidFill>
                 <a:latin typeface="Times New Roman" pitchFamily="34" charset="0"/>
                 <a:ea typeface="Times New Roman" pitchFamily="34" charset="-122"/>
                 <a:cs typeface="Times New Roman" pitchFamily="34" charset="-120"/>
               </a:rPr>
-              <a:t>2. Erosional Processes of Wind (continued)</a:t>
-            </a:r>
-            <a:endParaRPr lang="en-US" sz="3600" dirty="0"/>
-          </a:p>
-        </p:txBody>
-      </p:sp>
-      <p:sp>
-        <p:nvSpPr>
-          <p:cNvPr id="5" name="Text 2"/>
-          <p:cNvSpPr/>
-          <p:nvPr/>
-        </p:nvSpPr>
-        <p:spPr>
-          <a:xfrm>
-            <a:off x="5349240" y="1783080"/>
-            <a:ext cx="6522415" cy="4663440"/>
-          </a:xfrm>
-          <a:prstGeom prst="rect">
-            <a:avLst/>
-          </a:prstGeom>
-          <a:noFill/>
-          <a:ln/>
-        </p:spPr>
-        <p:txBody>
-          <a:bodyPr wrap="square" lIns="0" tIns="0" rIns="0" bIns="0" rtlCol="0" anchor="t"/>
-          <a:lstStyle/>
-          <a:p>
-            <a:pPr algn="l" indent="0" marL="0">
-              <a:spcAft>
-                <a:spcPts val="800"/>
-              </a:spcAft>
-              <a:buNone/>
-            </a:pPr>
-            <a:r>
-              <a:rPr lang="en-US" sz="4000" b="1" dirty="0">
-                <a:solidFill>
-                  <a:srgbClr val="111111"/>
-                </a:solidFill>
-                <a:latin typeface="Times New Roman" pitchFamily="34" charset="0"/>
-                <a:ea typeface="Times New Roman" pitchFamily="34" charset="-122"/>
-                <a:cs typeface="Times New Roman" pitchFamily="34" charset="-120"/>
-              </a:rPr>
-              <a:t>Attrition: </a:t>
-            </a:r>
-            <a:pPr algn="l" indent="0" marL="0">
-              <a:spcAft>
-                <a:spcPts val="800"/>
-              </a:spcAft>
-              <a:buNone/>
-            </a:pPr>
-            <a:r>
-              <a:rPr lang="en-US" sz="4000" dirty="0">
-                <a:solidFill>
-                  <a:srgbClr val="111111"/>
-                </a:solidFill>
-                <a:latin typeface="Times New Roman" pitchFamily="34" charset="0"/>
-                <a:ea typeface="Times New Roman" pitchFamily="34" charset="-122"/>
-                <a:cs typeface="Times New Roman" pitchFamily="34" charset="-120"/>
-              </a:rPr>
-              <a:t>It is the wearing of sand grains as they hit each other.</a:t>
-            </a:r>
-            <a:endParaRPr lang="en-US" sz="4000" dirty="0"/>
+              <a:t>Illustration: hot deserts</a:t>
+            </a:r>
+            <a:endParaRPr lang="en-US" sz="1600" dirty="0"/>
           </a:p>
         </p:txBody>
       </p:sp>
@@ -13164,7 +13562,7 @@
         <p:spPr>
           <a:xfrm>
             <a:off x="0" y="658368"/>
-            <a:ext cx="3840480" cy="5833872"/>
+            <a:ext cx="2468880" cy="5833872"/>
           </a:xfrm>
           <a:prstGeom prst="rect">
             <a:avLst/>
@@ -13179,8 +13577,8 @@
         </p:nvSpPr>
         <p:spPr>
           <a:xfrm>
-            <a:off x="4069080" y="1005840"/>
-            <a:ext cx="7802575" cy="731520"/>
+            <a:off x="2697480" y="1005840"/>
+            <a:ext cx="9174175" cy="731520"/>
           </a:xfrm>
           <a:prstGeom prst="rect">
             <a:avLst/>
@@ -13206,7 +13604,7 @@
                 <a:ea typeface="Times New Roman" pitchFamily="34" charset="-122"/>
                 <a:cs typeface="Times New Roman" pitchFamily="34" charset="-120"/>
               </a:rPr>
-              <a:t>3. Erosional Features</a:t>
+              <a:t>1. Location of Semi-arid Areas and Hot Deserts in Africa</a:t>
             </a:r>
             <a:endParaRPr lang="en-US" sz="3600" dirty="0"/>
           </a:p>
@@ -13220,8 +13618,8 @@
         </p:nvSpPr>
         <p:spPr>
           <a:xfrm>
-            <a:off x="4069080" y="1783080"/>
-            <a:ext cx="7802575" cy="4663440"/>
+            <a:off x="2697480" y="1783080"/>
+            <a:ext cx="9174175" cy="4663440"/>
           </a:xfrm>
           <a:prstGeom prst="rect">
             <a:avLst/>
@@ -13240,7 +13638,7 @@
               <a:buNone/>
             </a:pPr>
             <a:r>
-              <a:rPr lang="en-US" sz="4000" i="1" dirty="0">
+              <a:rPr lang="en-US" sz="4000" b="1" dirty="0">
                 <a:solidFill>
                   <a:srgbClr val="111111"/>
                 </a:solidFill>
@@ -13248,11 +13646,8 @@
                 <a:ea typeface="Times New Roman" pitchFamily="34" charset="-122"/>
                 <a:cs typeface="Times New Roman" pitchFamily="34" charset="-120"/>
               </a:rPr>
-              <a:t>Wind erosion forms the following features:</a:t>
-            </a:r>
-            <a:endParaRPr lang="en-US" sz="4000" dirty="0"/>
-          </a:p>
-          <a:p>
+              <a:t>The Namib: </a:t>
+            </a:r>
             <a:pPr algn="l" indent="0" marL="0">
               <a:spcAft>
                 <a:spcPts val="800"/>
@@ -13260,7 +13655,7 @@
               <a:buNone/>
             </a:pPr>
             <a:r>
-              <a:rPr lang="en-US" sz="4000" b="1" dirty="0">
+              <a:rPr lang="en-US" sz="4000" dirty="0">
                 <a:solidFill>
                   <a:srgbClr val="111111"/>
                 </a:solidFill>
@@ -13268,8 +13663,11 @@
                 <a:ea typeface="Times New Roman" pitchFamily="34" charset="-122"/>
                 <a:cs typeface="Times New Roman" pitchFamily="34" charset="-120"/>
               </a:rPr>
-              <a:t>Rock pedestal: </a:t>
-            </a:r>
+              <a:t>It is a coastal desert in south-western Africa.</a:t>
+            </a:r>
+            <a:endParaRPr lang="en-US" sz="4000" dirty="0"/>
+          </a:p>
+          <a:p>
             <a:pPr algn="l" indent="0" marL="0">
               <a:spcAft>
                 <a:spcPts val="800"/>
@@ -13277,7 +13675,7 @@
               <a:buNone/>
             </a:pPr>
             <a:r>
-              <a:rPr lang="en-US" sz="4000" dirty="0">
+              <a:rPr lang="en-US" sz="4000" b="1" dirty="0">
                 <a:solidFill>
                   <a:srgbClr val="111111"/>
                 </a:solidFill>
@@ -13285,11 +13683,8 @@
                 <a:ea typeface="Times New Roman" pitchFamily="34" charset="-122"/>
                 <a:cs typeface="Times New Roman" pitchFamily="34" charset="-120"/>
               </a:rPr>
-              <a:t>It is a mushroom-shaped rock worn at its base by abrasion.</a:t>
-            </a:r>
-            <a:endParaRPr lang="en-US" sz="4000" dirty="0"/>
-          </a:p>
-          <a:p>
+              <a:t>The Kalahari: </a:t>
+            </a:r>
             <a:pPr algn="l" indent="0" marL="0">
               <a:spcAft>
                 <a:spcPts val="800"/>
@@ -13297,7 +13692,7 @@
               <a:buNone/>
             </a:pPr>
             <a:r>
-              <a:rPr lang="en-US" sz="4000" b="1" dirty="0">
+              <a:rPr lang="en-US" sz="4000" dirty="0">
                 <a:solidFill>
                   <a:srgbClr val="111111"/>
                 </a:solidFill>
@@ -13305,8 +13700,11 @@
                 <a:ea typeface="Times New Roman" pitchFamily="34" charset="-122"/>
                 <a:cs typeface="Times New Roman" pitchFamily="34" charset="-120"/>
               </a:rPr>
-              <a:t>Zeugen: </a:t>
-            </a:r>
+              <a:t>It is a semi-desert in Southern Africa, mainly in Botswana.</a:t>
+            </a:r>
+            <a:endParaRPr lang="en-US" sz="4000" dirty="0"/>
+          </a:p>
+          <a:p>
             <a:pPr algn="l" indent="0" marL="0">
               <a:spcAft>
                 <a:spcPts val="800"/>
@@ -13314,7 +13712,7 @@
               <a:buNone/>
             </a:pPr>
             <a:r>
-              <a:rPr lang="en-US" sz="4000" dirty="0">
+              <a:rPr lang="en-US" sz="4000" b="1" dirty="0">
                 <a:solidFill>
                   <a:srgbClr val="111111"/>
                 </a:solidFill>
@@ -13322,7 +13720,24 @@
                 <a:ea typeface="Times New Roman" pitchFamily="34" charset="-122"/>
                 <a:cs typeface="Times New Roman" pitchFamily="34" charset="-120"/>
               </a:rPr>
-              <a:t>They are tabular ridges of hard rock resting on soft rock.</a:t>
+              <a:t>The Sahel: </a:t>
+            </a:r>
+            <a:pPr algn="l" indent="0" marL="0">
+              <a:spcAft>
+                <a:spcPts val="800"/>
+              </a:spcAft>
+              <a:buNone/>
+            </a:pPr>
+            <a:r>
+              <a:rPr lang="en-US" sz="4000" dirty="0">
+                <a:solidFill>
+                  <a:srgbClr val="111111"/>
+                </a:solidFill>
+                <a:latin typeface="Times New Roman" pitchFamily="34" charset="0"/>
+                <a:ea typeface="Times New Roman" pitchFamily="34" charset="-122"/>
+                <a:cs typeface="Times New Roman" pitchFamily="34" charset="-120"/>
+              </a:rPr>
+              <a:t>It is a semi-arid belt south of the Sahara, from Senegal to Sudan, including the Far North of Cameroon.</a:t>
             </a:r>
             <a:endParaRPr lang="en-US" sz="4000" dirty="0"/>
           </a:p>
@@ -13499,7 +13914,7 @@
                 <a:ea typeface="Times New Roman" pitchFamily="34" charset="-122"/>
                 <a:cs typeface="Times New Roman" pitchFamily="34" charset="-120"/>
               </a:rPr>
-              <a:t>3. Erosional Features (continued)</a:t>
+              <a:t>1. Location of Semi-arid Areas and Hot Deserts in Africa (continued)</a:t>
             </a:r>
             <a:endParaRPr lang="en-US" sz="3600" dirty="0"/>
           </a:p>
@@ -13541,7 +13956,7 @@
                 <a:ea typeface="Times New Roman" pitchFamily="34" charset="-122"/>
                 <a:cs typeface="Times New Roman" pitchFamily="34" charset="-120"/>
               </a:rPr>
-              <a:t>Yardangs: </a:t>
+              <a:t>The Horn of Africa: </a:t>
             </a:r>
             <a:pPr algn="l" indent="0" marL="0">
               <a:spcAft>
@@ -13558,44 +13973,7 @@
                 <a:ea typeface="Times New Roman" pitchFamily="34" charset="-122"/>
                 <a:cs typeface="Times New Roman" pitchFamily="34" charset="-120"/>
               </a:rPr>
-              <a:t>They are long ridges of rock lying in the direction of the wind.</a:t>
-            </a:r>
-            <a:endParaRPr lang="en-US" sz="4000" dirty="0"/>
-          </a:p>
-          <a:p>
-            <a:pPr algn="l" indent="0" marL="0">
-              <a:spcAft>
-                <a:spcPts val="800"/>
-              </a:spcAft>
-              <a:buNone/>
-            </a:pPr>
-            <a:r>
-              <a:rPr lang="en-US" sz="4000" b="1" dirty="0">
-                <a:solidFill>
-                  <a:srgbClr val="111111"/>
-                </a:solidFill>
-                <a:latin typeface="Times New Roman" pitchFamily="34" charset="0"/>
-                <a:ea typeface="Times New Roman" pitchFamily="34" charset="-122"/>
-                <a:cs typeface="Times New Roman" pitchFamily="34" charset="-120"/>
-              </a:rPr>
-              <a:t>Inselberg: </a:t>
-            </a:r>
-            <a:pPr algn="l" indent="0" marL="0">
-              <a:spcAft>
-                <a:spcPts val="800"/>
-              </a:spcAft>
-              <a:buNone/>
-            </a:pPr>
-            <a:r>
-              <a:rPr lang="en-US" sz="4000" dirty="0">
-                <a:solidFill>
-                  <a:srgbClr val="111111"/>
-                </a:solidFill>
-                <a:latin typeface="Times New Roman" pitchFamily="34" charset="0"/>
-                <a:ea typeface="Times New Roman" pitchFamily="34" charset="-122"/>
-                <a:cs typeface="Times New Roman" pitchFamily="34" charset="-120"/>
-              </a:rPr>
-              <a:t>It is an isolated steep hill rising from a flat plain.</a:t>
+              <a:t>Parts of Somalia, Ethiopia and Kenya are semi-arid or desert.</a:t>
             </a:r>
             <a:endParaRPr lang="en-US" sz="4000" dirty="0"/>
           </a:p>
@@ -13713,48 +14091,9 @@
           </a:p>
         </p:txBody>
       </p:sp>
-      <p:sp>
-        <p:nvSpPr>
-          <p:cNvPr id="3" name="Text 1"/>
-          <p:cNvSpPr/>
-          <p:nvPr/>
-        </p:nvSpPr>
-        <p:spPr>
-          <a:xfrm>
-            <a:off x="457200" y="1005840"/>
-            <a:ext cx="11277295" cy="731520"/>
-          </a:xfrm>
-          <a:prstGeom prst="rect">
-            <a:avLst/>
-          </a:prstGeom>
-          <a:noFill/>
-          <a:ln/>
-        </p:spPr>
-        <p:txBody>
-          <a:bodyPr wrap="square" lIns="0" tIns="0" rIns="0" bIns="0" rtlCol="0" anchor="ctr"/>
-          <a:lstStyle/>
-          <a:p>
-            <a:pPr algn="ctr" indent="0" marL="0">
-              <a:buNone/>
-            </a:pPr>
-            <a:r>
-              <a:rPr lang="en-US" sz="3600" b="1" dirty="0">
-                <a:solidFill>
-                  <a:srgbClr val="990011"/>
-                </a:solidFill>
-                <a:latin typeface="Times New Roman" pitchFamily="34" charset="0"/>
-                <a:ea typeface="Times New Roman" pitchFamily="34" charset="-122"/>
-                <a:cs typeface="Times New Roman" pitchFamily="34" charset="-120"/>
-              </a:rPr>
-              <a:t>3. Erosional Features</a:t>
-            </a:r>
-            <a:endParaRPr lang="en-US" sz="3600" dirty="0"/>
-          </a:p>
-        </p:txBody>
-      </p:sp>
       <p:pic>
         <p:nvPicPr>
-          <p:cNvPr id="4" name="Image 0" descr="/home/claude/f4/img/v2/abrasion_last.png">    </p:cNvPr>
+          <p:cNvPr id="3" name="Image 0" descr="/home/claude/f4/img/minesec_sheet.png">    </p:cNvPr>
           <p:cNvPicPr>
             <a:picLocks noChangeAspect="1"/>
           </p:cNvPicPr>
@@ -13768,8 +14107,8 @@
         </p:blipFill>
         <p:spPr>
           <a:xfrm>
-            <a:off x="629930" y="1783080"/>
-            <a:ext cx="10931835" cy="4270248"/>
+            <a:off x="0" y="658368"/>
+            <a:ext cx="5120640" cy="5833872"/>
           </a:xfrm>
           <a:prstGeom prst="rect">
             <a:avLst/>
@@ -13778,14 +14117,14 @@
       </p:pic>
       <p:sp>
         <p:nvSpPr>
-          <p:cNvPr id="5" name="Text 2"/>
+          <p:cNvPr id="4" name="Text 1"/>
           <p:cNvSpPr/>
           <p:nvPr/>
         </p:nvSpPr>
         <p:spPr>
           <a:xfrm>
-            <a:off x="457200" y="6089904"/>
-            <a:ext cx="11277295" cy="347472"/>
+            <a:off x="5349240" y="1005840"/>
+            <a:ext cx="6522415" cy="731520"/>
           </a:xfrm>
           <a:prstGeom prst="rect">
             <a:avLst/>
@@ -13794,24 +14133,105 @@
           <a:ln/>
         </p:spPr>
         <p:txBody>
-          <a:bodyPr wrap="square" lIns="0" tIns="0" rIns="0" bIns="0" rtlCol="0" anchor="ctr"/>
+          <a:bodyPr wrap="square" lIns="0" tIns="0" rIns="0" bIns="0" rtlCol="0" anchor="ctr">
+            <a:normAutofit/>
+          </a:bodyPr>
           <a:lstStyle/>
           <a:p>
             <a:pPr algn="ctr" indent="0" marL="0">
               <a:buNone/>
             </a:pPr>
             <a:r>
-              <a:rPr lang="en-US" sz="1800" i="1" dirty="0">
-                <a:solidFill>
-                  <a:srgbClr val="555555"/>
+              <a:rPr lang="en-US" sz="3600" b="1" dirty="0">
+                <a:solidFill>
+                  <a:srgbClr val="990011"/>
                 </a:solidFill>
                 <a:latin typeface="Times New Roman" pitchFamily="34" charset="0"/>
                 <a:ea typeface="Times New Roman" pitchFamily="34" charset="-122"/>
                 <a:cs typeface="Times New Roman" pitchFamily="34" charset="-120"/>
               </a:rPr>
-              <a:t>Illustration: a rock pedestal</a:t>
-            </a:r>
-            <a:endParaRPr lang="en-US" sz="1800" dirty="0"/>
+              <a:t>2. Main Erosional Processes of Wind</a:t>
+            </a:r>
+            <a:endParaRPr lang="en-US" sz="3600" dirty="0"/>
+          </a:p>
+        </p:txBody>
+      </p:sp>
+      <p:sp>
+        <p:nvSpPr>
+          <p:cNvPr id="5" name="Text 2"/>
+          <p:cNvSpPr/>
+          <p:nvPr/>
+        </p:nvSpPr>
+        <p:spPr>
+          <a:xfrm>
+            <a:off x="5349240" y="1783080"/>
+            <a:ext cx="6522415" cy="4663440"/>
+          </a:xfrm>
+          <a:prstGeom prst="rect">
+            <a:avLst/>
+          </a:prstGeom>
+          <a:noFill/>
+          <a:ln/>
+        </p:spPr>
+        <p:txBody>
+          <a:bodyPr wrap="square" lIns="0" tIns="0" rIns="0" bIns="0" rtlCol="0" anchor="t"/>
+          <a:lstStyle/>
+          <a:p>
+            <a:pPr algn="l" indent="0" marL="0">
+              <a:spcAft>
+                <a:spcPts val="800"/>
+              </a:spcAft>
+              <a:buNone/>
+            </a:pPr>
+            <a:r>
+              <a:rPr lang="en-US" sz="4000" i="1" dirty="0">
+                <a:solidFill>
+                  <a:srgbClr val="111111"/>
+                </a:solidFill>
+                <a:latin typeface="Times New Roman" pitchFamily="34" charset="0"/>
+                <a:ea typeface="Times New Roman" pitchFamily="34" charset="-122"/>
+                <a:cs typeface="Times New Roman" pitchFamily="34" charset="-120"/>
+              </a:rPr>
+              <a:t>Wind erodes the land through the following processes:</a:t>
+            </a:r>
+            <a:endParaRPr lang="en-US" sz="4000" dirty="0"/>
+          </a:p>
+          <a:p>
+            <a:pPr algn="l" indent="0" marL="0">
+              <a:spcAft>
+                <a:spcPts val="800"/>
+              </a:spcAft>
+              <a:buNone/>
+            </a:pPr>
+            <a:r>
+              <a:rPr lang="en-US" sz="4000" b="1" dirty="0">
+                <a:solidFill>
+                  <a:srgbClr val="111111"/>
+                </a:solidFill>
+                <a:latin typeface="Times New Roman" pitchFamily="34" charset="0"/>
+                <a:ea typeface="Times New Roman" pitchFamily="34" charset="-122"/>
+                <a:cs typeface="Times New Roman" pitchFamily="34" charset="-120"/>
+              </a:rPr>
+              <a:t>Deflation: </a:t>
+            </a:r>
+            <a:pPr algn="l" indent="0" marL="0">
+              <a:spcAft>
+                <a:spcPts val="800"/>
+              </a:spcAft>
+              <a:buNone/>
+            </a:pPr>
+            <a:r>
+              <a:rPr lang="en-US" sz="4000" dirty="0">
+                <a:solidFill>
+                  <a:srgbClr val="111111"/>
+                </a:solidFill>
+                <a:latin typeface="Times New Roman" pitchFamily="34" charset="0"/>
+                <a:ea typeface="Times New Roman" pitchFamily="34" charset="-122"/>
+                <a:cs typeface="Times New Roman" pitchFamily="34" charset="-120"/>
+              </a:rPr>
+              <a:t>The wind lifts and removes loose sand and dust, leaving hollows and stony surfaces.</a:t>
+            </a:r>
+            <a:endParaRPr lang="en-US" sz="4000" dirty="0"/>
           </a:p>
         </p:txBody>
       </p:sp>
@@ -13921,15 +14341,115 @@
                 <a:ea typeface="Calibri" pitchFamily="34" charset="-122"/>
                 <a:cs typeface="Calibri" pitchFamily="34" charset="-120"/>
               </a:rPr>
-              <a:t>FORMATIVE EVALUATION</a:t>
+              <a:t>BOARD SUMMARY</a:t>
             </a:r>
             <a:endParaRPr lang="en-US" sz="1400" dirty="0"/>
+          </a:p>
+        </p:txBody>
+      </p:sp>
+      <p:sp>
+        <p:nvSpPr>
+          <p:cNvPr id="3" name="Text 1"/>
+          <p:cNvSpPr/>
+          <p:nvPr/>
+        </p:nvSpPr>
+        <p:spPr>
+          <a:xfrm>
+            <a:off x="365760" y="1005840"/>
+            <a:ext cx="11460175" cy="731520"/>
+          </a:xfrm>
+          <a:prstGeom prst="rect">
+            <a:avLst/>
+          </a:prstGeom>
+          <a:noFill/>
+          <a:ln/>
+        </p:spPr>
+        <p:txBody>
+          <a:bodyPr wrap="square" lIns="0" tIns="0" rIns="0" bIns="0" rtlCol="0" anchor="ctr">
+            <a:normAutofit/>
+          </a:bodyPr>
+          <a:lstStyle/>
+          <a:p>
+            <a:pPr algn="ctr" indent="0" marL="0">
+              <a:buNone/>
+            </a:pPr>
+            <a:r>
+              <a:rPr lang="en-US" sz="3600" b="1" dirty="0">
+                <a:solidFill>
+                  <a:srgbClr val="990011"/>
+                </a:solidFill>
+                <a:latin typeface="Times New Roman" pitchFamily="34" charset="0"/>
+                <a:ea typeface="Times New Roman" pitchFamily="34" charset="-122"/>
+                <a:cs typeface="Times New Roman" pitchFamily="34" charset="-120"/>
+              </a:rPr>
+              <a:t>2. Main Erosional Processes of Wind</a:t>
+            </a:r>
+            <a:endParaRPr lang="en-US" sz="3600" dirty="0"/>
+          </a:p>
+        </p:txBody>
+      </p:sp>
+      <p:sp>
+        <p:nvSpPr>
+          <p:cNvPr id="4" name="Text 2"/>
+          <p:cNvSpPr/>
+          <p:nvPr/>
+        </p:nvSpPr>
+        <p:spPr>
+          <a:xfrm>
+            <a:off x="365760" y="1783080"/>
+            <a:ext cx="4846320" cy="4617720"/>
+          </a:xfrm>
+          <a:prstGeom prst="rect">
+            <a:avLst/>
+          </a:prstGeom>
+          <a:noFill/>
+          <a:ln/>
+        </p:spPr>
+        <p:txBody>
+          <a:bodyPr wrap="square" lIns="0" tIns="0" rIns="0" bIns="0" rtlCol="0" anchor="t"/>
+          <a:lstStyle/>
+          <a:p>
+            <a:pPr algn="l" indent="0" marL="0">
+              <a:spcAft>
+                <a:spcPts val="800"/>
+              </a:spcAft>
+              <a:buNone/>
+            </a:pPr>
+            <a:r>
+              <a:rPr lang="en-US" sz="3600" b="1" dirty="0">
+                <a:solidFill>
+                  <a:srgbClr val="111111"/>
+                </a:solidFill>
+                <a:latin typeface="Times New Roman" pitchFamily="34" charset="0"/>
+                <a:ea typeface="Times New Roman" pitchFamily="34" charset="-122"/>
+                <a:cs typeface="Times New Roman" pitchFamily="34" charset="-120"/>
+              </a:rPr>
+              <a:t>Abrasion: </a:t>
+            </a:r>
+            <a:pPr algn="l" indent="0" marL="0">
+              <a:spcAft>
+                <a:spcPts val="800"/>
+              </a:spcAft>
+              <a:buNone/>
+            </a:pPr>
+            <a:r>
+              <a:rPr lang="en-US" sz="3600" dirty="0">
+                <a:solidFill>
+                  <a:srgbClr val="111111"/>
+                </a:solidFill>
+                <a:latin typeface="Times New Roman" pitchFamily="34" charset="0"/>
+                <a:ea typeface="Times New Roman" pitchFamily="34" charset="-122"/>
+                <a:cs typeface="Times New Roman" pitchFamily="34" charset="-120"/>
+              </a:rPr>
+              <a:t>Sand thrown by the wind near the ground wears and polishes rocks.</a:t>
+            </a:r>
+            <a:endParaRPr lang="en-US" sz="3600" dirty="0"/>
           </a:p>
         </p:txBody>
       </p:sp>
       <p:pic>
         <p:nvPicPr>
-          <p:cNvPr id="3" name="Image 0" descr="/home/claude/f4/img/minesec_sheet.png">    </p:cNvPr>
+          <p:cNvPr id="5" name="Image 0" descr="/home/claude/f4/img/v2/abrasion_last.png">    </p:cNvPr>
           <p:cNvPicPr>
             <a:picLocks noChangeAspect="1"/>
           </p:cNvPicPr>
@@ -13943,8 +14463,8 @@
         </p:blipFill>
         <p:spPr>
           <a:xfrm>
-            <a:off x="0" y="658368"/>
-            <a:ext cx="5120640" cy="5833872"/>
+            <a:off x="5349240" y="2617506"/>
+            <a:ext cx="6659575" cy="2601397"/>
           </a:xfrm>
           <a:prstGeom prst="rect">
             <a:avLst/>
@@ -13953,14 +14473,14 @@
       </p:pic>
       <p:sp>
         <p:nvSpPr>
-          <p:cNvPr id="4" name="Text 1"/>
+          <p:cNvPr id="6" name="Text 3"/>
           <p:cNvSpPr/>
           <p:nvPr/>
         </p:nvSpPr>
         <p:spPr>
           <a:xfrm>
-            <a:off x="5349240" y="1005840"/>
-            <a:ext cx="6522415" cy="731520"/>
+            <a:off x="5349240" y="6089904"/>
+            <a:ext cx="6659575" cy="347472"/>
           </a:xfrm>
           <a:prstGeom prst="rect">
             <a:avLst/>
@@ -13969,68 +14489,24 @@
           <a:ln/>
         </p:spPr>
         <p:txBody>
-          <a:bodyPr wrap="square" lIns="0" tIns="0" rIns="0" bIns="0" rtlCol="0" anchor="ctr">
-            <a:normAutofit/>
-          </a:bodyPr>
+          <a:bodyPr wrap="square" lIns="0" tIns="0" rIns="0" bIns="0" rtlCol="0" anchor="ctr"/>
           <a:lstStyle/>
           <a:p>
             <a:pPr algn="ctr" indent="0" marL="0">
               <a:buNone/>
             </a:pPr>
             <a:r>
-              <a:rPr lang="en-US" sz="3600" b="1" dirty="0">
-                <a:solidFill>
-                  <a:srgbClr val="990011"/>
+              <a:rPr lang="en-US" sz="1600" i="1" dirty="0">
+                <a:solidFill>
+                  <a:srgbClr val="555555"/>
                 </a:solidFill>
                 <a:latin typeface="Times New Roman" pitchFamily="34" charset="0"/>
                 <a:ea typeface="Times New Roman" pitchFamily="34" charset="-122"/>
                 <a:cs typeface="Times New Roman" pitchFamily="34" charset="-120"/>
               </a:rPr>
-              <a:t>Evaluation 1</a:t>
-            </a:r>
-            <a:endParaRPr lang="en-US" sz="3600" dirty="0"/>
-          </a:p>
-        </p:txBody>
-      </p:sp>
-      <p:sp>
-        <p:nvSpPr>
-          <p:cNvPr id="5" name="Text 2"/>
-          <p:cNvSpPr/>
-          <p:nvPr/>
-        </p:nvSpPr>
-        <p:spPr>
-          <a:xfrm>
-            <a:off x="5349240" y="1783080"/>
-            <a:ext cx="6522415" cy="4663440"/>
-          </a:xfrm>
-          <a:prstGeom prst="rect">
-            <a:avLst/>
-          </a:prstGeom>
-          <a:noFill/>
-          <a:ln/>
-        </p:spPr>
-        <p:txBody>
-          <a:bodyPr wrap="square" lIns="0" tIns="0" rIns="0" bIns="0" rtlCol="0" anchor="t"/>
-          <a:lstStyle/>
-          <a:p>
-            <a:pPr algn="l" indent="0" marL="0">
-              <a:spcAft>
-                <a:spcPts val="800"/>
-              </a:spcAft>
-              <a:buNone/>
-            </a:pPr>
-            <a:r>
-              <a:rPr lang="en-US" sz="4000" dirty="0">
-                <a:solidFill>
-                  <a:srgbClr val="111111"/>
-                </a:solidFill>
-                <a:latin typeface="Times New Roman" pitchFamily="34" charset="0"/>
-                <a:ea typeface="Times New Roman" pitchFamily="34" charset="-122"/>
-                <a:cs typeface="Times New Roman" pitchFamily="34" charset="-120"/>
-              </a:rPr>
-              <a:t>What is abrasion?</a:t>
-            </a:r>
-            <a:endParaRPr lang="en-US" sz="4000" dirty="0"/>
+              <a:t>Illustration: abrasion</a:t>
+            </a:r>
+            <a:endParaRPr lang="en-US" sz="1600" dirty="0"/>
           </a:p>
         </p:txBody>
       </p:sp>
@@ -14140,7 +14616,7 @@
                 <a:ea typeface="Calibri" pitchFamily="34" charset="-122"/>
                 <a:cs typeface="Calibri" pitchFamily="34" charset="-120"/>
               </a:rPr>
-              <a:t>FORMATIVE EVALUATION</a:t>
+              <a:t>BOARD SUMMARY</a:t>
             </a:r>
             <a:endParaRPr lang="en-US" sz="1400" dirty="0"/>
           </a:p>
@@ -14205,7 +14681,7 @@
                 <a:ea typeface="Times New Roman" pitchFamily="34" charset="-122"/>
                 <a:cs typeface="Times New Roman" pitchFamily="34" charset="-120"/>
               </a:rPr>
-              <a:t>Expected Answer</a:t>
+              <a:t>2. Main Erosional Processes of Wind</a:t>
             </a:r>
             <a:endParaRPr lang="en-US" sz="3600" dirty="0"/>
           </a:p>
@@ -14239,7 +14715,7 @@
               <a:buNone/>
             </a:pPr>
             <a:r>
-              <a:rPr lang="en-US" sz="4000" dirty="0">
+              <a:rPr lang="en-US" sz="4000" b="1" dirty="0">
                 <a:solidFill>
                   <a:srgbClr val="111111"/>
                 </a:solidFill>
@@ -14247,7 +14723,24 @@
                 <a:ea typeface="Times New Roman" pitchFamily="34" charset="-122"/>
                 <a:cs typeface="Times New Roman" pitchFamily="34" charset="-120"/>
               </a:rPr>
-              <a:t>The wearing of rocks by sand thrown by the wind.</a:t>
+              <a:t>Attrition: </a:t>
+            </a:r>
+            <a:pPr algn="l" indent="0" marL="0">
+              <a:spcAft>
+                <a:spcPts val="800"/>
+              </a:spcAft>
+              <a:buNone/>
+            </a:pPr>
+            <a:r>
+              <a:rPr lang="en-US" sz="4000" dirty="0">
+                <a:solidFill>
+                  <a:srgbClr val="111111"/>
+                </a:solidFill>
+                <a:latin typeface="Times New Roman" pitchFamily="34" charset="0"/>
+                <a:ea typeface="Times New Roman" pitchFamily="34" charset="-122"/>
+                <a:cs typeface="Times New Roman" pitchFamily="34" charset="-120"/>
+              </a:rPr>
+              <a:t>Sand grains hit one another, become smaller and rounder, and turn into fine dust.</a:t>
             </a:r>
             <a:endParaRPr lang="en-US" sz="4000" dirty="0"/>
           </a:p>
@@ -14359,15 +14852,135 @@
                 <a:ea typeface="Calibri" pitchFamily="34" charset="-122"/>
                 <a:cs typeface="Calibri" pitchFamily="34" charset="-120"/>
               </a:rPr>
-              <a:t>FORMATIVE EVALUATION</a:t>
+              <a:t>BOARD SUMMARY</a:t>
             </a:r>
             <a:endParaRPr lang="en-US" sz="1400" dirty="0"/>
+          </a:p>
+        </p:txBody>
+      </p:sp>
+      <p:sp>
+        <p:nvSpPr>
+          <p:cNvPr id="3" name="Text 1"/>
+          <p:cNvSpPr/>
+          <p:nvPr/>
+        </p:nvSpPr>
+        <p:spPr>
+          <a:xfrm>
+            <a:off x="365760" y="1005840"/>
+            <a:ext cx="11460175" cy="731520"/>
+          </a:xfrm>
+          <a:prstGeom prst="rect">
+            <a:avLst/>
+          </a:prstGeom>
+          <a:noFill/>
+          <a:ln/>
+        </p:spPr>
+        <p:txBody>
+          <a:bodyPr wrap="square" lIns="0" tIns="0" rIns="0" bIns="0" rtlCol="0" anchor="ctr">
+            <a:normAutofit/>
+          </a:bodyPr>
+          <a:lstStyle/>
+          <a:p>
+            <a:pPr algn="ctr" indent="0" marL="0">
+              <a:buNone/>
+            </a:pPr>
+            <a:r>
+              <a:rPr lang="en-US" sz="3600" b="1" dirty="0">
+                <a:solidFill>
+                  <a:srgbClr val="990011"/>
+                </a:solidFill>
+                <a:latin typeface="Times New Roman" pitchFamily="34" charset="0"/>
+                <a:ea typeface="Times New Roman" pitchFamily="34" charset="-122"/>
+                <a:cs typeface="Times New Roman" pitchFamily="34" charset="-120"/>
+              </a:rPr>
+              <a:t>3. Erosional Features</a:t>
+            </a:r>
+            <a:endParaRPr lang="en-US" sz="3600" dirty="0"/>
+          </a:p>
+        </p:txBody>
+      </p:sp>
+      <p:sp>
+        <p:nvSpPr>
+          <p:cNvPr id="4" name="Text 2"/>
+          <p:cNvSpPr/>
+          <p:nvPr/>
+        </p:nvSpPr>
+        <p:spPr>
+          <a:xfrm>
+            <a:off x="365760" y="1783080"/>
+            <a:ext cx="4846320" cy="4617720"/>
+          </a:xfrm>
+          <a:prstGeom prst="rect">
+            <a:avLst/>
+          </a:prstGeom>
+          <a:noFill/>
+          <a:ln/>
+        </p:spPr>
+        <p:txBody>
+          <a:bodyPr wrap="square" lIns="0" tIns="0" rIns="0" bIns="0" rtlCol="0" anchor="t"/>
+          <a:lstStyle/>
+          <a:p>
+            <a:pPr algn="l" indent="0" marL="0">
+              <a:spcAft>
+                <a:spcPts val="800"/>
+              </a:spcAft>
+              <a:buNone/>
+            </a:pPr>
+            <a:r>
+              <a:rPr lang="en-US" sz="3600" i="1" dirty="0">
+                <a:solidFill>
+                  <a:srgbClr val="111111"/>
+                </a:solidFill>
+                <a:latin typeface="Times New Roman" pitchFamily="34" charset="0"/>
+                <a:ea typeface="Times New Roman" pitchFamily="34" charset="-122"/>
+                <a:cs typeface="Times New Roman" pitchFamily="34" charset="-120"/>
+              </a:rPr>
+              <a:t>Wind erosion forms the following features:</a:t>
+            </a:r>
+            <a:endParaRPr lang="en-US" sz="3600" dirty="0"/>
+          </a:p>
+          <a:p>
+            <a:pPr algn="l" indent="0" marL="0">
+              <a:spcAft>
+                <a:spcPts val="800"/>
+              </a:spcAft>
+              <a:buNone/>
+            </a:pPr>
+            <a:r>
+              <a:rPr lang="en-US" sz="3600" b="1" dirty="0">
+                <a:solidFill>
+                  <a:srgbClr val="111111"/>
+                </a:solidFill>
+                <a:latin typeface="Times New Roman" pitchFamily="34" charset="0"/>
+                <a:ea typeface="Times New Roman" pitchFamily="34" charset="-122"/>
+                <a:cs typeface="Times New Roman" pitchFamily="34" charset="-120"/>
+              </a:rPr>
+              <a:t>Rock pedestal: </a:t>
+            </a:r>
+            <a:pPr algn="l" indent="0" marL="0">
+              <a:spcAft>
+                <a:spcPts val="800"/>
+              </a:spcAft>
+              <a:buNone/>
+            </a:pPr>
+            <a:r>
+              <a:rPr lang="en-US" sz="3600" dirty="0">
+                <a:solidFill>
+                  <a:srgbClr val="111111"/>
+                </a:solidFill>
+                <a:latin typeface="Times New Roman" pitchFamily="34" charset="0"/>
+                <a:ea typeface="Times New Roman" pitchFamily="34" charset="-122"/>
+                <a:cs typeface="Times New Roman" pitchFamily="34" charset="-120"/>
+              </a:rPr>
+              <a:t>It is a mushroom-shaped rock worn at its base by abrasion.</a:t>
+            </a:r>
+            <a:endParaRPr lang="en-US" sz="3600" dirty="0"/>
           </a:p>
         </p:txBody>
       </p:sp>
       <p:pic>
         <p:nvPicPr>
-          <p:cNvPr id="3" name="Image 0" descr="/home/claude/f4/img/minesec_sheet.png">    </p:cNvPr>
+          <p:cNvPr id="5" name="Image 0" descr="/home/claude/f4/img/v2/f4_pedestal.jpg">    </p:cNvPr>
           <p:cNvPicPr>
             <a:picLocks noChangeAspect="1"/>
           </p:cNvPicPr>
@@ -14381,8 +14994,8 @@
         </p:blipFill>
         <p:spPr>
           <a:xfrm>
-            <a:off x="0" y="658368"/>
-            <a:ext cx="5120640" cy="5833872"/>
+            <a:off x="5349240" y="2071212"/>
+            <a:ext cx="6659575" cy="3693983"/>
           </a:xfrm>
           <a:prstGeom prst="rect">
             <a:avLst/>
@@ -14391,14 +15004,14 @@
       </p:pic>
       <p:sp>
         <p:nvSpPr>
-          <p:cNvPr id="4" name="Text 1"/>
+          <p:cNvPr id="6" name="Text 3"/>
           <p:cNvSpPr/>
           <p:nvPr/>
         </p:nvSpPr>
         <p:spPr>
           <a:xfrm>
-            <a:off x="5349240" y="1005840"/>
-            <a:ext cx="6522415" cy="731520"/>
+            <a:off x="5349240" y="6089904"/>
+            <a:ext cx="6659575" cy="347472"/>
           </a:xfrm>
           <a:prstGeom prst="rect">
             <a:avLst/>
@@ -14407,68 +15020,24 @@
           <a:ln/>
         </p:spPr>
         <p:txBody>
-          <a:bodyPr wrap="square" lIns="0" tIns="0" rIns="0" bIns="0" rtlCol="0" anchor="ctr">
-            <a:normAutofit/>
-          </a:bodyPr>
+          <a:bodyPr wrap="square" lIns="0" tIns="0" rIns="0" bIns="0" rtlCol="0" anchor="ctr"/>
           <a:lstStyle/>
           <a:p>
             <a:pPr algn="ctr" indent="0" marL="0">
               <a:buNone/>
             </a:pPr>
             <a:r>
-              <a:rPr lang="en-US" sz="3600" b="1" dirty="0">
-                <a:solidFill>
-                  <a:srgbClr val="990011"/>
+              <a:rPr lang="en-US" sz="1600" i="1" dirty="0">
+                <a:solidFill>
+                  <a:srgbClr val="555555"/>
                 </a:solidFill>
                 <a:latin typeface="Times New Roman" pitchFamily="34" charset="0"/>
                 <a:ea typeface="Times New Roman" pitchFamily="34" charset="-122"/>
                 <a:cs typeface="Times New Roman" pitchFamily="34" charset="-120"/>
               </a:rPr>
-              <a:t>Evaluation 2</a:t>
-            </a:r>
-            <a:endParaRPr lang="en-US" sz="3600" dirty="0"/>
-          </a:p>
-        </p:txBody>
-      </p:sp>
-      <p:sp>
-        <p:nvSpPr>
-          <p:cNvPr id="5" name="Text 2"/>
-          <p:cNvSpPr/>
-          <p:nvPr/>
-        </p:nvSpPr>
-        <p:spPr>
-          <a:xfrm>
-            <a:off x="5349240" y="1783080"/>
-            <a:ext cx="6522415" cy="4663440"/>
-          </a:xfrm>
-          <a:prstGeom prst="rect">
-            <a:avLst/>
-          </a:prstGeom>
-          <a:noFill/>
-          <a:ln/>
-        </p:spPr>
-        <p:txBody>
-          <a:bodyPr wrap="square" lIns="0" tIns="0" rIns="0" bIns="0" rtlCol="0" anchor="t"/>
-          <a:lstStyle/>
-          <a:p>
-            <a:pPr algn="l" indent="0" marL="0">
-              <a:spcAft>
-                <a:spcPts val="800"/>
-              </a:spcAft>
-              <a:buNone/>
-            </a:pPr>
-            <a:r>
-              <a:rPr lang="en-US" sz="4000" dirty="0">
-                <a:solidFill>
-                  <a:srgbClr val="111111"/>
-                </a:solidFill>
-                <a:latin typeface="Times New Roman" pitchFamily="34" charset="0"/>
-                <a:ea typeface="Times New Roman" pitchFamily="34" charset="-122"/>
-                <a:cs typeface="Times New Roman" pitchFamily="34" charset="-120"/>
-              </a:rPr>
-              <a:t>Why is a rock pedestal narrow at the bottom?</a:t>
-            </a:r>
-            <a:endParaRPr lang="en-US" sz="4000" dirty="0"/>
+              <a:t>Illustration: a rock pedestal</a:t>
+            </a:r>
+            <a:endParaRPr lang="en-US" sz="1600" dirty="0"/>
           </a:p>
         </p:txBody>
       </p:sp>
@@ -14817,7 +15386,7 @@
                 <a:ea typeface="Calibri" pitchFamily="34" charset="-122"/>
                 <a:cs typeface="Calibri" pitchFamily="34" charset="-120"/>
               </a:rPr>
-              <a:t>FORMATIVE EVALUATION</a:t>
+              <a:t>BOARD SUMMARY</a:t>
             </a:r>
             <a:endParaRPr lang="en-US" sz="1400" dirty="0"/>
           </a:p>
@@ -14840,7 +15409,7 @@
         <p:spPr>
           <a:xfrm>
             <a:off x="0" y="658368"/>
-            <a:ext cx="5120640" cy="5833872"/>
+            <a:ext cx="3840480" cy="5833872"/>
           </a:xfrm>
           <a:prstGeom prst="rect">
             <a:avLst/>
@@ -14855,8 +15424,8 @@
         </p:nvSpPr>
         <p:spPr>
           <a:xfrm>
-            <a:off x="5349240" y="1005840"/>
-            <a:ext cx="6522415" cy="731520"/>
+            <a:off x="4069080" y="1005840"/>
+            <a:ext cx="7802575" cy="731520"/>
           </a:xfrm>
           <a:prstGeom prst="rect">
             <a:avLst/>
@@ -14882,7 +15451,7 @@
                 <a:ea typeface="Times New Roman" pitchFamily="34" charset="-122"/>
                 <a:cs typeface="Times New Roman" pitchFamily="34" charset="-120"/>
               </a:rPr>
-              <a:t>Expected Answer</a:t>
+              <a:t>3. Erosional Features</a:t>
             </a:r>
             <a:endParaRPr lang="en-US" sz="3600" dirty="0"/>
           </a:p>
@@ -14896,8 +15465,8 @@
         </p:nvSpPr>
         <p:spPr>
           <a:xfrm>
-            <a:off x="5349240" y="1783080"/>
-            <a:ext cx="6522415" cy="4663440"/>
+            <a:off x="4069080" y="1783080"/>
+            <a:ext cx="7802575" cy="4663440"/>
           </a:xfrm>
           <a:prstGeom prst="rect">
             <a:avLst/>
@@ -14916,7 +15485,7 @@
               <a:buNone/>
             </a:pPr>
             <a:r>
-              <a:rPr lang="en-US" sz="4000" dirty="0">
+              <a:rPr lang="en-US" sz="4000" b="1" dirty="0">
                 <a:solidFill>
                   <a:srgbClr val="111111"/>
                 </a:solidFill>
@@ -14924,7 +15493,61 @@
                 <a:ea typeface="Times New Roman" pitchFamily="34" charset="-122"/>
                 <a:cs typeface="Times New Roman" pitchFamily="34" charset="-120"/>
               </a:rPr>
-              <a:t>The wind throws most sand near the ground.</a:t>
+              <a:t>Zeugen: </a:t>
+            </a:r>
+            <a:pPr algn="l" indent="0" marL="0">
+              <a:spcAft>
+                <a:spcPts val="800"/>
+              </a:spcAft>
+              <a:buNone/>
+            </a:pPr>
+            <a:r>
+              <a:rPr lang="en-US" sz="4000" dirty="0">
+                <a:solidFill>
+                  <a:srgbClr val="111111"/>
+                </a:solidFill>
+                <a:latin typeface="Times New Roman" pitchFamily="34" charset="0"/>
+                <a:ea typeface="Times New Roman" pitchFamily="34" charset="-122"/>
+                <a:cs typeface="Times New Roman" pitchFamily="34" charset="-120"/>
+              </a:rPr>
+              <a:t>They are flat-topped ridges of hard rock resting on soft rock, separated by furrows.</a:t>
+            </a:r>
+            <a:endParaRPr lang="en-US" sz="4000" dirty="0"/>
+          </a:p>
+          <a:p>
+            <a:pPr algn="l" indent="0" marL="0">
+              <a:spcAft>
+                <a:spcPts val="800"/>
+              </a:spcAft>
+              <a:buNone/>
+            </a:pPr>
+            <a:r>
+              <a:rPr lang="en-US" sz="4000" b="1" dirty="0">
+                <a:solidFill>
+                  <a:srgbClr val="111111"/>
+                </a:solidFill>
+                <a:latin typeface="Times New Roman" pitchFamily="34" charset="0"/>
+                <a:ea typeface="Times New Roman" pitchFamily="34" charset="-122"/>
+                <a:cs typeface="Times New Roman" pitchFamily="34" charset="-120"/>
+              </a:rPr>
+              <a:t>Yardangs: </a:t>
+            </a:r>
+            <a:pPr algn="l" indent="0" marL="0">
+              <a:spcAft>
+                <a:spcPts val="800"/>
+              </a:spcAft>
+              <a:buNone/>
+            </a:pPr>
+            <a:r>
+              <a:rPr lang="en-US" sz="4000" dirty="0">
+                <a:solidFill>
+                  <a:srgbClr val="111111"/>
+                </a:solidFill>
+                <a:latin typeface="Times New Roman" pitchFamily="34" charset="0"/>
+                <a:ea typeface="Times New Roman" pitchFamily="34" charset="-122"/>
+                <a:cs typeface="Times New Roman" pitchFamily="34" charset="-120"/>
+              </a:rPr>
+              <a:t>They are long ridges of rock lying in the direction of the wind, with furrows between them.</a:t>
             </a:r>
             <a:endParaRPr lang="en-US" sz="4000" dirty="0"/>
           </a:p>
@@ -15036,7 +15659,7 @@
                 <a:ea typeface="Calibri" pitchFamily="34" charset="-122"/>
                 <a:cs typeface="Calibri" pitchFamily="34" charset="-120"/>
               </a:rPr>
-              <a:t>REMEDIATION</a:t>
+              <a:t>BOARD SUMMARY</a:t>
             </a:r>
             <a:endParaRPr lang="en-US" sz="1400" dirty="0"/>
           </a:p>
@@ -15059,7 +15682,7 @@
         <p:spPr>
           <a:xfrm>
             <a:off x="0" y="658368"/>
-            <a:ext cx="1463040" cy="5833872"/>
+            <a:ext cx="5120640" cy="5833872"/>
           </a:xfrm>
           <a:prstGeom prst="rect">
             <a:avLst/>
@@ -15074,8 +15697,8 @@
         </p:nvSpPr>
         <p:spPr>
           <a:xfrm>
-            <a:off x="1691640" y="1005840"/>
-            <a:ext cx="10180015" cy="731520"/>
+            <a:off x="5349240" y="1005840"/>
+            <a:ext cx="6522415" cy="731520"/>
           </a:xfrm>
           <a:prstGeom prst="rect">
             <a:avLst/>
@@ -15101,7 +15724,7 @@
                 <a:ea typeface="Times New Roman" pitchFamily="34" charset="-122"/>
                 <a:cs typeface="Times New Roman" pitchFamily="34" charset="-120"/>
               </a:rPr>
-              <a:t>Remediation</a:t>
+              <a:t>3. Erosional Features (continued)</a:t>
             </a:r>
             <a:endParaRPr lang="en-US" sz="3600" dirty="0"/>
           </a:p>
@@ -15115,8 +15738,8 @@
         </p:nvSpPr>
         <p:spPr>
           <a:xfrm>
-            <a:off x="1691640" y="1783080"/>
-            <a:ext cx="10180015" cy="4663440"/>
+            <a:off x="5349240" y="1783080"/>
+            <a:ext cx="6522415" cy="4663440"/>
           </a:xfrm>
           <a:prstGeom prst="rect">
             <a:avLst/>
@@ -15143,18 +15766,13 @@
                 <a:ea typeface="Times New Roman" pitchFamily="34" charset="-122"/>
                 <a:cs typeface="Times New Roman" pitchFamily="34" charset="-120"/>
               </a:rPr>
-              <a:t>Fill in the blanks:</a:t>
-            </a:r>
-            <a:endParaRPr lang="en-US" sz="4000" dirty="0"/>
-          </a:p>
-          <a:p>
-            <a:pPr algn="l" marL="342900" indent="-342900">
+              <a:t>Inselbergs: </a:t>
+            </a:r>
+            <a:pPr algn="l" indent="0" marL="0">
               <a:spcAft>
                 <a:spcPts val="800"/>
               </a:spcAft>
-              <a:buSzPct val="100000"/>
-              <a:buFont typeface="+mj-lt"/>
-              <a:buAutoNum type="arabicPeriod" startAt="1"/>
+              <a:buNone/>
             </a:pPr>
             <a:r>
               <a:rPr lang="en-US" sz="4000" dirty="0">
@@ -15165,21 +15783,19 @@
                 <a:ea typeface="Times New Roman" pitchFamily="34" charset="-122"/>
                 <a:cs typeface="Times New Roman" pitchFamily="34" charset="-120"/>
               </a:rPr>
-              <a:t>The removal of loose sand by wind is ______.</a:t>
+              <a:t>They are isolated, steep-sided hills rising from a flat plain.</a:t>
             </a:r>
             <a:endParaRPr lang="en-US" sz="4000" dirty="0"/>
           </a:p>
           <a:p>
-            <a:pPr algn="l" marL="342900" indent="-342900">
+            <a:pPr algn="l" indent="0" marL="0">
               <a:spcAft>
                 <a:spcPts val="800"/>
               </a:spcAft>
-              <a:buSzPct val="100000"/>
-              <a:buFont typeface="+mj-lt"/>
-              <a:buAutoNum type="arabicPeriod" startAt="1"/>
+              <a:buNone/>
             </a:pPr>
             <a:r>
-              <a:rPr lang="en-US" sz="4000" dirty="0">
+              <a:rPr lang="en-US" sz="4000" b="1" dirty="0">
                 <a:solidFill>
                   <a:srgbClr val="111111"/>
                 </a:solidFill>
@@ -15187,18 +15803,13 @@
                 <a:ea typeface="Times New Roman" pitchFamily="34" charset="-122"/>
                 <a:cs typeface="Times New Roman" pitchFamily="34" charset="-120"/>
               </a:rPr>
-              <a:t>A mushroom-shaped rock is a rock ______.</a:t>
-            </a:r>
-            <a:endParaRPr lang="en-US" sz="4000" dirty="0"/>
-          </a:p>
-          <a:p>
-            <a:pPr algn="l" marL="342900" indent="-342900">
+              <a:t>Deflation hollows: </a:t>
+            </a:r>
+            <a:pPr algn="l" indent="0" marL="0">
               <a:spcAft>
                 <a:spcPts val="800"/>
               </a:spcAft>
-              <a:buSzPct val="100000"/>
-              <a:buFont typeface="+mj-lt"/>
-              <a:buAutoNum type="arabicPeriod" startAt="1"/>
+              <a:buNone/>
             </a:pPr>
             <a:r>
               <a:rPr lang="en-US" sz="4000" dirty="0">
@@ -15209,7 +15820,7 @@
                 <a:ea typeface="Times New Roman" pitchFamily="34" charset="-122"/>
                 <a:cs typeface="Times New Roman" pitchFamily="34" charset="-120"/>
               </a:rPr>
-              <a:t>A lonely hill on a flat plain is an ______.</a:t>
+              <a:t>They are depressions where the wind has removed the loose material.</a:t>
             </a:r>
             <a:endParaRPr lang="en-US" sz="4000" dirty="0"/>
           </a:p>
@@ -15321,7 +15932,7 @@
                 <a:ea typeface="Calibri" pitchFamily="34" charset="-122"/>
                 <a:cs typeface="Calibri" pitchFamily="34" charset="-120"/>
               </a:rPr>
-              <a:t>HOMEWORK</a:t>
+              <a:t>FORMATIVE EVALUATION</a:t>
             </a:r>
             <a:endParaRPr lang="en-US" sz="1400" dirty="0"/>
           </a:p>
@@ -15344,7 +15955,7 @@
         <p:spPr>
           <a:xfrm>
             <a:off x="0" y="658368"/>
-            <a:ext cx="3840480" cy="5833872"/>
+            <a:ext cx="5120640" cy="5833872"/>
           </a:xfrm>
           <a:prstGeom prst="rect">
             <a:avLst/>
@@ -15359,8 +15970,8 @@
         </p:nvSpPr>
         <p:spPr>
           <a:xfrm>
-            <a:off x="4069080" y="1005840"/>
-            <a:ext cx="7802575" cy="731520"/>
+            <a:off x="5349240" y="1005840"/>
+            <a:ext cx="6522415" cy="731520"/>
           </a:xfrm>
           <a:prstGeom prst="rect">
             <a:avLst/>
@@ -15386,7 +15997,7 @@
                 <a:ea typeface="Times New Roman" pitchFamily="34" charset="-122"/>
                 <a:cs typeface="Times New Roman" pitchFamily="34" charset="-120"/>
               </a:rPr>
-              <a:t>Homework</a:t>
+              <a:t>Evaluation 1</a:t>
             </a:r>
             <a:endParaRPr lang="en-US" sz="3600" dirty="0"/>
           </a:p>
@@ -15400,8 +16011,8 @@
         </p:nvSpPr>
         <p:spPr>
           <a:xfrm>
-            <a:off x="4069080" y="1783080"/>
-            <a:ext cx="7802575" cy="4663440"/>
+            <a:off x="5349240" y="1783080"/>
+            <a:ext cx="6522415" cy="4663440"/>
           </a:xfrm>
           <a:prstGeom prst="rect">
             <a:avLst/>
@@ -15428,7 +16039,7 @@
                 <a:ea typeface="Times New Roman" pitchFamily="34" charset="-122"/>
                 <a:cs typeface="Times New Roman" pitchFamily="34" charset="-120"/>
               </a:rPr>
-              <a:t>After the next windy day, look around your compound. Find a place where sand or dust has piled up, for example behind a wall, a stone or a bush, and write down why you think it collected there.</a:t>
+              <a:t>What is abrasion?</a:t>
             </a:r>
             <a:endParaRPr lang="en-US" sz="4000" dirty="0"/>
           </a:p>
@@ -15540,7 +16151,7 @@
                 <a:ea typeface="Calibri" pitchFamily="34" charset="-122"/>
                 <a:cs typeface="Calibri" pitchFamily="34" charset="-120"/>
               </a:rPr>
-              <a:t>NEXT LESSON</a:t>
+              <a:t>FORMATIVE EVALUATION</a:t>
             </a:r>
             <a:endParaRPr lang="en-US" sz="1400" dirty="0"/>
           </a:p>
@@ -15605,7 +16216,7 @@
                 <a:ea typeface="Times New Roman" pitchFamily="34" charset="-122"/>
                 <a:cs typeface="Times New Roman" pitchFamily="34" charset="-120"/>
               </a:rPr>
-              <a:t>Next Lesson</a:t>
+              <a:t>Expected Answer</a:t>
             </a:r>
             <a:endParaRPr lang="en-US" sz="3600" dirty="0"/>
           </a:p>
@@ -15629,17 +16240,17 @@
           <a:ln/>
         </p:spPr>
         <p:txBody>
-          <a:bodyPr wrap="square" lIns="0" tIns="0" rIns="0" bIns="0" rtlCol="0" anchor="ctr"/>
-          <a:lstStyle/>
-          <a:p>
-            <a:pPr algn="ctr" indent="0" marL="0">
+          <a:bodyPr wrap="square" lIns="0" tIns="0" rIns="0" bIns="0" rtlCol="0" anchor="t"/>
+          <a:lstStyle/>
+          <a:p>
+            <a:pPr algn="l" indent="0" marL="0">
               <a:spcAft>
                 <a:spcPts val="800"/>
               </a:spcAft>
               <a:buNone/>
             </a:pPr>
             <a:r>
-              <a:rPr lang="en-US" sz="4000" b="1" dirty="0">
+              <a:rPr lang="en-US" sz="4000" dirty="0">
                 <a:solidFill>
                   <a:srgbClr val="111111"/>
                 </a:solidFill>
@@ -15647,27 +16258,7 @@
                 <a:ea typeface="Times New Roman" pitchFamily="34" charset="-122"/>
                 <a:cs typeface="Times New Roman" pitchFamily="34" charset="-120"/>
               </a:rPr>
-              <a:t>Our next lesson will be on:</a:t>
-            </a:r>
-            <a:endParaRPr lang="en-US" sz="4000" dirty="0"/>
-          </a:p>
-          <a:p>
-            <a:pPr algn="ctr" indent="0" marL="0">
-              <a:spcAft>
-                <a:spcPts val="800"/>
-              </a:spcAft>
-              <a:buNone/>
-            </a:pPr>
-            <a:r>
-              <a:rPr lang="en-US" sz="4000" b="1" dirty="0">
-                <a:solidFill>
-                  <a:srgbClr val="990011"/>
-                </a:solidFill>
-                <a:latin typeface="Times New Roman" pitchFamily="34" charset="0"/>
-                <a:ea typeface="Times New Roman" pitchFamily="34" charset="-122"/>
-                <a:cs typeface="Times New Roman" pitchFamily="34" charset="-120"/>
-              </a:rPr>
-              <a:t>Lesson 28: Depositional Features of Wind Action</a:t>
+              <a:t>The wearing of rocks by sand thrown by the wind.</a:t>
             </a:r>
             <a:endParaRPr lang="en-US" sz="4000" dirty="0"/>
           </a:p>
@@ -15779,6 +16370,1187 @@
                 <a:ea typeface="Calibri" pitchFamily="34" charset="-122"/>
                 <a:cs typeface="Calibri" pitchFamily="34" charset="-120"/>
               </a:rPr>
+              <a:t>FORMATIVE EVALUATION</a:t>
+            </a:r>
+            <a:endParaRPr lang="en-US" sz="1400" dirty="0"/>
+          </a:p>
+        </p:txBody>
+      </p:sp>
+      <p:pic>
+        <p:nvPicPr>
+          <p:cNvPr id="3" name="Image 0" descr="/home/claude/f4/img/minesec_sheet.png">    </p:cNvPr>
+          <p:cNvPicPr>
+            <a:picLocks noChangeAspect="1"/>
+          </p:cNvPicPr>
+          <p:nvPr/>
+        </p:nvPicPr>
+        <p:blipFill>
+          <a:blip r:embed="rId1"/>
+          <a:stretch>
+            <a:fillRect/>
+          </a:stretch>
+        </p:blipFill>
+        <p:spPr>
+          <a:xfrm>
+            <a:off x="0" y="658368"/>
+            <a:ext cx="5120640" cy="5833872"/>
+          </a:xfrm>
+          <a:prstGeom prst="rect">
+            <a:avLst/>
+          </a:prstGeom>
+        </p:spPr>
+      </p:pic>
+      <p:sp>
+        <p:nvSpPr>
+          <p:cNvPr id="4" name="Text 1"/>
+          <p:cNvSpPr/>
+          <p:nvPr/>
+        </p:nvSpPr>
+        <p:spPr>
+          <a:xfrm>
+            <a:off x="5349240" y="1005840"/>
+            <a:ext cx="6522415" cy="731520"/>
+          </a:xfrm>
+          <a:prstGeom prst="rect">
+            <a:avLst/>
+          </a:prstGeom>
+          <a:noFill/>
+          <a:ln/>
+        </p:spPr>
+        <p:txBody>
+          <a:bodyPr wrap="square" lIns="0" tIns="0" rIns="0" bIns="0" rtlCol="0" anchor="ctr">
+            <a:normAutofit/>
+          </a:bodyPr>
+          <a:lstStyle/>
+          <a:p>
+            <a:pPr algn="ctr" indent="0" marL="0">
+              <a:buNone/>
+            </a:pPr>
+            <a:r>
+              <a:rPr lang="en-US" sz="3600" b="1" dirty="0">
+                <a:solidFill>
+                  <a:srgbClr val="990011"/>
+                </a:solidFill>
+                <a:latin typeface="Times New Roman" pitchFamily="34" charset="0"/>
+                <a:ea typeface="Times New Roman" pitchFamily="34" charset="-122"/>
+                <a:cs typeface="Times New Roman" pitchFamily="34" charset="-120"/>
+              </a:rPr>
+              <a:t>Evaluation 2</a:t>
+            </a:r>
+            <a:endParaRPr lang="en-US" sz="3600" dirty="0"/>
+          </a:p>
+        </p:txBody>
+      </p:sp>
+      <p:sp>
+        <p:nvSpPr>
+          <p:cNvPr id="5" name="Text 2"/>
+          <p:cNvSpPr/>
+          <p:nvPr/>
+        </p:nvSpPr>
+        <p:spPr>
+          <a:xfrm>
+            <a:off x="5349240" y="1783080"/>
+            <a:ext cx="6522415" cy="4663440"/>
+          </a:xfrm>
+          <a:prstGeom prst="rect">
+            <a:avLst/>
+          </a:prstGeom>
+          <a:noFill/>
+          <a:ln/>
+        </p:spPr>
+        <p:txBody>
+          <a:bodyPr wrap="square" lIns="0" tIns="0" rIns="0" bIns="0" rtlCol="0" anchor="t"/>
+          <a:lstStyle/>
+          <a:p>
+            <a:pPr algn="l" indent="0" marL="0">
+              <a:spcAft>
+                <a:spcPts val="800"/>
+              </a:spcAft>
+              <a:buNone/>
+            </a:pPr>
+            <a:r>
+              <a:rPr lang="en-US" sz="4000" dirty="0">
+                <a:solidFill>
+                  <a:srgbClr val="111111"/>
+                </a:solidFill>
+                <a:latin typeface="Times New Roman" pitchFamily="34" charset="0"/>
+                <a:ea typeface="Times New Roman" pitchFamily="34" charset="-122"/>
+                <a:cs typeface="Times New Roman" pitchFamily="34" charset="-120"/>
+              </a:rPr>
+              <a:t>Why is a rock pedestal narrow at the bottom?</a:t>
+            </a:r>
+            <a:endParaRPr lang="en-US" sz="4000" dirty="0"/>
+          </a:p>
+        </p:txBody>
+      </p:sp>
+      <p:sp>
+        <p:nvSpPr>
+          <p:cNvPr id="25" name="Slide Number Placeholder 0"/>
+          <p:cNvSpPr>
+            <a:spLocks noGrp="1"/>
+          </p:cNvSpPr>
+          <p:nvPr>
+            <p:ph type="sldNum" sz="quarter" idx="4294967295"/>
+          </p:nvPr>
+        </p:nvSpPr>
+        <p:spPr>
+          <a:xfrm>
+            <a:off x="27432" y="91440"/>
+            <a:ext cx="585216" cy="475488"/>
+          </a:xfrm>
+          <a:prstGeom prst="rect">
+            <a:avLst/>
+          </a:prstGeom>
+          <a:extLst>
+            <a:ext uri="{C572A759-6A51-4108-AA02-DFA0A04FC94B}">
+              <ma14:wrappingTextBoxFlag xmlns:ma14="http://schemas.microsoft.com/office/mac/drawingml/2011/main" val="0"/>
+            </a:ext>
+          </a:extLst>
+        </p:spPr>
+        <p:txBody>
+          <a:bodyPr/>
+          <a:lstStyle>
+            <a:lvl1pPr>
+              <a:defRPr sz="2000">
+                <a:solidFill>
+                  <a:srgbClr val="FFFFFF"/>
+                </a:solidFill>
+                <a:latin typeface="Calibri"/>
+                <a:ea typeface="Calibri"/>
+                <a:cs typeface="Calibri"/>
+              </a:defRPr>
+            </a:lvl1pPr>
+          </a:lstStyle>
+          <a:p>
+            <a:pPr algn="ctr"/>
+            <a:fld id="{F7021451-1387-4CA6-816F-3879F97B5CBC}" type="slidenum">
+              <a:rPr b="1" lang="en-US"/>
+              <a:t>44</a:t>
+            </a:fld>
+            <a:endParaRPr lang="en-US"/>
+          </a:p>
+        </p:txBody>
+      </p:sp>
+    </p:spTree>
+  </p:cSld>
+  <p:clrMapOvr>
+    <a:masterClrMapping/>
+  </p:clrMapOvr>
+</p:sld>
+</file>
+
+<file path=ppt/slides/slide45.xml><?xml version="1.0" encoding="utf-8"?>
+<p:sld xmlns:a="http://schemas.openxmlformats.org/drawingml/2006/main" xmlns:r="http://schemas.openxmlformats.org/officeDocument/2006/relationships" xmlns:p="http://schemas.openxmlformats.org/presentationml/2006/main">
+  <p:cSld name="Slide 45">
+    <p:spTree>
+      <p:nvGrpSpPr>
+        <p:cNvPr id="1" name=""/>
+        <p:cNvGrpSpPr/>
+        <p:nvPr/>
+      </p:nvGrpSpPr>
+      <p:grpSpPr>
+        <a:xfrm>
+          <a:off x="0" y="0"/>
+          <a:ext cx="0" cy="0"/>
+          <a:chOff x="0" y="0"/>
+          <a:chExt cx="0" cy="0"/>
+        </a:xfrm>
+      </p:grpSpPr>
+      <p:sp>
+        <p:nvSpPr>
+          <p:cNvPr id="2" name="Text 0"/>
+          <p:cNvSpPr/>
+          <p:nvPr/>
+        </p:nvSpPr>
+        <p:spPr>
+          <a:xfrm>
+            <a:off x="457200" y="713232"/>
+            <a:ext cx="11368735" cy="274320"/>
+          </a:xfrm>
+          <a:prstGeom prst="rect">
+            <a:avLst/>
+          </a:prstGeom>
+          <a:noFill/>
+          <a:ln/>
+        </p:spPr>
+        <p:txBody>
+          <a:bodyPr wrap="square" lIns="0" tIns="0" rIns="0" bIns="0" rtlCol="0" anchor="ctr"/>
+          <a:lstStyle/>
+          <a:p>
+            <a:pPr algn="r" indent="0" marL="0">
+              <a:buNone/>
+            </a:pPr>
+            <a:r>
+              <a:rPr lang="en-US" sz="1400" b="1" dirty="0">
+                <a:solidFill>
+                  <a:srgbClr val="1C3F6E"/>
+                </a:solidFill>
+                <a:latin typeface="Calibri" pitchFamily="34" charset="0"/>
+                <a:ea typeface="Calibri" pitchFamily="34" charset="-122"/>
+                <a:cs typeface="Calibri" pitchFamily="34" charset="-120"/>
+              </a:rPr>
+              <a:t>FORMATIVE EVALUATION</a:t>
+            </a:r>
+            <a:endParaRPr lang="en-US" sz="1400" dirty="0"/>
+          </a:p>
+        </p:txBody>
+      </p:sp>
+      <p:pic>
+        <p:nvPicPr>
+          <p:cNvPr id="3" name="Image 0" descr="/home/claude/f4/img/minesec_sheet.png">    </p:cNvPr>
+          <p:cNvPicPr>
+            <a:picLocks noChangeAspect="1"/>
+          </p:cNvPicPr>
+          <p:nvPr/>
+        </p:nvPicPr>
+        <p:blipFill>
+          <a:blip r:embed="rId1"/>
+          <a:stretch>
+            <a:fillRect/>
+          </a:stretch>
+        </p:blipFill>
+        <p:spPr>
+          <a:xfrm>
+            <a:off x="0" y="658368"/>
+            <a:ext cx="5120640" cy="5833872"/>
+          </a:xfrm>
+          <a:prstGeom prst="rect">
+            <a:avLst/>
+          </a:prstGeom>
+        </p:spPr>
+      </p:pic>
+      <p:sp>
+        <p:nvSpPr>
+          <p:cNvPr id="4" name="Text 1"/>
+          <p:cNvSpPr/>
+          <p:nvPr/>
+        </p:nvSpPr>
+        <p:spPr>
+          <a:xfrm>
+            <a:off x="5349240" y="1005840"/>
+            <a:ext cx="6522415" cy="731520"/>
+          </a:xfrm>
+          <a:prstGeom prst="rect">
+            <a:avLst/>
+          </a:prstGeom>
+          <a:noFill/>
+          <a:ln/>
+        </p:spPr>
+        <p:txBody>
+          <a:bodyPr wrap="square" lIns="0" tIns="0" rIns="0" bIns="0" rtlCol="0" anchor="ctr">
+            <a:normAutofit/>
+          </a:bodyPr>
+          <a:lstStyle/>
+          <a:p>
+            <a:pPr algn="ctr" indent="0" marL="0">
+              <a:buNone/>
+            </a:pPr>
+            <a:r>
+              <a:rPr lang="en-US" sz="3600" b="1" dirty="0">
+                <a:solidFill>
+                  <a:srgbClr val="990011"/>
+                </a:solidFill>
+                <a:latin typeface="Times New Roman" pitchFamily="34" charset="0"/>
+                <a:ea typeface="Times New Roman" pitchFamily="34" charset="-122"/>
+                <a:cs typeface="Times New Roman" pitchFamily="34" charset="-120"/>
+              </a:rPr>
+              <a:t>Expected Answer</a:t>
+            </a:r>
+            <a:endParaRPr lang="en-US" sz="3600" dirty="0"/>
+          </a:p>
+        </p:txBody>
+      </p:sp>
+      <p:sp>
+        <p:nvSpPr>
+          <p:cNvPr id="5" name="Text 2"/>
+          <p:cNvSpPr/>
+          <p:nvPr/>
+        </p:nvSpPr>
+        <p:spPr>
+          <a:xfrm>
+            <a:off x="5349240" y="1783080"/>
+            <a:ext cx="6522415" cy="4663440"/>
+          </a:xfrm>
+          <a:prstGeom prst="rect">
+            <a:avLst/>
+          </a:prstGeom>
+          <a:noFill/>
+          <a:ln/>
+        </p:spPr>
+        <p:txBody>
+          <a:bodyPr wrap="square" lIns="0" tIns="0" rIns="0" bIns="0" rtlCol="0" anchor="t"/>
+          <a:lstStyle/>
+          <a:p>
+            <a:pPr algn="l" indent="0" marL="0">
+              <a:spcAft>
+                <a:spcPts val="800"/>
+              </a:spcAft>
+              <a:buNone/>
+            </a:pPr>
+            <a:r>
+              <a:rPr lang="en-US" sz="4000" dirty="0">
+                <a:solidFill>
+                  <a:srgbClr val="111111"/>
+                </a:solidFill>
+                <a:latin typeface="Times New Roman" pitchFamily="34" charset="0"/>
+                <a:ea typeface="Times New Roman" pitchFamily="34" charset="-122"/>
+                <a:cs typeface="Times New Roman" pitchFamily="34" charset="-120"/>
+              </a:rPr>
+              <a:t>The wind throws most sand near the ground.</a:t>
+            </a:r>
+            <a:endParaRPr lang="en-US" sz="4000" dirty="0"/>
+          </a:p>
+        </p:txBody>
+      </p:sp>
+      <p:sp>
+        <p:nvSpPr>
+          <p:cNvPr id="25" name="Slide Number Placeholder 0"/>
+          <p:cNvSpPr>
+            <a:spLocks noGrp="1"/>
+          </p:cNvSpPr>
+          <p:nvPr>
+            <p:ph type="sldNum" sz="quarter" idx="4294967295"/>
+          </p:nvPr>
+        </p:nvSpPr>
+        <p:spPr>
+          <a:xfrm>
+            <a:off x="27432" y="91440"/>
+            <a:ext cx="585216" cy="475488"/>
+          </a:xfrm>
+          <a:prstGeom prst="rect">
+            <a:avLst/>
+          </a:prstGeom>
+          <a:extLst>
+            <a:ext uri="{C572A759-6A51-4108-AA02-DFA0A04FC94B}">
+              <ma14:wrappingTextBoxFlag xmlns:ma14="http://schemas.microsoft.com/office/mac/drawingml/2011/main" val="0"/>
+            </a:ext>
+          </a:extLst>
+        </p:spPr>
+        <p:txBody>
+          <a:bodyPr/>
+          <a:lstStyle>
+            <a:lvl1pPr>
+              <a:defRPr sz="2000">
+                <a:solidFill>
+                  <a:srgbClr val="FFFFFF"/>
+                </a:solidFill>
+                <a:latin typeface="Calibri"/>
+                <a:ea typeface="Calibri"/>
+                <a:cs typeface="Calibri"/>
+              </a:defRPr>
+            </a:lvl1pPr>
+          </a:lstStyle>
+          <a:p>
+            <a:pPr algn="ctr"/>
+            <a:fld id="{F7021451-1387-4CA6-816F-3879F97B5CBC}" type="slidenum">
+              <a:rPr b="1" lang="en-US"/>
+              <a:t>45</a:t>
+            </a:fld>
+            <a:endParaRPr lang="en-US"/>
+          </a:p>
+        </p:txBody>
+      </p:sp>
+    </p:spTree>
+  </p:cSld>
+  <p:clrMapOvr>
+    <a:masterClrMapping/>
+  </p:clrMapOvr>
+</p:sld>
+</file>
+
+<file path=ppt/slides/slide46.xml><?xml version="1.0" encoding="utf-8"?>
+<p:sld xmlns:a="http://schemas.openxmlformats.org/drawingml/2006/main" xmlns:r="http://schemas.openxmlformats.org/officeDocument/2006/relationships" xmlns:p="http://schemas.openxmlformats.org/presentationml/2006/main">
+  <p:cSld name="Slide 46">
+    <p:spTree>
+      <p:nvGrpSpPr>
+        <p:cNvPr id="1" name=""/>
+        <p:cNvGrpSpPr/>
+        <p:nvPr/>
+      </p:nvGrpSpPr>
+      <p:grpSpPr>
+        <a:xfrm>
+          <a:off x="0" y="0"/>
+          <a:ext cx="0" cy="0"/>
+          <a:chOff x="0" y="0"/>
+          <a:chExt cx="0" cy="0"/>
+        </a:xfrm>
+      </p:grpSpPr>
+      <p:sp>
+        <p:nvSpPr>
+          <p:cNvPr id="2" name="Text 0"/>
+          <p:cNvSpPr/>
+          <p:nvPr/>
+        </p:nvSpPr>
+        <p:spPr>
+          <a:xfrm>
+            <a:off x="457200" y="713232"/>
+            <a:ext cx="11368735" cy="274320"/>
+          </a:xfrm>
+          <a:prstGeom prst="rect">
+            <a:avLst/>
+          </a:prstGeom>
+          <a:noFill/>
+          <a:ln/>
+        </p:spPr>
+        <p:txBody>
+          <a:bodyPr wrap="square" lIns="0" tIns="0" rIns="0" bIns="0" rtlCol="0" anchor="ctr"/>
+          <a:lstStyle/>
+          <a:p>
+            <a:pPr algn="r" indent="0" marL="0">
+              <a:buNone/>
+            </a:pPr>
+            <a:r>
+              <a:rPr lang="en-US" sz="1400" b="1" dirty="0">
+                <a:solidFill>
+                  <a:srgbClr val="1C3F6E"/>
+                </a:solidFill>
+                <a:latin typeface="Calibri" pitchFamily="34" charset="0"/>
+                <a:ea typeface="Calibri" pitchFamily="34" charset="-122"/>
+                <a:cs typeface="Calibri" pitchFamily="34" charset="-120"/>
+              </a:rPr>
+              <a:t>REMEDIATION</a:t>
+            </a:r>
+            <a:endParaRPr lang="en-US" sz="1400" dirty="0"/>
+          </a:p>
+        </p:txBody>
+      </p:sp>
+      <p:pic>
+        <p:nvPicPr>
+          <p:cNvPr id="3" name="Image 0" descr="/home/claude/f4/img/minesec_sheet.png">    </p:cNvPr>
+          <p:cNvPicPr>
+            <a:picLocks noChangeAspect="1"/>
+          </p:cNvPicPr>
+          <p:nvPr/>
+        </p:nvPicPr>
+        <p:blipFill>
+          <a:blip r:embed="rId1"/>
+          <a:stretch>
+            <a:fillRect/>
+          </a:stretch>
+        </p:blipFill>
+        <p:spPr>
+          <a:xfrm>
+            <a:off x="0" y="658368"/>
+            <a:ext cx="1463040" cy="5833872"/>
+          </a:xfrm>
+          <a:prstGeom prst="rect">
+            <a:avLst/>
+          </a:prstGeom>
+        </p:spPr>
+      </p:pic>
+      <p:sp>
+        <p:nvSpPr>
+          <p:cNvPr id="4" name="Text 1"/>
+          <p:cNvSpPr/>
+          <p:nvPr/>
+        </p:nvSpPr>
+        <p:spPr>
+          <a:xfrm>
+            <a:off x="1691640" y="1005840"/>
+            <a:ext cx="10180015" cy="731520"/>
+          </a:xfrm>
+          <a:prstGeom prst="rect">
+            <a:avLst/>
+          </a:prstGeom>
+          <a:noFill/>
+          <a:ln/>
+        </p:spPr>
+        <p:txBody>
+          <a:bodyPr wrap="square" lIns="0" tIns="0" rIns="0" bIns="0" rtlCol="0" anchor="ctr">
+            <a:normAutofit/>
+          </a:bodyPr>
+          <a:lstStyle/>
+          <a:p>
+            <a:pPr algn="ctr" indent="0" marL="0">
+              <a:buNone/>
+            </a:pPr>
+            <a:r>
+              <a:rPr lang="en-US" sz="3600" b="1" dirty="0">
+                <a:solidFill>
+                  <a:srgbClr val="990011"/>
+                </a:solidFill>
+                <a:latin typeface="Times New Roman" pitchFamily="34" charset="0"/>
+                <a:ea typeface="Times New Roman" pitchFamily="34" charset="-122"/>
+                <a:cs typeface="Times New Roman" pitchFamily="34" charset="-120"/>
+              </a:rPr>
+              <a:t>Remediation</a:t>
+            </a:r>
+            <a:endParaRPr lang="en-US" sz="3600" dirty="0"/>
+          </a:p>
+        </p:txBody>
+      </p:sp>
+      <p:sp>
+        <p:nvSpPr>
+          <p:cNvPr id="5" name="Text 2"/>
+          <p:cNvSpPr/>
+          <p:nvPr/>
+        </p:nvSpPr>
+        <p:spPr>
+          <a:xfrm>
+            <a:off x="1691640" y="1783080"/>
+            <a:ext cx="10180015" cy="4663440"/>
+          </a:xfrm>
+          <a:prstGeom prst="rect">
+            <a:avLst/>
+          </a:prstGeom>
+          <a:noFill/>
+          <a:ln/>
+        </p:spPr>
+        <p:txBody>
+          <a:bodyPr wrap="square" lIns="0" tIns="0" rIns="0" bIns="0" rtlCol="0" anchor="t"/>
+          <a:lstStyle/>
+          <a:p>
+            <a:pPr algn="l" indent="0" marL="0">
+              <a:spcAft>
+                <a:spcPts val="800"/>
+              </a:spcAft>
+              <a:buNone/>
+            </a:pPr>
+            <a:r>
+              <a:rPr lang="en-US" sz="4000" b="1" dirty="0">
+                <a:solidFill>
+                  <a:srgbClr val="111111"/>
+                </a:solidFill>
+                <a:latin typeface="Times New Roman" pitchFamily="34" charset="0"/>
+                <a:ea typeface="Times New Roman" pitchFamily="34" charset="-122"/>
+                <a:cs typeface="Times New Roman" pitchFamily="34" charset="-120"/>
+              </a:rPr>
+              <a:t>Fill in the blanks:</a:t>
+            </a:r>
+            <a:endParaRPr lang="en-US" sz="4000" dirty="0"/>
+          </a:p>
+          <a:p>
+            <a:pPr algn="l" marL="342900" indent="-342900">
+              <a:spcAft>
+                <a:spcPts val="800"/>
+              </a:spcAft>
+              <a:buSzPct val="100000"/>
+              <a:buFont typeface="+mj-lt"/>
+              <a:buAutoNum type="arabicPeriod" startAt="1"/>
+            </a:pPr>
+            <a:r>
+              <a:rPr lang="en-US" sz="4000" dirty="0">
+                <a:solidFill>
+                  <a:srgbClr val="111111"/>
+                </a:solidFill>
+                <a:latin typeface="Times New Roman" pitchFamily="34" charset="0"/>
+                <a:ea typeface="Times New Roman" pitchFamily="34" charset="-122"/>
+                <a:cs typeface="Times New Roman" pitchFamily="34" charset="-120"/>
+              </a:rPr>
+              <a:t>The removal of loose sand by wind is ______.</a:t>
+            </a:r>
+            <a:endParaRPr lang="en-US" sz="4000" dirty="0"/>
+          </a:p>
+          <a:p>
+            <a:pPr algn="l" marL="342900" indent="-342900">
+              <a:spcAft>
+                <a:spcPts val="800"/>
+              </a:spcAft>
+              <a:buSzPct val="100000"/>
+              <a:buFont typeface="+mj-lt"/>
+              <a:buAutoNum type="arabicPeriod" startAt="1"/>
+            </a:pPr>
+            <a:r>
+              <a:rPr lang="en-US" sz="4000" dirty="0">
+                <a:solidFill>
+                  <a:srgbClr val="111111"/>
+                </a:solidFill>
+                <a:latin typeface="Times New Roman" pitchFamily="34" charset="0"/>
+                <a:ea typeface="Times New Roman" pitchFamily="34" charset="-122"/>
+                <a:cs typeface="Times New Roman" pitchFamily="34" charset="-120"/>
+              </a:rPr>
+              <a:t>A mushroom-shaped rock is a rock ______.</a:t>
+            </a:r>
+            <a:endParaRPr lang="en-US" sz="4000" dirty="0"/>
+          </a:p>
+          <a:p>
+            <a:pPr algn="l" marL="342900" indent="-342900">
+              <a:spcAft>
+                <a:spcPts val="800"/>
+              </a:spcAft>
+              <a:buSzPct val="100000"/>
+              <a:buFont typeface="+mj-lt"/>
+              <a:buAutoNum type="arabicPeriod" startAt="1"/>
+            </a:pPr>
+            <a:r>
+              <a:rPr lang="en-US" sz="4000" dirty="0">
+                <a:solidFill>
+                  <a:srgbClr val="111111"/>
+                </a:solidFill>
+                <a:latin typeface="Times New Roman" pitchFamily="34" charset="0"/>
+                <a:ea typeface="Times New Roman" pitchFamily="34" charset="-122"/>
+                <a:cs typeface="Times New Roman" pitchFamily="34" charset="-120"/>
+              </a:rPr>
+              <a:t>A lonely hill on a flat plain is an ______.</a:t>
+            </a:r>
+            <a:endParaRPr lang="en-US" sz="4000" dirty="0"/>
+          </a:p>
+        </p:txBody>
+      </p:sp>
+      <p:sp>
+        <p:nvSpPr>
+          <p:cNvPr id="25" name="Slide Number Placeholder 0"/>
+          <p:cNvSpPr>
+            <a:spLocks noGrp="1"/>
+          </p:cNvSpPr>
+          <p:nvPr>
+            <p:ph type="sldNum" sz="quarter" idx="4294967295"/>
+          </p:nvPr>
+        </p:nvSpPr>
+        <p:spPr>
+          <a:xfrm>
+            <a:off x="27432" y="91440"/>
+            <a:ext cx="585216" cy="475488"/>
+          </a:xfrm>
+          <a:prstGeom prst="rect">
+            <a:avLst/>
+          </a:prstGeom>
+          <a:extLst>
+            <a:ext uri="{C572A759-6A51-4108-AA02-DFA0A04FC94B}">
+              <ma14:wrappingTextBoxFlag xmlns:ma14="http://schemas.microsoft.com/office/mac/drawingml/2011/main" val="0"/>
+            </a:ext>
+          </a:extLst>
+        </p:spPr>
+        <p:txBody>
+          <a:bodyPr/>
+          <a:lstStyle>
+            <a:lvl1pPr>
+              <a:defRPr sz="2000">
+                <a:solidFill>
+                  <a:srgbClr val="FFFFFF"/>
+                </a:solidFill>
+                <a:latin typeface="Calibri"/>
+                <a:ea typeface="Calibri"/>
+                <a:cs typeface="Calibri"/>
+              </a:defRPr>
+            </a:lvl1pPr>
+          </a:lstStyle>
+          <a:p>
+            <a:pPr algn="ctr"/>
+            <a:fld id="{F7021451-1387-4CA6-816F-3879F97B5CBC}" type="slidenum">
+              <a:rPr b="1" lang="en-US"/>
+              <a:t>46</a:t>
+            </a:fld>
+            <a:endParaRPr lang="en-US"/>
+          </a:p>
+        </p:txBody>
+      </p:sp>
+    </p:spTree>
+  </p:cSld>
+  <p:clrMapOvr>
+    <a:masterClrMapping/>
+  </p:clrMapOvr>
+</p:sld>
+</file>
+
+<file path=ppt/slides/slide47.xml><?xml version="1.0" encoding="utf-8"?>
+<p:sld xmlns:a="http://schemas.openxmlformats.org/drawingml/2006/main" xmlns:r="http://schemas.openxmlformats.org/officeDocument/2006/relationships" xmlns:p="http://schemas.openxmlformats.org/presentationml/2006/main">
+  <p:cSld name="Slide 47">
+    <p:spTree>
+      <p:nvGrpSpPr>
+        <p:cNvPr id="1" name=""/>
+        <p:cNvGrpSpPr/>
+        <p:nvPr/>
+      </p:nvGrpSpPr>
+      <p:grpSpPr>
+        <a:xfrm>
+          <a:off x="0" y="0"/>
+          <a:ext cx="0" cy="0"/>
+          <a:chOff x="0" y="0"/>
+          <a:chExt cx="0" cy="0"/>
+        </a:xfrm>
+      </p:grpSpPr>
+      <p:sp>
+        <p:nvSpPr>
+          <p:cNvPr id="2" name="Text 0"/>
+          <p:cNvSpPr/>
+          <p:nvPr/>
+        </p:nvSpPr>
+        <p:spPr>
+          <a:xfrm>
+            <a:off x="457200" y="713232"/>
+            <a:ext cx="11368735" cy="274320"/>
+          </a:xfrm>
+          <a:prstGeom prst="rect">
+            <a:avLst/>
+          </a:prstGeom>
+          <a:noFill/>
+          <a:ln/>
+        </p:spPr>
+        <p:txBody>
+          <a:bodyPr wrap="square" lIns="0" tIns="0" rIns="0" bIns="0" rtlCol="0" anchor="ctr"/>
+          <a:lstStyle/>
+          <a:p>
+            <a:pPr algn="r" indent="0" marL="0">
+              <a:buNone/>
+            </a:pPr>
+            <a:r>
+              <a:rPr lang="en-US" sz="1400" b="1" dirty="0">
+                <a:solidFill>
+                  <a:srgbClr val="1C3F6E"/>
+                </a:solidFill>
+                <a:latin typeface="Calibri" pitchFamily="34" charset="0"/>
+                <a:ea typeface="Calibri" pitchFamily="34" charset="-122"/>
+                <a:cs typeface="Calibri" pitchFamily="34" charset="-120"/>
+              </a:rPr>
+              <a:t>HOMEWORK</a:t>
+            </a:r>
+            <a:endParaRPr lang="en-US" sz="1400" dirty="0"/>
+          </a:p>
+        </p:txBody>
+      </p:sp>
+      <p:pic>
+        <p:nvPicPr>
+          <p:cNvPr id="3" name="Image 0" descr="/home/claude/f4/img/minesec_sheet.png">    </p:cNvPr>
+          <p:cNvPicPr>
+            <a:picLocks noChangeAspect="1"/>
+          </p:cNvPicPr>
+          <p:nvPr/>
+        </p:nvPicPr>
+        <p:blipFill>
+          <a:blip r:embed="rId1"/>
+          <a:stretch>
+            <a:fillRect/>
+          </a:stretch>
+        </p:blipFill>
+        <p:spPr>
+          <a:xfrm>
+            <a:off x="0" y="658368"/>
+            <a:ext cx="3840480" cy="5833872"/>
+          </a:xfrm>
+          <a:prstGeom prst="rect">
+            <a:avLst/>
+          </a:prstGeom>
+        </p:spPr>
+      </p:pic>
+      <p:sp>
+        <p:nvSpPr>
+          <p:cNvPr id="4" name="Text 1"/>
+          <p:cNvSpPr/>
+          <p:nvPr/>
+        </p:nvSpPr>
+        <p:spPr>
+          <a:xfrm>
+            <a:off x="4069080" y="1005840"/>
+            <a:ext cx="7802575" cy="731520"/>
+          </a:xfrm>
+          <a:prstGeom prst="rect">
+            <a:avLst/>
+          </a:prstGeom>
+          <a:noFill/>
+          <a:ln/>
+        </p:spPr>
+        <p:txBody>
+          <a:bodyPr wrap="square" lIns="0" tIns="0" rIns="0" bIns="0" rtlCol="0" anchor="ctr">
+            <a:normAutofit/>
+          </a:bodyPr>
+          <a:lstStyle/>
+          <a:p>
+            <a:pPr algn="ctr" indent="0" marL="0">
+              <a:buNone/>
+            </a:pPr>
+            <a:r>
+              <a:rPr lang="en-US" sz="3600" b="1" dirty="0">
+                <a:solidFill>
+                  <a:srgbClr val="990011"/>
+                </a:solidFill>
+                <a:latin typeface="Times New Roman" pitchFamily="34" charset="0"/>
+                <a:ea typeface="Times New Roman" pitchFamily="34" charset="-122"/>
+                <a:cs typeface="Times New Roman" pitchFamily="34" charset="-120"/>
+              </a:rPr>
+              <a:t>Homework</a:t>
+            </a:r>
+            <a:endParaRPr lang="en-US" sz="3600" dirty="0"/>
+          </a:p>
+        </p:txBody>
+      </p:sp>
+      <p:sp>
+        <p:nvSpPr>
+          <p:cNvPr id="5" name="Text 2"/>
+          <p:cNvSpPr/>
+          <p:nvPr/>
+        </p:nvSpPr>
+        <p:spPr>
+          <a:xfrm>
+            <a:off x="4069080" y="1783080"/>
+            <a:ext cx="7802575" cy="4663440"/>
+          </a:xfrm>
+          <a:prstGeom prst="rect">
+            <a:avLst/>
+          </a:prstGeom>
+          <a:noFill/>
+          <a:ln/>
+        </p:spPr>
+        <p:txBody>
+          <a:bodyPr wrap="square" lIns="0" tIns="0" rIns="0" bIns="0" rtlCol="0" anchor="t"/>
+          <a:lstStyle/>
+          <a:p>
+            <a:pPr algn="l" indent="0" marL="0">
+              <a:spcAft>
+                <a:spcPts val="800"/>
+              </a:spcAft>
+              <a:buNone/>
+            </a:pPr>
+            <a:r>
+              <a:rPr lang="en-US" sz="4000" dirty="0">
+                <a:solidFill>
+                  <a:srgbClr val="111111"/>
+                </a:solidFill>
+                <a:latin typeface="Times New Roman" pitchFamily="34" charset="0"/>
+                <a:ea typeface="Times New Roman" pitchFamily="34" charset="-122"/>
+                <a:cs typeface="Times New Roman" pitchFamily="34" charset="-120"/>
+              </a:rPr>
+              <a:t>After the next windy day, look around your compound. Find a place where sand or dust has piled up, for example behind a wall, a stone or a bush, and write down why you think it collected there.</a:t>
+            </a:r>
+            <a:endParaRPr lang="en-US" sz="4000" dirty="0"/>
+          </a:p>
+        </p:txBody>
+      </p:sp>
+      <p:sp>
+        <p:nvSpPr>
+          <p:cNvPr id="25" name="Slide Number Placeholder 0"/>
+          <p:cNvSpPr>
+            <a:spLocks noGrp="1"/>
+          </p:cNvSpPr>
+          <p:nvPr>
+            <p:ph type="sldNum" sz="quarter" idx="4294967295"/>
+          </p:nvPr>
+        </p:nvSpPr>
+        <p:spPr>
+          <a:xfrm>
+            <a:off x="27432" y="91440"/>
+            <a:ext cx="585216" cy="475488"/>
+          </a:xfrm>
+          <a:prstGeom prst="rect">
+            <a:avLst/>
+          </a:prstGeom>
+          <a:extLst>
+            <a:ext uri="{C572A759-6A51-4108-AA02-DFA0A04FC94B}">
+              <ma14:wrappingTextBoxFlag xmlns:ma14="http://schemas.microsoft.com/office/mac/drawingml/2011/main" val="0"/>
+            </a:ext>
+          </a:extLst>
+        </p:spPr>
+        <p:txBody>
+          <a:bodyPr/>
+          <a:lstStyle>
+            <a:lvl1pPr>
+              <a:defRPr sz="2000">
+                <a:solidFill>
+                  <a:srgbClr val="FFFFFF"/>
+                </a:solidFill>
+                <a:latin typeface="Calibri"/>
+                <a:ea typeface="Calibri"/>
+                <a:cs typeface="Calibri"/>
+              </a:defRPr>
+            </a:lvl1pPr>
+          </a:lstStyle>
+          <a:p>
+            <a:pPr algn="ctr"/>
+            <a:fld id="{F7021451-1387-4CA6-816F-3879F97B5CBC}" type="slidenum">
+              <a:rPr b="1" lang="en-US"/>
+              <a:t>47</a:t>
+            </a:fld>
+            <a:endParaRPr lang="en-US"/>
+          </a:p>
+        </p:txBody>
+      </p:sp>
+    </p:spTree>
+  </p:cSld>
+  <p:clrMapOvr>
+    <a:masterClrMapping/>
+  </p:clrMapOvr>
+</p:sld>
+</file>
+
+<file path=ppt/slides/slide48.xml><?xml version="1.0" encoding="utf-8"?>
+<p:sld xmlns:a="http://schemas.openxmlformats.org/drawingml/2006/main" xmlns:r="http://schemas.openxmlformats.org/officeDocument/2006/relationships" xmlns:p="http://schemas.openxmlformats.org/presentationml/2006/main">
+  <p:cSld name="Slide 48">
+    <p:spTree>
+      <p:nvGrpSpPr>
+        <p:cNvPr id="1" name=""/>
+        <p:cNvGrpSpPr/>
+        <p:nvPr/>
+      </p:nvGrpSpPr>
+      <p:grpSpPr>
+        <a:xfrm>
+          <a:off x="0" y="0"/>
+          <a:ext cx="0" cy="0"/>
+          <a:chOff x="0" y="0"/>
+          <a:chExt cx="0" cy="0"/>
+        </a:xfrm>
+      </p:grpSpPr>
+      <p:sp>
+        <p:nvSpPr>
+          <p:cNvPr id="2" name="Text 0"/>
+          <p:cNvSpPr/>
+          <p:nvPr/>
+        </p:nvSpPr>
+        <p:spPr>
+          <a:xfrm>
+            <a:off x="457200" y="713232"/>
+            <a:ext cx="11368735" cy="274320"/>
+          </a:xfrm>
+          <a:prstGeom prst="rect">
+            <a:avLst/>
+          </a:prstGeom>
+          <a:noFill/>
+          <a:ln/>
+        </p:spPr>
+        <p:txBody>
+          <a:bodyPr wrap="square" lIns="0" tIns="0" rIns="0" bIns="0" rtlCol="0" anchor="ctr"/>
+          <a:lstStyle/>
+          <a:p>
+            <a:pPr algn="r" indent="0" marL="0">
+              <a:buNone/>
+            </a:pPr>
+            <a:r>
+              <a:rPr lang="en-US" sz="1400" b="1" dirty="0">
+                <a:solidFill>
+                  <a:srgbClr val="1C3F6E"/>
+                </a:solidFill>
+                <a:latin typeface="Calibri" pitchFamily="34" charset="0"/>
+                <a:ea typeface="Calibri" pitchFamily="34" charset="-122"/>
+                <a:cs typeface="Calibri" pitchFamily="34" charset="-120"/>
+              </a:rPr>
+              <a:t>NEXT LESSON</a:t>
+            </a:r>
+            <a:endParaRPr lang="en-US" sz="1400" dirty="0"/>
+          </a:p>
+        </p:txBody>
+      </p:sp>
+      <p:pic>
+        <p:nvPicPr>
+          <p:cNvPr id="3" name="Image 0" descr="/home/claude/f4/img/minesec_sheet.png">    </p:cNvPr>
+          <p:cNvPicPr>
+            <a:picLocks noChangeAspect="1"/>
+          </p:cNvPicPr>
+          <p:nvPr/>
+        </p:nvPicPr>
+        <p:blipFill>
+          <a:blip r:embed="rId1"/>
+          <a:stretch>
+            <a:fillRect/>
+          </a:stretch>
+        </p:blipFill>
+        <p:spPr>
+          <a:xfrm>
+            <a:off x="0" y="658368"/>
+            <a:ext cx="5120640" cy="5833872"/>
+          </a:xfrm>
+          <a:prstGeom prst="rect">
+            <a:avLst/>
+          </a:prstGeom>
+        </p:spPr>
+      </p:pic>
+      <p:sp>
+        <p:nvSpPr>
+          <p:cNvPr id="4" name="Text 1"/>
+          <p:cNvSpPr/>
+          <p:nvPr/>
+        </p:nvSpPr>
+        <p:spPr>
+          <a:xfrm>
+            <a:off x="5349240" y="1005840"/>
+            <a:ext cx="6522415" cy="731520"/>
+          </a:xfrm>
+          <a:prstGeom prst="rect">
+            <a:avLst/>
+          </a:prstGeom>
+          <a:noFill/>
+          <a:ln/>
+        </p:spPr>
+        <p:txBody>
+          <a:bodyPr wrap="square" lIns="0" tIns="0" rIns="0" bIns="0" rtlCol="0" anchor="ctr">
+            <a:normAutofit/>
+          </a:bodyPr>
+          <a:lstStyle/>
+          <a:p>
+            <a:pPr algn="ctr" indent="0" marL="0">
+              <a:buNone/>
+            </a:pPr>
+            <a:r>
+              <a:rPr lang="en-US" sz="3600" b="1" dirty="0">
+                <a:solidFill>
+                  <a:srgbClr val="990011"/>
+                </a:solidFill>
+                <a:latin typeface="Times New Roman" pitchFamily="34" charset="0"/>
+                <a:ea typeface="Times New Roman" pitchFamily="34" charset="-122"/>
+                <a:cs typeface="Times New Roman" pitchFamily="34" charset="-120"/>
+              </a:rPr>
+              <a:t>Next Lesson</a:t>
+            </a:r>
+            <a:endParaRPr lang="en-US" sz="3600" dirty="0"/>
+          </a:p>
+        </p:txBody>
+      </p:sp>
+      <p:sp>
+        <p:nvSpPr>
+          <p:cNvPr id="5" name="Text 2"/>
+          <p:cNvSpPr/>
+          <p:nvPr/>
+        </p:nvSpPr>
+        <p:spPr>
+          <a:xfrm>
+            <a:off x="5349240" y="1783080"/>
+            <a:ext cx="6522415" cy="4663440"/>
+          </a:xfrm>
+          <a:prstGeom prst="rect">
+            <a:avLst/>
+          </a:prstGeom>
+          <a:noFill/>
+          <a:ln/>
+        </p:spPr>
+        <p:txBody>
+          <a:bodyPr wrap="square" lIns="0" tIns="0" rIns="0" bIns="0" rtlCol="0" anchor="ctr"/>
+          <a:lstStyle/>
+          <a:p>
+            <a:pPr algn="ctr" indent="0" marL="0">
+              <a:spcAft>
+                <a:spcPts val="800"/>
+              </a:spcAft>
+              <a:buNone/>
+            </a:pPr>
+            <a:r>
+              <a:rPr lang="en-US" sz="4000" b="1" dirty="0">
+                <a:solidFill>
+                  <a:srgbClr val="111111"/>
+                </a:solidFill>
+                <a:latin typeface="Times New Roman" pitchFamily="34" charset="0"/>
+                <a:ea typeface="Times New Roman" pitchFamily="34" charset="-122"/>
+                <a:cs typeface="Times New Roman" pitchFamily="34" charset="-120"/>
+              </a:rPr>
+              <a:t>Our next lesson will be on:</a:t>
+            </a:r>
+            <a:endParaRPr lang="en-US" sz="4000" dirty="0"/>
+          </a:p>
+          <a:p>
+            <a:pPr algn="ctr" indent="0" marL="0">
+              <a:spcAft>
+                <a:spcPts val="800"/>
+              </a:spcAft>
+              <a:buNone/>
+            </a:pPr>
+            <a:r>
+              <a:rPr lang="en-US" sz="4000" b="1" dirty="0">
+                <a:solidFill>
+                  <a:srgbClr val="990011"/>
+                </a:solidFill>
+                <a:latin typeface="Times New Roman" pitchFamily="34" charset="0"/>
+                <a:ea typeface="Times New Roman" pitchFamily="34" charset="-122"/>
+                <a:cs typeface="Times New Roman" pitchFamily="34" charset="-120"/>
+              </a:rPr>
+              <a:t>Lesson 28: Depositional Features of Wind Action</a:t>
+            </a:r>
+            <a:endParaRPr lang="en-US" sz="4000" dirty="0"/>
+          </a:p>
+        </p:txBody>
+      </p:sp>
+      <p:sp>
+        <p:nvSpPr>
+          <p:cNvPr id="25" name="Slide Number Placeholder 0"/>
+          <p:cNvSpPr>
+            <a:spLocks noGrp="1"/>
+          </p:cNvSpPr>
+          <p:nvPr>
+            <p:ph type="sldNum" sz="quarter" idx="4294967295"/>
+          </p:nvPr>
+        </p:nvSpPr>
+        <p:spPr>
+          <a:xfrm>
+            <a:off x="27432" y="91440"/>
+            <a:ext cx="585216" cy="475488"/>
+          </a:xfrm>
+          <a:prstGeom prst="rect">
+            <a:avLst/>
+          </a:prstGeom>
+          <a:extLst>
+            <a:ext uri="{C572A759-6A51-4108-AA02-DFA0A04FC94B}">
+              <ma14:wrappingTextBoxFlag xmlns:ma14="http://schemas.microsoft.com/office/mac/drawingml/2011/main" val="0"/>
+            </a:ext>
+          </a:extLst>
+        </p:spPr>
+        <p:txBody>
+          <a:bodyPr/>
+          <a:lstStyle>
+            <a:lvl1pPr>
+              <a:defRPr sz="2000">
+                <a:solidFill>
+                  <a:srgbClr val="FFFFFF"/>
+                </a:solidFill>
+                <a:latin typeface="Calibri"/>
+                <a:ea typeface="Calibri"/>
+                <a:cs typeface="Calibri"/>
+              </a:defRPr>
+            </a:lvl1pPr>
+          </a:lstStyle>
+          <a:p>
+            <a:pPr algn="ctr"/>
+            <a:fld id="{F7021451-1387-4CA6-816F-3879F97B5CBC}" type="slidenum">
+              <a:rPr b="1" lang="en-US"/>
+              <a:t>48</a:t>
+            </a:fld>
+            <a:endParaRPr lang="en-US"/>
+          </a:p>
+        </p:txBody>
+      </p:sp>
+    </p:spTree>
+  </p:cSld>
+  <p:clrMapOvr>
+    <a:masterClrMapping/>
+  </p:clrMapOvr>
+</p:sld>
+</file>
+
+<file path=ppt/slides/slide49.xml><?xml version="1.0" encoding="utf-8"?>
+<p:sld xmlns:a="http://schemas.openxmlformats.org/drawingml/2006/main" xmlns:r="http://schemas.openxmlformats.org/officeDocument/2006/relationships" xmlns:p="http://schemas.openxmlformats.org/presentationml/2006/main">
+  <p:cSld name="Slide 49">
+    <p:spTree>
+      <p:nvGrpSpPr>
+        <p:cNvPr id="1" name=""/>
+        <p:cNvGrpSpPr/>
+        <p:nvPr/>
+      </p:nvGrpSpPr>
+      <p:grpSpPr>
+        <a:xfrm>
+          <a:off x="0" y="0"/>
+          <a:ext cx="0" cy="0"/>
+          <a:chOff x="0" y="0"/>
+          <a:chExt cx="0" cy="0"/>
+        </a:xfrm>
+      </p:grpSpPr>
+      <p:sp>
+        <p:nvSpPr>
+          <p:cNvPr id="2" name="Text 0"/>
+          <p:cNvSpPr/>
+          <p:nvPr/>
+        </p:nvSpPr>
+        <p:spPr>
+          <a:xfrm>
+            <a:off x="457200" y="713232"/>
+            <a:ext cx="11368735" cy="274320"/>
+          </a:xfrm>
+          <a:prstGeom prst="rect">
+            <a:avLst/>
+          </a:prstGeom>
+          <a:noFill/>
+          <a:ln/>
+        </p:spPr>
+        <p:txBody>
+          <a:bodyPr wrap="square" lIns="0" tIns="0" rIns="0" bIns="0" rtlCol="0" anchor="ctr"/>
+          <a:lstStyle/>
+          <a:p>
+            <a:pPr algn="r" indent="0" marL="0">
+              <a:buNone/>
+            </a:pPr>
+            <a:r>
+              <a:rPr lang="en-US" sz="1400" b="1" dirty="0">
+                <a:solidFill>
+                  <a:srgbClr val="1C3F6E"/>
+                </a:solidFill>
+                <a:latin typeface="Calibri" pitchFamily="34" charset="0"/>
+                <a:ea typeface="Calibri" pitchFamily="34" charset="-122"/>
+                <a:cs typeface="Calibri" pitchFamily="34" charset="-120"/>
+              </a:rPr>
               <a:t>BILINGUAL GAME</a:t>
             </a:r>
             <a:endParaRPr lang="en-US" sz="1400" dirty="0"/>
@@ -15826,7 +17598,7 @@
       </p:sp>
       <p:graphicFrame>
         <p:nvGraphicFramePr>
-          <p:cNvPr id="45" name="Table 0"/>
+          <p:cNvPr id="50" name="Table 0"/>
           <p:cNvGraphicFramePr>
             <a:graphicFrameLocks noGrp="1"/>
           </p:cNvGraphicFramePr>
@@ -17138,7 +18910,7 @@
             <a:pPr algn="ctr"/>
             <a:fld id="{F7021451-1387-4CA6-816F-3879F97B5CBC}" type="slidenum">
               <a:rPr b="1" lang="en-US"/>
-              <a:t>44</a:t>
+              <a:t>49</a:t>
             </a:fld>
             <a:endParaRPr lang="en-US"/>
           </a:p>
@@ -17152,9 +18924,9 @@
 </p:sld>
 </file>
 
-<file path=ppt/slides/slide45.xml><?xml version="1.0" encoding="utf-8"?>
+<file path=ppt/slides/slide5.xml><?xml version="1.0" encoding="utf-8"?>
 <p:sld xmlns:a="http://schemas.openxmlformats.org/drawingml/2006/main" xmlns:r="http://schemas.openxmlformats.org/officeDocument/2006/relationships" xmlns:p="http://schemas.openxmlformats.org/presentationml/2006/main">
-  <p:cSld name="Slide 45">
+  <p:cSld name="Slide 5">
     <p:spTree>
       <p:nvGrpSpPr>
         <p:cNvPr id="1" name=""/>
@@ -17202,6 +18974,225 @@
                 <a:ea typeface="Calibri" pitchFamily="34" charset="-122"/>
                 <a:cs typeface="Calibri" pitchFamily="34" charset="-120"/>
               </a:rPr>
+              <a:t>HOMEWORK CORRECTION</a:t>
+            </a:r>
+            <a:endParaRPr lang="en-US" sz="1400" dirty="0"/>
+          </a:p>
+        </p:txBody>
+      </p:sp>
+      <p:pic>
+        <p:nvPicPr>
+          <p:cNvPr id="3" name="Image 0" descr="/home/claude/f4/img/minesec_sheet.png">    </p:cNvPr>
+          <p:cNvPicPr>
+            <a:picLocks noChangeAspect="1"/>
+          </p:cNvPicPr>
+          <p:nvPr/>
+        </p:nvPicPr>
+        <p:blipFill>
+          <a:blip r:embed="rId1"/>
+          <a:stretch>
+            <a:fillRect/>
+          </a:stretch>
+        </p:blipFill>
+        <p:spPr>
+          <a:xfrm>
+            <a:off x="0" y="658368"/>
+            <a:ext cx="5120640" cy="5833872"/>
+          </a:xfrm>
+          <a:prstGeom prst="rect">
+            <a:avLst/>
+          </a:prstGeom>
+        </p:spPr>
+      </p:pic>
+      <p:sp>
+        <p:nvSpPr>
+          <p:cNvPr id="4" name="Text 1"/>
+          <p:cNvSpPr/>
+          <p:nvPr/>
+        </p:nvSpPr>
+        <p:spPr>
+          <a:xfrm>
+            <a:off x="5349240" y="1005840"/>
+            <a:ext cx="6522415" cy="731520"/>
+          </a:xfrm>
+          <a:prstGeom prst="rect">
+            <a:avLst/>
+          </a:prstGeom>
+          <a:noFill/>
+          <a:ln/>
+        </p:spPr>
+        <p:txBody>
+          <a:bodyPr wrap="square" lIns="0" tIns="0" rIns="0" bIns="0" rtlCol="0" anchor="ctr">
+            <a:normAutofit/>
+          </a:bodyPr>
+          <a:lstStyle/>
+          <a:p>
+            <a:pPr algn="ctr" indent="0" marL="0">
+              <a:buNone/>
+            </a:pPr>
+            <a:r>
+              <a:rPr lang="en-US" sz="3600" b="1" dirty="0">
+                <a:solidFill>
+                  <a:srgbClr val="990011"/>
+                </a:solidFill>
+                <a:latin typeface="Times New Roman" pitchFamily="34" charset="0"/>
+                <a:ea typeface="Times New Roman" pitchFamily="34" charset="-122"/>
+                <a:cs typeface="Times New Roman" pitchFamily="34" charset="-120"/>
+              </a:rPr>
+              <a:t>Correction: Possible Answer</a:t>
+            </a:r>
+            <a:endParaRPr lang="en-US" sz="3600" dirty="0"/>
+          </a:p>
+        </p:txBody>
+      </p:sp>
+      <p:sp>
+        <p:nvSpPr>
+          <p:cNvPr id="5" name="Text 2"/>
+          <p:cNvSpPr/>
+          <p:nvPr/>
+        </p:nvSpPr>
+        <p:spPr>
+          <a:xfrm>
+            <a:off x="5349240" y="1783080"/>
+            <a:ext cx="6522415" cy="4663440"/>
+          </a:xfrm>
+          <a:prstGeom prst="rect">
+            <a:avLst/>
+          </a:prstGeom>
+          <a:noFill/>
+          <a:ln/>
+        </p:spPr>
+        <p:txBody>
+          <a:bodyPr wrap="square" lIns="0" tIns="0" rIns="0" bIns="0" rtlCol="0" anchor="t"/>
+          <a:lstStyle/>
+          <a:p>
+            <a:pPr algn="l" indent="0" marL="0">
+              <a:spcAft>
+                <a:spcPts val="800"/>
+              </a:spcAft>
+              <a:buNone/>
+            </a:pPr>
+            <a:r>
+              <a:rPr lang="en-US" sz="4000" dirty="0">
+                <a:solidFill>
+                  <a:srgbClr val="111111"/>
+                </a:solidFill>
+                <a:latin typeface="Times New Roman" pitchFamily="34" charset="0"/>
+                <a:ea typeface="Times New Roman" pitchFamily="34" charset="-122"/>
+                <a:cs typeface="Times New Roman" pitchFamily="34" charset="-120"/>
+              </a:rPr>
+              <a:t>The Sahara is in North Africa; the Sahel is a belt south of the Sahara, from Senegal to Sudan (including the Far North of Cameroon); the Kalahari is in Southern Africa (Botswana).</a:t>
+            </a:r>
+            <a:endParaRPr lang="en-US" sz="4000" dirty="0"/>
+          </a:p>
+        </p:txBody>
+      </p:sp>
+      <p:sp>
+        <p:nvSpPr>
+          <p:cNvPr id="25" name="Slide Number Placeholder 0"/>
+          <p:cNvSpPr>
+            <a:spLocks noGrp="1"/>
+          </p:cNvSpPr>
+          <p:nvPr>
+            <p:ph type="sldNum" sz="quarter" idx="4294967295"/>
+          </p:nvPr>
+        </p:nvSpPr>
+        <p:spPr>
+          <a:xfrm>
+            <a:off x="27432" y="91440"/>
+            <a:ext cx="585216" cy="475488"/>
+          </a:xfrm>
+          <a:prstGeom prst="rect">
+            <a:avLst/>
+          </a:prstGeom>
+          <a:extLst>
+            <a:ext uri="{C572A759-6A51-4108-AA02-DFA0A04FC94B}">
+              <ma14:wrappingTextBoxFlag xmlns:ma14="http://schemas.microsoft.com/office/mac/drawingml/2011/main" val="0"/>
+            </a:ext>
+          </a:extLst>
+        </p:spPr>
+        <p:txBody>
+          <a:bodyPr/>
+          <a:lstStyle>
+            <a:lvl1pPr>
+              <a:defRPr sz="2000">
+                <a:solidFill>
+                  <a:srgbClr val="FFFFFF"/>
+                </a:solidFill>
+                <a:latin typeface="Calibri"/>
+                <a:ea typeface="Calibri"/>
+                <a:cs typeface="Calibri"/>
+              </a:defRPr>
+            </a:lvl1pPr>
+          </a:lstStyle>
+          <a:p>
+            <a:pPr algn="ctr"/>
+            <a:fld id="{F7021451-1387-4CA6-816F-3879F97B5CBC}" type="slidenum">
+              <a:rPr b="1" lang="en-US"/>
+              <a:t>5</a:t>
+            </a:fld>
+            <a:endParaRPr lang="en-US"/>
+          </a:p>
+        </p:txBody>
+      </p:sp>
+    </p:spTree>
+  </p:cSld>
+  <p:clrMapOvr>
+    <a:masterClrMapping/>
+  </p:clrMapOvr>
+</p:sld>
+</file>
+
+<file path=ppt/slides/slide50.xml><?xml version="1.0" encoding="utf-8"?>
+<p:sld xmlns:a="http://schemas.openxmlformats.org/drawingml/2006/main" xmlns:r="http://schemas.openxmlformats.org/officeDocument/2006/relationships" xmlns:p="http://schemas.openxmlformats.org/presentationml/2006/main">
+  <p:cSld name="Slide 50">
+    <p:spTree>
+      <p:nvGrpSpPr>
+        <p:cNvPr id="1" name=""/>
+        <p:cNvGrpSpPr/>
+        <p:nvPr/>
+      </p:nvGrpSpPr>
+      <p:grpSpPr>
+        <a:xfrm>
+          <a:off x="0" y="0"/>
+          <a:ext cx="0" cy="0"/>
+          <a:chOff x="0" y="0"/>
+          <a:chExt cx="0" cy="0"/>
+        </a:xfrm>
+      </p:grpSpPr>
+      <p:sp>
+        <p:nvSpPr>
+          <p:cNvPr id="2" name="Text 0"/>
+          <p:cNvSpPr/>
+          <p:nvPr/>
+        </p:nvSpPr>
+        <p:spPr>
+          <a:xfrm>
+            <a:off x="457200" y="713232"/>
+            <a:ext cx="11368735" cy="274320"/>
+          </a:xfrm>
+          <a:prstGeom prst="rect">
+            <a:avLst/>
+          </a:prstGeom>
+          <a:noFill/>
+          <a:ln/>
+        </p:spPr>
+        <p:txBody>
+          <a:bodyPr wrap="square" lIns="0" tIns="0" rIns="0" bIns="0" rtlCol="0" anchor="ctr"/>
+          <a:lstStyle/>
+          <a:p>
+            <a:pPr algn="r" indent="0" marL="0">
+              <a:buNone/>
+            </a:pPr>
+            <a:r>
+              <a:rPr lang="en-US" sz="1400" b="1" dirty="0">
+                <a:solidFill>
+                  <a:srgbClr val="1C3F6E"/>
+                </a:solidFill>
+                <a:latin typeface="Calibri" pitchFamily="34" charset="0"/>
+                <a:ea typeface="Calibri" pitchFamily="34" charset="-122"/>
+                <a:cs typeface="Calibri" pitchFamily="34" charset="-120"/>
+              </a:rPr>
               <a:t>LOGBOOK</a:t>
             </a:r>
             <a:endParaRPr lang="en-US" sz="1400" dirty="0"/>
@@ -17249,7 +19240,7 @@
       </p:sp>
       <p:graphicFrame>
         <p:nvGraphicFramePr>
-          <p:cNvPr id="46" name="Table 0"/>
+          <p:cNvPr id="51" name="Table 0"/>
           <p:cNvGraphicFramePr>
             <a:graphicFrameLocks noGrp="1"/>
           </p:cNvGraphicFramePr>
@@ -17871,7 +19862,7 @@
             <a:pPr algn="ctr"/>
             <a:fld id="{F7021451-1387-4CA6-816F-3879F97B5CBC}" type="slidenum">
               <a:rPr b="1" lang="en-US"/>
-              <a:t>45</a:t>
+              <a:t>50</a:t>
             </a:fld>
             <a:endParaRPr lang="en-US"/>
           </a:p>
@@ -17885,9 +19876,9 @@
 </p:sld>
 </file>
 
-<file path=ppt/slides/slide46.xml><?xml version="1.0" encoding="utf-8"?>
+<file path=ppt/slides/slide51.xml><?xml version="1.0" encoding="utf-8"?>
 <p:sld xmlns:a="http://schemas.openxmlformats.org/drawingml/2006/main" xmlns:r="http://schemas.openxmlformats.org/officeDocument/2006/relationships" xmlns:p="http://schemas.openxmlformats.org/presentationml/2006/main">
-  <p:cSld name="Slide 46">
+  <p:cSld name="Slide 51">
     <p:spTree>
       <p:nvGrpSpPr>
         <p:cNvPr id="1" name=""/>
@@ -17982,7 +19973,7 @@
       </p:sp>
       <p:graphicFrame>
         <p:nvGraphicFramePr>
-          <p:cNvPr id="47" name="Table 0"/>
+          <p:cNvPr id="52" name="Table 0"/>
           <p:cNvGraphicFramePr>
             <a:graphicFrameLocks noGrp="1"/>
           </p:cNvGraphicFramePr>
@@ -18092,7 +20083,7 @@
                           <a:ea typeface="Calibri" pitchFamily="34" charset="-122"/>
                           <a:cs typeface="Calibri" pitchFamily="34" charset="-120"/>
                         </a:rPr>
-                        <a:t>Location of Semi-arid Areas and Hot Deserts in Africa; Erosional Processes of Wind; Erosional Features.</a:t>
+                        <a:t>DEFINITIONS; Location of Semi-arid Areas and Hot Deserts in Africa; Main Erosional Processes of Wind; Erosional Features.</a:t>
                       </a:r>
                       <a:endParaRPr lang="en-US" sz="1600" dirty="0">
                         <a:latin typeface="Calibri" charset="0"/>
@@ -18742,7 +20733,7 @@
             <a:pPr algn="ctr"/>
             <a:fld id="{F7021451-1387-4CA6-816F-3879F97B5CBC}" type="slidenum">
               <a:rPr b="1" lang="en-US"/>
-              <a:t>46</a:t>
+              <a:t>51</a:t>
             </a:fld>
             <a:endParaRPr lang="en-US"/>
           </a:p>
@@ -18756,9 +20747,9 @@
 </p:sld>
 </file>
 
-<file path=ppt/slides/slide47.xml><?xml version="1.0" encoding="utf-8"?>
+<file path=ppt/slides/slide52.xml><?xml version="1.0" encoding="utf-8"?>
 <p:sld xmlns:a="http://schemas.openxmlformats.org/drawingml/2006/main" xmlns:r="http://schemas.openxmlformats.org/officeDocument/2006/relationships" xmlns:p="http://schemas.openxmlformats.org/presentationml/2006/main">
-  <p:cSld name="Slide 47">
+  <p:cSld name="Slide 52">
     <p:spTree>
       <p:nvGrpSpPr>
         <p:cNvPr id="1" name=""/>
@@ -18956,7 +20947,7 @@
                 <a:ea typeface="Calibri" pitchFamily="34" charset="-122"/>
                 <a:cs typeface="Calibri" pitchFamily="34" charset="-120"/>
               </a:rPr>
-              <a:t>Without the projector (Activity 1): draw Africa with the Sahara and the Sahel.</a:t>
+              <a:t>Without the projector (Activity 1): use the atlas map of Africa.</a:t>
             </a:r>
             <a:endParaRPr lang="en-US" sz="2000" dirty="0"/>
           </a:p>
@@ -18977,7 +20968,7 @@
                 <a:ea typeface="Calibri" pitchFamily="34" charset="-122"/>
                 <a:cs typeface="Calibri" pitchFamily="34" charset="-120"/>
               </a:rPr>
-              <a:t>Without the projector (Activity 2): use the example of Moussa's wall.</a:t>
+              <a:t>Without the projector (Activity 2): blow sand against a stone.</a:t>
             </a:r>
             <a:endParaRPr lang="en-US" sz="2000" dirty="0"/>
           </a:p>
@@ -19046,7 +21037,7 @@
             <a:pPr algn="ctr"/>
             <a:fld id="{F7021451-1387-4CA6-816F-3879F97B5CBC}" type="slidenum">
               <a:rPr b="1" lang="en-US"/>
-              <a:t>47</a:t>
+              <a:t>52</a:t>
             </a:fld>
             <a:endParaRPr lang="en-US"/>
           </a:p>
@@ -19060,9 +21051,9 @@
 </p:sld>
 </file>
 
-<file path=ppt/slides/slide48.xml><?xml version="1.0" encoding="utf-8"?>
+<file path=ppt/slides/slide53.xml><?xml version="1.0" encoding="utf-8"?>
 <p:sld xmlns:a="http://schemas.openxmlformats.org/drawingml/2006/main" xmlns:r="http://schemas.openxmlformats.org/officeDocument/2006/relationships" xmlns:p="http://schemas.openxmlformats.org/presentationml/2006/main">
-  <p:cSld name="Slide 48">
+  <p:cSld name="Slide 53">
     <p:spTree>
       <p:nvGrpSpPr>
         <p:cNvPr id="1" name=""/>
@@ -19350,226 +21341,7 @@
             <a:pPr algn="ctr"/>
             <a:fld id="{F7021451-1387-4CA6-816F-3879F97B5CBC}" type="slidenum">
               <a:rPr b="1" lang="en-US"/>
-              <a:t>48</a:t>
-            </a:fld>
-            <a:endParaRPr lang="en-US"/>
-          </a:p>
-        </p:txBody>
-      </p:sp>
-    </p:spTree>
-  </p:cSld>
-  <p:clrMapOvr>
-    <a:masterClrMapping/>
-  </p:clrMapOvr>
-</p:sld>
-</file>
-
-<file path=ppt/slides/slide5.xml><?xml version="1.0" encoding="utf-8"?>
-<p:sld xmlns:a="http://schemas.openxmlformats.org/drawingml/2006/main" xmlns:r="http://schemas.openxmlformats.org/officeDocument/2006/relationships" xmlns:p="http://schemas.openxmlformats.org/presentationml/2006/main">
-  <p:cSld name="Slide 5">
-    <p:spTree>
-      <p:nvGrpSpPr>
-        <p:cNvPr id="1" name=""/>
-        <p:cNvGrpSpPr/>
-        <p:nvPr/>
-      </p:nvGrpSpPr>
-      <p:grpSpPr>
-        <a:xfrm>
-          <a:off x="0" y="0"/>
-          <a:ext cx="0" cy="0"/>
-          <a:chOff x="0" y="0"/>
-          <a:chExt cx="0" cy="0"/>
-        </a:xfrm>
-      </p:grpSpPr>
-      <p:sp>
-        <p:nvSpPr>
-          <p:cNvPr id="2" name="Text 0"/>
-          <p:cNvSpPr/>
-          <p:nvPr/>
-        </p:nvSpPr>
-        <p:spPr>
-          <a:xfrm>
-            <a:off x="457200" y="713232"/>
-            <a:ext cx="11368735" cy="274320"/>
-          </a:xfrm>
-          <a:prstGeom prst="rect">
-            <a:avLst/>
-          </a:prstGeom>
-          <a:noFill/>
-          <a:ln/>
-        </p:spPr>
-        <p:txBody>
-          <a:bodyPr wrap="square" lIns="0" tIns="0" rIns="0" bIns="0" rtlCol="0" anchor="ctr"/>
-          <a:lstStyle/>
-          <a:p>
-            <a:pPr algn="r" indent="0" marL="0">
-              <a:buNone/>
-            </a:pPr>
-            <a:r>
-              <a:rPr lang="en-US" sz="1400" b="1" dirty="0">
-                <a:solidFill>
-                  <a:srgbClr val="1C3F6E"/>
-                </a:solidFill>
-                <a:latin typeface="Calibri" pitchFamily="34" charset="0"/>
-                <a:ea typeface="Calibri" pitchFamily="34" charset="-122"/>
-                <a:cs typeface="Calibri" pitchFamily="34" charset="-120"/>
-              </a:rPr>
-              <a:t>HOMEWORK CORRECTION</a:t>
-            </a:r>
-            <a:endParaRPr lang="en-US" sz="1400" dirty="0"/>
-          </a:p>
-        </p:txBody>
-      </p:sp>
-      <p:pic>
-        <p:nvPicPr>
-          <p:cNvPr id="3" name="Image 0" descr="/home/claude/f4/img/minesec_sheet.png">    </p:cNvPr>
-          <p:cNvPicPr>
-            <a:picLocks noChangeAspect="1"/>
-          </p:cNvPicPr>
-          <p:nvPr/>
-        </p:nvPicPr>
-        <p:blipFill>
-          <a:blip r:embed="rId1"/>
-          <a:stretch>
-            <a:fillRect/>
-          </a:stretch>
-        </p:blipFill>
-        <p:spPr>
-          <a:xfrm>
-            <a:off x="0" y="658368"/>
-            <a:ext cx="5120640" cy="5833872"/>
-          </a:xfrm>
-          <a:prstGeom prst="rect">
-            <a:avLst/>
-          </a:prstGeom>
-        </p:spPr>
-      </p:pic>
-      <p:sp>
-        <p:nvSpPr>
-          <p:cNvPr id="4" name="Text 1"/>
-          <p:cNvSpPr/>
-          <p:nvPr/>
-        </p:nvSpPr>
-        <p:spPr>
-          <a:xfrm>
-            <a:off x="5349240" y="1005840"/>
-            <a:ext cx="6522415" cy="731520"/>
-          </a:xfrm>
-          <a:prstGeom prst="rect">
-            <a:avLst/>
-          </a:prstGeom>
-          <a:noFill/>
-          <a:ln/>
-        </p:spPr>
-        <p:txBody>
-          <a:bodyPr wrap="square" lIns="0" tIns="0" rIns="0" bIns="0" rtlCol="0" anchor="ctr">
-            <a:normAutofit/>
-          </a:bodyPr>
-          <a:lstStyle/>
-          <a:p>
-            <a:pPr algn="ctr" indent="0" marL="0">
-              <a:buNone/>
-            </a:pPr>
-            <a:r>
-              <a:rPr lang="en-US" sz="3600" b="1" dirty="0">
-                <a:solidFill>
-                  <a:srgbClr val="990011"/>
-                </a:solidFill>
-                <a:latin typeface="Times New Roman" pitchFamily="34" charset="0"/>
-                <a:ea typeface="Times New Roman" pitchFamily="34" charset="-122"/>
-                <a:cs typeface="Times New Roman" pitchFamily="34" charset="-120"/>
-              </a:rPr>
-              <a:t>Correction: Possible Answer</a:t>
-            </a:r>
-            <a:endParaRPr lang="en-US" sz="3600" dirty="0"/>
-          </a:p>
-        </p:txBody>
-      </p:sp>
-      <p:sp>
-        <p:nvSpPr>
-          <p:cNvPr id="5" name="Text 2"/>
-          <p:cNvSpPr/>
-          <p:nvPr/>
-        </p:nvSpPr>
-        <p:spPr>
-          <a:xfrm>
-            <a:off x="5349240" y="1783080"/>
-            <a:ext cx="6522415" cy="4663440"/>
-          </a:xfrm>
-          <a:prstGeom prst="rect">
-            <a:avLst/>
-          </a:prstGeom>
-          <a:noFill/>
-          <a:ln/>
-        </p:spPr>
-        <p:txBody>
-          <a:bodyPr wrap="square" lIns="0" tIns="0" rIns="0" bIns="0" rtlCol="0" anchor="t"/>
-          <a:lstStyle/>
-          <a:p>
-            <a:pPr algn="l" indent="0" marL="0">
-              <a:spcAft>
-                <a:spcPts val="800"/>
-              </a:spcAft>
-              <a:buNone/>
-            </a:pPr>
-            <a:r>
-              <a:rPr lang="en-US" sz="4000" dirty="0">
-                <a:solidFill>
-                  <a:srgbClr val="111111"/>
-                </a:solidFill>
-                <a:latin typeface="Times New Roman" pitchFamily="34" charset="0"/>
-                <a:ea typeface="Times New Roman" pitchFamily="34" charset="-122"/>
-                <a:cs typeface="Times New Roman" pitchFamily="34" charset="-120"/>
-              </a:rPr>
-              <a:t>The Sahara is in North Africa; the Sahel is a belt south of the Sahara, from Senegal to Sudan (including the Far North of Cameroon); the Kalahari is in Southern Africa (Botswana).</a:t>
-            </a:r>
-            <a:endParaRPr lang="en-US" sz="4000" dirty="0"/>
-          </a:p>
-        </p:txBody>
-      </p:sp>
-      <p:sp>
-        <p:nvSpPr>
-          <p:cNvPr id="25" name="Slide Number Placeholder 0"/>
-          <p:cNvSpPr>
-            <a:spLocks noGrp="1"/>
-          </p:cNvSpPr>
-          <p:nvPr>
-            <p:ph type="sldNum" sz="quarter" idx="4294967295"/>
-          </p:nvPr>
-        </p:nvSpPr>
-        <p:spPr>
-          <a:xfrm>
-            <a:off x="27432" y="91440"/>
-            <a:ext cx="585216" cy="475488"/>
-          </a:xfrm>
-          <a:prstGeom prst="rect">
-            <a:avLst/>
-          </a:prstGeom>
-          <a:extLst>
-            <a:ext uri="{C572A759-6A51-4108-AA02-DFA0A04FC94B}">
-              <ma14:wrappingTextBoxFlag xmlns:ma14="http://schemas.microsoft.com/office/mac/drawingml/2011/main" val="0"/>
-            </a:ext>
-          </a:extLst>
-        </p:spPr>
-        <p:txBody>
-          <a:bodyPr/>
-          <a:lstStyle>
-            <a:lvl1pPr>
-              <a:defRPr sz="2000">
-                <a:solidFill>
-                  <a:srgbClr val="FFFFFF"/>
-                </a:solidFill>
-                <a:latin typeface="Calibri"/>
-                <a:ea typeface="Calibri"/>
-                <a:cs typeface="Calibri"/>
-              </a:defRPr>
-            </a:lvl1pPr>
-          </a:lstStyle>
-          <a:p>
-            <a:pPr algn="ctr"/>
-            <a:fld id="{F7021451-1387-4CA6-816F-3879F97B5CBC}" type="slidenum">
-              <a:rPr b="1" lang="en-US"/>
-              <a:t>5</a:t>
+              <a:t>53</a:t>
             </a:fld>
             <a:endParaRPr lang="en-US"/>
           </a:p>

--- a/lecons/F3/31_FORM4_LESSON27_SemiArid_Desert_Landscapes.pptx
+++ b/lecons/F3/31_FORM4_LESSON27_SemiArid_Desert_Landscapes.pptx
@@ -3458,7 +3458,7 @@
           <a:p>
             <a:r>
               <a:rPr lang="en-US" dirty="0"/>
-              <a:t>Before we start the new lesson, let us correct the homework I gave you at the end of Lesson 26: Impact of Wave Action on Human Development along Coastal Areas. The question was: On a map of Africa in your atlas, find the Sahara, the Sahel and the Kalahari. Write in which part of Africa each one is located. Take out your exercise books.</a:t>
+              <a:t>Before we start the new lesson, let us correct the homework I gave you at the end of Lesson 26: Impact of Wave Action on Human Development along Coastal Areas. The question was: Name the largest hot desert of Africa. Take out your exercise books.</a:t>
             </a:r>
             <a:endParaRPr lang="en-US" dirty="0"/>
           </a:p>
@@ -4162,7 +4162,7 @@
           <a:p>
             <a:r>
               <a:rPr lang="en-US" dirty="0"/>
-              <a:t>For your homework: After the next windy day, look around your compound. Find a place where sand or dust has piled up, for example behind a wall, a stone or a bush, and write down why you think it collected there. We shall correct it at the beginning of our next lesson.</a:t>
+              <a:t>For your homework: Name the two types of sand dunes. We shall correct it at the beginning of our next lesson.</a:t>
             </a:r>
             <a:endParaRPr lang="en-US" dirty="0"/>
           </a:p>
@@ -4426,7 +4426,7 @@
           <a:p>
             <a:r>
               <a:rPr lang="en-US" dirty="0"/>
-              <a:t>Here is a good answer. The Sahara is in North Africa; the Sahel is a belt south of the Sahara, from Senegal to Sudan (including the Far North of Cameroon); the Kalahari is in Southern Africa (Botswana). Compare it with your own answer and correct your work in red.</a:t>
+              <a:t>Here is a good answer. The Sahara. Compare it with your own answer and correct your work in red.</a:t>
             </a:r>
             <a:endParaRPr lang="en-US" dirty="0"/>
           </a:p>
@@ -15170,7 +15170,7 @@
         <p:spPr>
           <a:xfrm>
             <a:off x="0" y="658368"/>
-            <a:ext cx="3840480" cy="5833872"/>
+            <a:ext cx="5120640" cy="5833872"/>
           </a:xfrm>
           <a:prstGeom prst="rect">
             <a:avLst/>
@@ -15185,8 +15185,8 @@
         </p:nvSpPr>
         <p:spPr>
           <a:xfrm>
-            <a:off x="4069080" y="1005840"/>
-            <a:ext cx="7802575" cy="731520"/>
+            <a:off x="5349240" y="1005840"/>
+            <a:ext cx="6522415" cy="731520"/>
           </a:xfrm>
           <a:prstGeom prst="rect">
             <a:avLst/>
@@ -15226,8 +15226,8 @@
         </p:nvSpPr>
         <p:spPr>
           <a:xfrm>
-            <a:off x="4069080" y="1783080"/>
-            <a:ext cx="7802575" cy="4663440"/>
+            <a:off x="5349240" y="1783080"/>
+            <a:ext cx="6522415" cy="4663440"/>
           </a:xfrm>
           <a:prstGeom prst="rect">
             <a:avLst/>
@@ -15274,7 +15274,7 @@
                 <a:ea typeface="Times New Roman" pitchFamily="34" charset="-122"/>
                 <a:cs typeface="Times New Roman" pitchFamily="34" charset="-120"/>
               </a:rPr>
-              <a:t>On a map of Africa in your atlas, find the Sahara, the Sahel and the Kalahari. Write in which part of Africa each one is located.</a:t>
+              <a:t>Name the largest hot desert of Africa.</a:t>
             </a:r>
             <a:endParaRPr lang="en-US" sz="4000" dirty="0"/>
           </a:p>
@@ -17116,7 +17116,7 @@
         <p:spPr>
           <a:xfrm>
             <a:off x="0" y="658368"/>
-            <a:ext cx="3840480" cy="5833872"/>
+            <a:ext cx="5120640" cy="5833872"/>
           </a:xfrm>
           <a:prstGeom prst="rect">
             <a:avLst/>
@@ -17131,8 +17131,8 @@
         </p:nvSpPr>
         <p:spPr>
           <a:xfrm>
-            <a:off x="4069080" y="1005840"/>
-            <a:ext cx="7802575" cy="731520"/>
+            <a:off x="5349240" y="1005840"/>
+            <a:ext cx="6522415" cy="731520"/>
           </a:xfrm>
           <a:prstGeom prst="rect">
             <a:avLst/>
@@ -17172,8 +17172,8 @@
         </p:nvSpPr>
         <p:spPr>
           <a:xfrm>
-            <a:off x="4069080" y="1783080"/>
-            <a:ext cx="7802575" cy="4663440"/>
+            <a:off x="5349240" y="1783080"/>
+            <a:ext cx="6522415" cy="4663440"/>
           </a:xfrm>
           <a:prstGeom prst="rect">
             <a:avLst/>
@@ -17200,7 +17200,7 @@
                 <a:ea typeface="Times New Roman" pitchFamily="34" charset="-122"/>
                 <a:cs typeface="Times New Roman" pitchFamily="34" charset="-120"/>
               </a:rPr>
-              <a:t>After the next windy day, look around your compound. Find a place where sand or dust has piled up, for example behind a wall, a stone or a bush, and write down why you think it collected there.</a:t>
+              <a:t>Name the two types of sand dunes.</a:t>
             </a:r>
             <a:endParaRPr lang="en-US" sz="4000" dirty="0"/>
           </a:p>
@@ -19081,7 +19081,7 @@
                 <a:ea typeface="Times New Roman" pitchFamily="34" charset="-122"/>
                 <a:cs typeface="Times New Roman" pitchFamily="34" charset="-120"/>
               </a:rPr>
-              <a:t>The Sahara is in North Africa; the Sahel is a belt south of the Sahara, from Senegal to Sudan (including the Far North of Cameroon); the Kalahari is in Southern Africa (Botswana).</a:t>
+              <a:t>The Sahara.</a:t>
             </a:r>
             <a:endParaRPr lang="en-US" sz="4000" dirty="0"/>
           </a:p>
@@ -20359,7 +20359,7 @@
                           <a:ea typeface="Calibri" pitchFamily="34" charset="-122"/>
                           <a:cs typeface="Calibri" pitchFamily="34" charset="-120"/>
                         </a:rPr>
-                        <a:t>After the next windy day, look around your compound. Find a place where sand or dust has piled up, for example behind a wall, a stone or a bush, and write down why you think it collected there.</a:t>
+                        <a:t>Name the two types of sand dunes.</a:t>
                       </a:r>
                       <a:endParaRPr lang="en-US" sz="1600" dirty="0">
                         <a:latin typeface="Calibri" charset="0"/>
